--- a/docs/presentations/CRM Integration Deck.pptx
+++ b/docs/presentations/CRM Integration Deck.pptx
@@ -10,9 +10,10 @@
     <p:sldId id="258" r:id="rId4"/>
     <p:sldId id="259" r:id="rId5"/>
     <p:sldId id="260" r:id="rId6"/>
+    <p:sldId id="261" r:id="rId7"/>
   </p:sldIdLst>
   <p:notesMasterIdLst>
-    <p:notesMasterId r:id="rId7"/>
+    <p:notesMasterId r:id="rId8"/>
   </p:notesMasterIdLst>
   <p:sldSz cx="12192000" cy="6858000"/>
   <p:notesSz cx="6858000" cy="12192000"/>
@@ -882,6 +883,94 @@
             <a:fld id="{F7021451-1387-4CA6-816F-3879F97B5CBC}" type="slidenum">
               <a:rPr lang="en-US"/>
               <a:t>5</a:t>
+            </a:fld>
+            <a:endParaRPr lang="en-US"/>
+          </a:p>
+        </p:txBody>
+      </p:sp>
+    </p:spTree>
+    <p:extLst>
+      <p:ext uri="{BB962C8B-B14F-4D97-AF65-F5344CB8AC3E}">
+        <p14:creationId xmlns:p14="http://schemas.microsoft.com/office/powerpoint/2010/main" val="1024086991"/>
+      </p:ext>
+    </p:extLst>
+  </p:cSld>
+  <p:clrMapOvr>
+    <a:masterClrMapping/>
+  </p:clrMapOvr>
+</p:notes>
+</file>
+
+<file path=ppt/notesSlides/notesSlide6.xml><?xml version="1.0" encoding="utf-8"?>
+<p:notes xmlns:a="http://schemas.openxmlformats.org/drawingml/2006/main" xmlns:r="http://schemas.openxmlformats.org/officeDocument/2006/relationships" xmlns:p="http://schemas.openxmlformats.org/presentationml/2006/main">
+  <p:cSld>
+    <p:spTree>
+      <p:nvGrpSpPr>
+        <p:cNvPr id="1" name=""/>
+        <p:cNvGrpSpPr/>
+        <p:nvPr/>
+      </p:nvGrpSpPr>
+      <p:grpSpPr>
+        <a:xfrm>
+          <a:off x="0" y="0"/>
+          <a:ext cx="0" cy="0"/>
+          <a:chOff x="0" y="0"/>
+          <a:chExt cx="0" cy="0"/>
+        </a:xfrm>
+      </p:grpSpPr>
+      <p:sp>
+        <p:nvSpPr>
+          <p:cNvPr id="2" name="Slide Image Placeholder 1"/>
+          <p:cNvSpPr>
+            <a:spLocks noGrp="1" noRot="1" noChangeAspect="1"/>
+          </p:cNvSpPr>
+          <p:nvPr>
+            <p:ph type="sldImg"/>
+          </p:nvPr>
+        </p:nvSpPr>
+        <p:spPr/>
+      </p:sp>
+      <p:sp>
+        <p:nvSpPr>
+          <p:cNvPr id="3" name="Notes Placeholder 2"/>
+          <p:cNvSpPr>
+            <a:spLocks noGrp="1"/>
+          </p:cNvSpPr>
+          <p:nvPr>
+            <p:ph type="body" idx="1"/>
+          </p:nvPr>
+        </p:nvSpPr>
+        <p:spPr/>
+        <p:txBody>
+          <a:bodyPr/>
+          <a:lstStyle/>
+          <a:p>
+            <a:r>
+              <a:rPr lang="en-US" dirty="0"/>
+              <a:t/>
+            </a:r>
+            <a:endParaRPr lang="en-US" dirty="0"/>
+          </a:p>
+        </p:txBody>
+      </p:sp>
+      <p:sp>
+        <p:nvSpPr>
+          <p:cNvPr id="4" name="Slide Number Placeholder 3"/>
+          <p:cNvSpPr>
+            <a:spLocks noGrp="1"/>
+          </p:cNvSpPr>
+          <p:nvPr>
+            <p:ph type="sldNum" sz="quarter" idx="10"/>
+          </p:nvPr>
+        </p:nvSpPr>
+        <p:spPr/>
+        <p:txBody>
+          <a:bodyPr/>
+          <a:lstStyle/>
+          <a:p>
+            <a:fld id="{F7021451-1387-4CA6-816F-3879F97B5CBC}" type="slidenum">
+              <a:rPr lang="en-US"/>
+              <a:t>6</a:t>
             </a:fld>
             <a:endParaRPr lang="en-US"/>
           </a:p>
@@ -1448,11 +1537,11 @@
                 <a:solidFill>
                   <a:srgbClr val="5A32ED"/>
                 </a:solidFill>
-                <a:latin typeface="Aptos" pitchFamily="34" charset="0"/>
-                <a:ea typeface="Aptos" pitchFamily="34" charset="-122"/>
-                <a:cs typeface="Aptos" pitchFamily="34" charset="-120"/>
-              </a:rPr>
-              <a:t>BENEFITS OVERVIEW</a:t>
+                <a:latin typeface="Arial" pitchFamily="34" charset="0"/>
+                <a:ea typeface="Arial" pitchFamily="34" charset="-122"/>
+                <a:cs typeface="Arial" pitchFamily="34" charset="-120"/>
+              </a:rPr>
+              <a:t>STATFLO PARTNERSHIP PROPOSAL</a:t>
             </a:r>
             <a:endParaRPr lang="en-US" sz="850" dirty="0"/>
           </a:p>
@@ -1487,11 +1576,11 @@
                 <a:solidFill>
                   <a:srgbClr val="5A32ED"/>
                 </a:solidFill>
-                <a:latin typeface="Aptos" pitchFamily="34" charset="0"/>
-                <a:ea typeface="Aptos" pitchFamily="34" charset="-122"/>
-                <a:cs typeface="Aptos" pitchFamily="34" charset="-120"/>
-              </a:rPr>
-              <a:t>LEADREACHER × CRM</a:t>
+                <a:latin typeface="Arial" pitchFamily="34" charset="0"/>
+                <a:ea typeface="Arial" pitchFamily="34" charset="-122"/>
+                <a:cs typeface="Arial" pitchFamily="34" charset="-120"/>
+              </a:rPr>
+              <a:t>LEADREACHER + STATFLO</a:t>
             </a:r>
             <a:endParaRPr lang="en-US" sz="900" dirty="0"/>
           </a:p>
@@ -1526,11 +1615,11 @@
                 <a:solidFill>
                   <a:srgbClr val="101426"/>
                 </a:solidFill>
-                <a:latin typeface="Aptos Display" pitchFamily="34" charset="0"/>
-                <a:ea typeface="Aptos Display" pitchFamily="34" charset="-122"/>
-                <a:cs typeface="Aptos Display" pitchFamily="34" charset="-120"/>
-              </a:rPr>
-              <a:t>CRM integration</a:t>
+                <a:latin typeface="Arial" pitchFamily="34" charset="0"/>
+                <a:ea typeface="Arial" pitchFamily="34" charset="-122"/>
+                <a:cs typeface="Arial" pitchFamily="34" charset="-120"/>
+              </a:rPr>
+              <a:t>Qualified outreach</a:t>
             </a:r>
             <a:endParaRPr lang="en-US" sz="4300" dirty="0"/>
           </a:p>
@@ -1565,11 +1654,11 @@
                 <a:solidFill>
                   <a:srgbClr val="5A32ED"/>
                 </a:solidFill>
-                <a:latin typeface="Aptos Display" pitchFamily="34" charset="0"/>
-                <a:ea typeface="Aptos Display" pitchFamily="34" charset="-122"/>
-                <a:cs typeface="Aptos Display" pitchFamily="34" charset="-120"/>
-              </a:rPr>
-              <a:t>deck</a:t>
+                <a:latin typeface="Arial" pitchFamily="34" charset="0"/>
+                <a:ea typeface="Arial" pitchFamily="34" charset="-122"/>
+                <a:cs typeface="Arial" pitchFamily="34" charset="-120"/>
+              </a:rPr>
+              <a:t>integration</a:t>
             </a:r>
             <a:endParaRPr lang="en-US" sz="4300" dirty="0"/>
           </a:p>
@@ -1606,11 +1695,11 @@
                 <a:solidFill>
                   <a:srgbClr val="646A7E"/>
                 </a:solidFill>
-                <a:latin typeface="Aptos" pitchFamily="34" charset="0"/>
-                <a:ea typeface="Aptos" pitchFamily="34" charset="-122"/>
-                <a:cs typeface="Aptos" pitchFamily="34" charset="-120"/>
-              </a:rPr>
-              <a:t>A connected path from first outreach to closed opportunity.</a:t>
+                <a:latin typeface="Arial" pitchFamily="34" charset="0"/>
+                <a:ea typeface="Arial" pitchFamily="34" charset="-122"/>
+                <a:cs typeface="Arial" pitchFamily="34" charset="-120"/>
+              </a:rPr>
+              <a:t>Turn approved Statflo audiences into personalized, reviewable outreach at scale.</a:t>
             </a:r>
             <a:endParaRPr lang="en-US" sz="1800" dirty="0"/>
           </a:p>
@@ -1625,7 +1714,7 @@
         <p:spPr>
           <a:xfrm>
             <a:off x="694944" y="4224528"/>
-            <a:ext cx="1627632" cy="329184"/>
+            <a:ext cx="1243584" cy="329184"/>
           </a:xfrm>
           <a:prstGeom prst="roundRect">
             <a:avLst>
@@ -1652,7 +1741,7 @@
         <p:spPr>
           <a:xfrm>
             <a:off x="804672" y="4315968"/>
-            <a:ext cx="1408176" cy="109728"/>
+            <a:ext cx="1024128" cy="109728"/>
           </a:xfrm>
           <a:prstGeom prst="rect">
             <a:avLst/>
@@ -1672,11 +1761,11 @@
                 <a:solidFill>
                   <a:srgbClr val="5A32ED"/>
                 </a:solidFill>
-                <a:latin typeface="Aptos" pitchFamily="34" charset="0"/>
-                <a:ea typeface="Aptos" pitchFamily="34" charset="-122"/>
-                <a:cs typeface="Aptos" pitchFamily="34" charset="-120"/>
-              </a:rPr>
-              <a:t>CONNECTED CONTEXT</a:t>
+                <a:latin typeface="Arial" pitchFamily="34" charset="0"/>
+                <a:ea typeface="Arial" pitchFamily="34" charset="-122"/>
+                <a:cs typeface="Arial" pitchFamily="34" charset="-120"/>
+              </a:rPr>
+              <a:t>SMART LISTS</a:t>
             </a:r>
             <a:endParaRPr lang="en-US" sz="850" dirty="0"/>
           </a:p>
@@ -1690,8 +1779,8 @@
         </p:nvSpPr>
         <p:spPr>
           <a:xfrm>
-            <a:off x="2468880" y="4224528"/>
-            <a:ext cx="1335024" cy="329184"/>
+            <a:off x="2103120" y="4224528"/>
+            <a:ext cx="1773936" cy="329184"/>
           </a:xfrm>
           <a:prstGeom prst="roundRect">
             <a:avLst>
@@ -1717,8 +1806,8 @@
         </p:nvSpPr>
         <p:spPr>
           <a:xfrm>
-            <a:off x="2578608" y="4315968"/>
-            <a:ext cx="1115568" cy="109728"/>
+            <a:off x="2212848" y="4315968"/>
+            <a:ext cx="1554480" cy="109728"/>
           </a:xfrm>
           <a:prstGeom prst="rect">
             <a:avLst/>
@@ -1738,11 +1827,11 @@
                 <a:solidFill>
                   <a:srgbClr val="5A32ED"/>
                 </a:solidFill>
-                <a:latin typeface="Aptos" pitchFamily="34" charset="0"/>
-                <a:ea typeface="Aptos" pitchFamily="34" charset="-122"/>
-                <a:cs typeface="Aptos" pitchFamily="34" charset="-120"/>
-              </a:rPr>
-              <a:t>FASTER ACTION</a:t>
+                <a:latin typeface="Arial" pitchFamily="34" charset="0"/>
+                <a:ea typeface="Arial" pitchFamily="34" charset="-122"/>
+                <a:cs typeface="Arial" pitchFamily="34" charset="-120"/>
+              </a:rPr>
+              <a:t>PERSONALIZED VIDEO</a:t>
             </a:r>
             <a:endParaRPr lang="en-US" sz="850" dirty="0"/>
           </a:p>
@@ -1756,8 +1845,8 @@
         </p:nvSpPr>
         <p:spPr>
           <a:xfrm>
-            <a:off x="3950208" y="4224528"/>
-            <a:ext cx="1554480" cy="329184"/>
+            <a:off x="4041648" y="4224528"/>
+            <a:ext cx="1719072" cy="329184"/>
           </a:xfrm>
           <a:prstGeom prst="roundRect">
             <a:avLst>
@@ -1783,8 +1872,8 @@
         </p:nvSpPr>
         <p:spPr>
           <a:xfrm>
-            <a:off x="4059936" y="4315968"/>
-            <a:ext cx="1335024" cy="109728"/>
+            <a:off x="4151376" y="4315968"/>
+            <a:ext cx="1499616" cy="109728"/>
           </a:xfrm>
           <a:prstGeom prst="rect">
             <a:avLst/>
@@ -1804,11 +1893,11 @@
                 <a:solidFill>
                   <a:srgbClr val="5A32ED"/>
                 </a:solidFill>
-                <a:latin typeface="Aptos" pitchFamily="34" charset="0"/>
-                <a:ea typeface="Aptos" pitchFamily="34" charset="-122"/>
-                <a:cs typeface="Aptos" pitchFamily="34" charset="-120"/>
-              </a:rPr>
-              <a:t>CLEARER REPORTING</a:t>
+                <a:latin typeface="Arial" pitchFamily="34" charset="0"/>
+                <a:ea typeface="Arial" pitchFamily="34" charset="-122"/>
+                <a:cs typeface="Arial" pitchFamily="34" charset="-120"/>
+              </a:rPr>
+              <a:t>COMBINED REPORTING</a:t>
             </a:r>
             <a:endParaRPr lang="en-US" sz="850" dirty="0"/>
           </a:p>
@@ -1989,11 +2078,11 @@
                 <a:solidFill>
                   <a:srgbClr val="101426"/>
                 </a:solidFill>
-                <a:latin typeface="Aptos Display" pitchFamily="34" charset="0"/>
-                <a:ea typeface="Aptos Display" pitchFamily="34" charset="-122"/>
-                <a:cs typeface="Aptos Display" pitchFamily="34" charset="-120"/>
-              </a:rPr>
-              <a:t>Outreach context arrives ready to act on.</a:t>
+                <a:latin typeface="Arial" pitchFamily="34" charset="0"/>
+                <a:ea typeface="Arial" pitchFamily="34" charset="-122"/>
+                <a:cs typeface="Arial" pitchFamily="34" charset="-120"/>
+              </a:rPr>
+              <a:t>Each platform does what it does best.</a:t>
             </a:r>
             <a:endParaRPr lang="en-US" sz="1800" dirty="0"/>
           </a:p>
@@ -2030,11 +2119,11 @@
                 <a:solidFill>
                   <a:srgbClr val="646A7E"/>
                 </a:solidFill>
-                <a:latin typeface="Aptos" pitchFamily="34" charset="0"/>
-                <a:ea typeface="Aptos" pitchFamily="34" charset="-122"/>
-                <a:cs typeface="Aptos" pitchFamily="34" charset="-120"/>
-              </a:rPr>
-              <a:t>Replies, source, campaign context and next-step visibility stay together.</a:t>
+                <a:latin typeface="Arial" pitchFamily="34" charset="0"/>
+                <a:ea typeface="Arial" pitchFamily="34" charset="-122"/>
+                <a:cs typeface="Arial" pitchFamily="34" charset="-120"/>
+              </a:rPr>
+              <a:t>Statflo owns customer records and compliant conversations. LeadReacher handles audience intelligence, personalized outreach and campaign reporting.</a:t>
             </a:r>
             <a:endParaRPr lang="en-US" sz="1150" dirty="0"/>
           </a:p>
@@ -2092,11 +2181,11 @@
                 <a:solidFill>
                   <a:srgbClr val="8A8FA0"/>
                 </a:solidFill>
-                <a:latin typeface="Aptos" pitchFamily="34" charset="0"/>
-                <a:ea typeface="Aptos" pitchFamily="34" charset="-122"/>
-                <a:cs typeface="Aptos" pitchFamily="34" charset="-120"/>
-              </a:rPr>
-              <a:t>LeadReacher CRM integration deck</a:t>
+                <a:latin typeface="Arial" pitchFamily="34" charset="0"/>
+                <a:ea typeface="Arial" pitchFamily="34" charset="-122"/>
+                <a:cs typeface="Arial" pitchFamily="34" charset="-120"/>
+              </a:rPr>
+              <a:t>LeadReacher + Statflo integration proposal</a:t>
             </a:r>
             <a:endParaRPr lang="en-US" sz="750" dirty="0"/>
           </a:p>
@@ -2270,11 +2359,11 @@
                 <a:solidFill>
                   <a:srgbClr val="5A32ED"/>
                 </a:solidFill>
-                <a:latin typeface="Aptos" pitchFamily="34" charset="0"/>
-                <a:ea typeface="Aptos" pitchFamily="34" charset="-122"/>
-                <a:cs typeface="Aptos" pitchFamily="34" charset="-120"/>
-              </a:rPr>
-              <a:t>CRM INTEGRATION</a:t>
+                <a:latin typeface="Arial" pitchFamily="34" charset="0"/>
+                <a:ea typeface="Arial" pitchFamily="34" charset="-122"/>
+                <a:cs typeface="Arial" pitchFamily="34" charset="-120"/>
+              </a:rPr>
+              <a:t>01 | WHAT</a:t>
             </a:r>
             <a:endParaRPr lang="en-US" sz="850" dirty="0"/>
           </a:p>
@@ -2288,8 +2377,8 @@
         </p:nvSpPr>
         <p:spPr>
           <a:xfrm>
-            <a:off x="658368" y="1033272"/>
-            <a:ext cx="4754880" cy="164592"/>
+            <a:off x="658368" y="941832"/>
+            <a:ext cx="3291840" cy="164592"/>
           </a:xfrm>
           <a:prstGeom prst="rect">
             <a:avLst/>
@@ -2309,11 +2398,11 @@
                 <a:solidFill>
                   <a:srgbClr val="5A32ED"/>
                 </a:solidFill>
-                <a:latin typeface="Aptos" pitchFamily="34" charset="0"/>
-                <a:ea typeface="Aptos" pitchFamily="34" charset="-122"/>
-                <a:cs typeface="Aptos" pitchFamily="34" charset="-120"/>
-              </a:rPr>
-              <a:t>ONE CONNECTED CUSTOMER JOURNEY</a:t>
+                <a:latin typeface="Arial" pitchFamily="34" charset="0"/>
+                <a:ea typeface="Arial" pitchFamily="34" charset="-122"/>
+                <a:cs typeface="Arial" pitchFamily="34" charset="-120"/>
+              </a:rPr>
+              <a:t>THE INTEGRATION</a:t>
             </a:r>
             <a:endParaRPr lang="en-US" sz="900" dirty="0"/>
           </a:p>
@@ -2327,86 +2416,8 @@
         </p:nvSpPr>
         <p:spPr>
           <a:xfrm>
-            <a:off x="658368" y="1353312"/>
-            <a:ext cx="10881360" cy="502920"/>
-          </a:xfrm>
-          <a:prstGeom prst="rect">
-            <a:avLst/>
-          </a:prstGeom>
-          <a:noFill/>
-          <a:ln/>
-        </p:spPr>
-        <p:txBody>
-          <a:bodyPr wrap="square" lIns="0" tIns="0" rIns="0" bIns="0" rtlCol="0" anchor="ctr"/>
-          <a:lstStyle/>
-          <a:p>
-            <a:pPr indent="0" marL="0">
-              <a:buNone/>
-            </a:pPr>
-            <a:r>
-              <a:rPr lang="en-US" sz="3000" b="1" dirty="0">
-                <a:solidFill>
-                  <a:srgbClr val="101426"/>
-                </a:solidFill>
-                <a:latin typeface="Aptos Display" pitchFamily="34" charset="0"/>
-                <a:ea typeface="Aptos Display" pitchFamily="34" charset="-122"/>
-                <a:cs typeface="Aptos Display" pitchFamily="34" charset="-120"/>
-              </a:rPr>
-              <a:t>One connected path.</a:t>
-            </a:r>
-            <a:endParaRPr lang="en-US" sz="3000" dirty="0"/>
-          </a:p>
-        </p:txBody>
-      </p:sp>
-      <p:sp>
-        <p:nvSpPr>
-          <p:cNvPr id="7" name="Text 4"/>
-          <p:cNvSpPr/>
-          <p:nvPr/>
-        </p:nvSpPr>
-        <p:spPr>
-          <a:xfrm>
-            <a:off x="658368" y="1792224"/>
-            <a:ext cx="10881360" cy="566928"/>
-          </a:xfrm>
-          <a:prstGeom prst="rect">
-            <a:avLst/>
-          </a:prstGeom>
-          <a:noFill/>
-          <a:ln/>
-        </p:spPr>
-        <p:txBody>
-          <a:bodyPr wrap="square" lIns="0" tIns="0" rIns="0" bIns="0" rtlCol="0" anchor="ctr"/>
-          <a:lstStyle/>
-          <a:p>
-            <a:pPr indent="0" marL="0">
-              <a:buNone/>
-            </a:pPr>
-            <a:r>
-              <a:rPr lang="en-US" sz="3000" b="1" dirty="0">
-                <a:solidFill>
-                  <a:srgbClr val="5A32ED"/>
-                </a:solidFill>
-                <a:latin typeface="Aptos Display" pitchFamily="34" charset="0"/>
-                <a:ea typeface="Aptos Display" pitchFamily="34" charset="-122"/>
-                <a:cs typeface="Aptos Display" pitchFamily="34" charset="-120"/>
-              </a:rPr>
-              <a:t>From outreach to revenue.</a:t>
-            </a:r>
-            <a:endParaRPr lang="en-US" sz="3000" dirty="0"/>
-          </a:p>
-        </p:txBody>
-      </p:sp>
-      <p:sp>
-        <p:nvSpPr>
-          <p:cNvPr id="8" name="Text 5"/>
-          <p:cNvSpPr/>
-          <p:nvPr/>
-        </p:nvSpPr>
-        <p:spPr>
-          <a:xfrm>
-            <a:off x="7059168" y="1572768"/>
-            <a:ext cx="4297680" cy="612648"/>
+            <a:off x="658368" y="1188720"/>
+            <a:ext cx="6766560" cy="457200"/>
           </a:xfrm>
           <a:prstGeom prst="rect">
             <a:avLst/>
@@ -2424,63 +2435,83 @@
               <a:buNone/>
             </a:pPr>
             <a:r>
-              <a:rPr lang="en-US" sz="1500" dirty="0">
+              <a:rPr lang="en-US" sz="2600" b="1" dirty="0">
+                <a:solidFill>
+                  <a:srgbClr val="101426"/>
+                </a:solidFill>
+                <a:latin typeface="Arial" pitchFamily="34" charset="0"/>
+                <a:ea typeface="Arial" pitchFamily="34" charset="-122"/>
+                <a:cs typeface="Arial" pitchFamily="34" charset="-120"/>
+              </a:rPr>
+              <a:t>One audience. Five connected steps.</a:t>
+            </a:r>
+            <a:endParaRPr lang="en-US" sz="2600" dirty="0"/>
+          </a:p>
+        </p:txBody>
+      </p:sp>
+      <p:sp>
+        <p:nvSpPr>
+          <p:cNvPr id="7" name="Text 4"/>
+          <p:cNvSpPr/>
+          <p:nvPr/>
+        </p:nvSpPr>
+        <p:spPr>
+          <a:xfrm>
+            <a:off x="7818120" y="1234440"/>
+            <a:ext cx="3383280" cy="329184"/>
+          </a:xfrm>
+          <a:prstGeom prst="rect">
+            <a:avLst/>
+          </a:prstGeom>
+          <a:noFill/>
+          <a:ln/>
+        </p:spPr>
+        <p:txBody>
+          <a:bodyPr wrap="square" lIns="0" tIns="0" rIns="0" bIns="0" rtlCol="0" anchor="ctr">
+            <a:normAutofit/>
+          </a:bodyPr>
+          <a:lstStyle/>
+          <a:p>
+            <a:pPr indent="0" marL="0">
+              <a:buNone/>
+            </a:pPr>
+            <a:r>
+              <a:rPr lang="en-US" sz="1080" dirty="0">
                 <a:solidFill>
                   <a:srgbClr val="646A7E"/>
                 </a:solidFill>
-                <a:latin typeface="Aptos" pitchFamily="34" charset="0"/>
-                <a:ea typeface="Aptos" pitchFamily="34" charset="-122"/>
-                <a:cs typeface="Aptos" pitchFamily="34" charset="-120"/>
-              </a:rPr>
-              <a:t>The CRM becomes the shared history for every conversation LeadReacher creates.</a:t>
-            </a:r>
-            <a:endParaRPr lang="en-US" sz="1500" dirty="0"/>
-          </a:p>
-        </p:txBody>
-      </p:sp>
-      <p:sp>
-        <p:nvSpPr>
-          <p:cNvPr id="9" name="Shape 6"/>
-          <p:cNvSpPr/>
-          <p:nvPr/>
-        </p:nvSpPr>
-        <p:spPr>
-          <a:xfrm>
-            <a:off x="1234440" y="3337560"/>
-            <a:ext cx="9674352" cy="0"/>
-          </a:xfrm>
-          <a:prstGeom prst="line">
-            <a:avLst/>
-          </a:prstGeom>
-          <a:noFill/>
-          <a:ln w="27940">
-            <a:solidFill>
-              <a:srgbClr val="D7CCFF"/>
-            </a:solidFill>
-            <a:prstDash val="solid"/>
-          </a:ln>
-        </p:spPr>
-      </p:sp>
-      <p:sp>
-        <p:nvSpPr>
-          <p:cNvPr id="10" name="Shape 7"/>
-          <p:cNvSpPr/>
-          <p:nvPr/>
-        </p:nvSpPr>
-        <p:spPr>
-          <a:xfrm>
-            <a:off x="1005840" y="2852928"/>
-            <a:ext cx="987552" cy="987552"/>
-          </a:xfrm>
-          <a:prstGeom prst="ellipse">
-            <a:avLst/>
+                <a:latin typeface="Arial" pitchFamily="34" charset="0"/>
+                <a:ea typeface="Arial" pitchFamily="34" charset="-122"/>
+                <a:cs typeface="Arial" pitchFamily="34" charset="-120"/>
+              </a:rPr>
+              <a:t>A proposed workflow that keeps Statflo at the centre of the customer relationship.</a:t>
+            </a:r>
+            <a:endParaRPr lang="en-US" sz="1080" dirty="0"/>
+          </a:p>
+        </p:txBody>
+      </p:sp>
+      <p:sp>
+        <p:nvSpPr>
+          <p:cNvPr id="8" name="Shape 5"/>
+          <p:cNvSpPr/>
+          <p:nvPr/>
+        </p:nvSpPr>
+        <p:spPr>
+          <a:xfrm>
+            <a:off x="658368" y="1993392"/>
+            <a:ext cx="1901952" cy="1901952"/>
+          </a:xfrm>
+          <a:prstGeom prst="roundRect">
+            <a:avLst>
+              <a:gd name="adj" fmla="val 5769"/>
+            </a:avLst>
           </a:prstGeom>
           <a:solidFill>
             <a:srgbClr val="FFFFFF"/>
           </a:solidFill>
-          <a:ln w="19050">
+          <a:ln w="10795">
             <a:solidFill>
-              <a:srgbClr val="5A32ED"/>
+              <a:srgbClr val="D7CCFF"/>
             </a:solidFill>
             <a:prstDash val="solid"/>
           </a:ln>
@@ -2495,143 +2526,169 @@
       </p:sp>
       <p:sp>
         <p:nvSpPr>
+          <p:cNvPr id="9" name="Text 6"/>
+          <p:cNvSpPr/>
+          <p:nvPr/>
+        </p:nvSpPr>
+        <p:spPr>
+          <a:xfrm>
+            <a:off x="859536" y="2258568"/>
+            <a:ext cx="402336" cy="118872"/>
+          </a:xfrm>
+          <a:prstGeom prst="rect">
+            <a:avLst/>
+          </a:prstGeom>
+          <a:noFill/>
+          <a:ln/>
+        </p:spPr>
+        <p:txBody>
+          <a:bodyPr wrap="square" lIns="0" tIns="0" rIns="0" bIns="0" rtlCol="0" anchor="ctr"/>
+          <a:lstStyle/>
+          <a:p>
+            <a:pPr indent="0" marL="0">
+              <a:buNone/>
+            </a:pPr>
+            <a:r>
+              <a:rPr lang="en-US" sz="780" b="1" dirty="0">
+                <a:solidFill>
+                  <a:srgbClr val="5A32ED"/>
+                </a:solidFill>
+                <a:latin typeface="Arial" pitchFamily="34" charset="0"/>
+                <a:ea typeface="Arial" pitchFamily="34" charset="-122"/>
+                <a:cs typeface="Arial" pitchFamily="34" charset="-120"/>
+              </a:rPr>
+              <a:t>01</a:t>
+            </a:r>
+            <a:endParaRPr lang="en-US" sz="780" dirty="0"/>
+          </a:p>
+        </p:txBody>
+      </p:sp>
+      <p:sp>
+        <p:nvSpPr>
+          <p:cNvPr id="10" name="Text 7"/>
+          <p:cNvSpPr/>
+          <p:nvPr/>
+        </p:nvSpPr>
+        <p:spPr>
+          <a:xfrm>
+            <a:off x="859536" y="2651760"/>
+            <a:ext cx="1481328" cy="182880"/>
+          </a:xfrm>
+          <a:prstGeom prst="rect">
+            <a:avLst/>
+          </a:prstGeom>
+          <a:noFill/>
+          <a:ln/>
+        </p:spPr>
+        <p:txBody>
+          <a:bodyPr wrap="square" lIns="0" tIns="0" rIns="0" bIns="0" rtlCol="0" anchor="ctr"/>
+          <a:lstStyle/>
+          <a:p>
+            <a:pPr algn="ctr" indent="0" marL="0">
+              <a:buNone/>
+            </a:pPr>
+            <a:r>
+              <a:rPr lang="en-US" sz="1150" b="1" spc="50" kern="0" dirty="0">
+                <a:solidFill>
+                  <a:srgbClr val="101426"/>
+                </a:solidFill>
+                <a:latin typeface="Arial" pitchFamily="34" charset="0"/>
+                <a:ea typeface="Arial" pitchFamily="34" charset="-122"/>
+                <a:cs typeface="Arial" pitchFamily="34" charset="-120"/>
+              </a:rPr>
+              <a:t>SMART LIST</a:t>
+            </a:r>
+            <a:endParaRPr lang="en-US" sz="1150" dirty="0"/>
+          </a:p>
+        </p:txBody>
+      </p:sp>
+      <p:sp>
+        <p:nvSpPr>
           <p:cNvPr id="11" name="Text 8"/>
           <p:cNvSpPr/>
           <p:nvPr/>
         </p:nvSpPr>
         <p:spPr>
           <a:xfrm>
-            <a:off x="1005840" y="3200400"/>
-            <a:ext cx="987552" cy="182880"/>
-          </a:xfrm>
-          <a:prstGeom prst="rect">
-            <a:avLst/>
-          </a:prstGeom>
-          <a:noFill/>
-          <a:ln/>
-        </p:spPr>
-        <p:txBody>
-          <a:bodyPr wrap="square" lIns="0" tIns="0" rIns="0" bIns="0" rtlCol="0" anchor="ctr"/>
-          <a:lstStyle/>
-          <a:p>
-            <a:pPr algn="ctr" indent="0" marL="0">
-              <a:buNone/>
-            </a:pPr>
-            <a:r>
-              <a:rPr lang="en-US" sz="1200" b="1" dirty="0">
-                <a:solidFill>
-                  <a:srgbClr val="5A32ED"/>
-                </a:solidFill>
-                <a:latin typeface="Aptos" pitchFamily="34" charset="0"/>
-                <a:ea typeface="Aptos" pitchFamily="34" charset="-122"/>
-                <a:cs typeface="Aptos" pitchFamily="34" charset="-120"/>
-              </a:rPr>
-              <a:t>01</a:t>
-            </a:r>
-            <a:endParaRPr lang="en-US" sz="1200" dirty="0"/>
-          </a:p>
-        </p:txBody>
-      </p:sp>
-      <p:sp>
-        <p:nvSpPr>
-          <p:cNvPr id="12" name="Text 9"/>
-          <p:cNvSpPr/>
-          <p:nvPr/>
-        </p:nvSpPr>
-        <p:spPr>
-          <a:xfrm>
-            <a:off x="960120" y="4096512"/>
-            <a:ext cx="2788920" cy="274320"/>
-          </a:xfrm>
-          <a:prstGeom prst="rect">
-            <a:avLst/>
-          </a:prstGeom>
-          <a:noFill/>
-          <a:ln/>
-        </p:spPr>
-        <p:txBody>
-          <a:bodyPr wrap="square" lIns="0" tIns="0" rIns="0" bIns="0" rtlCol="0" anchor="ctr"/>
-          <a:lstStyle/>
-          <a:p>
-            <a:pPr indent="0" marL="0">
-              <a:buNone/>
-            </a:pPr>
-            <a:r>
-              <a:rPr lang="en-US" sz="1700" b="1" dirty="0">
-                <a:solidFill>
-                  <a:srgbClr val="101426"/>
-                </a:solidFill>
-                <a:latin typeface="Aptos Display" pitchFamily="34" charset="0"/>
-                <a:ea typeface="Aptos Display" pitchFamily="34" charset="-122"/>
-                <a:cs typeface="Aptos Display" pitchFamily="34" charset="-120"/>
-              </a:rPr>
-              <a:t>Qualified outreach</a:t>
-            </a:r>
-            <a:endParaRPr lang="en-US" sz="1700" dirty="0"/>
-          </a:p>
-        </p:txBody>
-      </p:sp>
-      <p:sp>
-        <p:nvSpPr>
-          <p:cNvPr id="13" name="Text 10"/>
-          <p:cNvSpPr/>
-          <p:nvPr/>
-        </p:nvSpPr>
-        <p:spPr>
-          <a:xfrm>
-            <a:off x="960120" y="4526280"/>
-            <a:ext cx="2788920" cy="768096"/>
-          </a:xfrm>
-          <a:prstGeom prst="rect">
-            <a:avLst/>
-          </a:prstGeom>
-          <a:noFill/>
-          <a:ln/>
-        </p:spPr>
-        <p:txBody>
-          <a:bodyPr wrap="square" lIns="0" tIns="0" rIns="0" bIns="0" rtlCol="0" anchor="t">
+            <a:off x="859536" y="3127248"/>
+            <a:ext cx="1481328" cy="292608"/>
+          </a:xfrm>
+          <a:prstGeom prst="rect">
+            <a:avLst/>
+          </a:prstGeom>
+          <a:noFill/>
+          <a:ln/>
+        </p:spPr>
+        <p:txBody>
+          <a:bodyPr wrap="square" lIns="0" tIns="0" rIns="0" bIns="0" rtlCol="0" anchor="ctr">
             <a:normAutofit/>
           </a:bodyPr>
           <a:lstStyle/>
           <a:p>
-            <a:pPr indent="0" marL="0">
-              <a:buNone/>
-            </a:pPr>
-            <a:r>
-              <a:rPr lang="en-US" sz="1150" dirty="0">
+            <a:pPr algn="ctr" indent="0" marL="0">
+              <a:buNone/>
+            </a:pPr>
+            <a:r>
+              <a:rPr lang="en-US" sz="900" dirty="0">
                 <a:solidFill>
                   <a:srgbClr val="646A7E"/>
                 </a:solidFill>
-                <a:latin typeface="Aptos" pitchFamily="34" charset="0"/>
-                <a:ea typeface="Aptos" pitchFamily="34" charset="-122"/>
-                <a:cs typeface="Aptos" pitchFamily="34" charset="-120"/>
-              </a:rPr>
-              <a:t>LeadReacher creates relevant conversations with the right prospects.</a:t>
-            </a:r>
-            <a:endParaRPr lang="en-US" sz="1150" dirty="0"/>
-          </a:p>
-        </p:txBody>
-      </p:sp>
-      <p:sp>
-        <p:nvSpPr>
-          <p:cNvPr id="14" name="Shape 11"/>
-          <p:cNvSpPr/>
-          <p:nvPr/>
-        </p:nvSpPr>
-        <p:spPr>
-          <a:xfrm>
-            <a:off x="4526280" y="2852928"/>
-            <a:ext cx="987552" cy="987552"/>
-          </a:xfrm>
-          <a:prstGeom prst="ellipse">
-            <a:avLst/>
+                <a:latin typeface="Arial" pitchFamily="34" charset="0"/>
+                <a:ea typeface="Arial" pitchFamily="34" charset="-122"/>
+                <a:cs typeface="Arial" pitchFamily="34" charset="-120"/>
+              </a:rPr>
+              <a:t>Approved audience</a:t>
+            </a:r>
+            <a:endParaRPr lang="en-US" sz="900" dirty="0"/>
+          </a:p>
+        </p:txBody>
+      </p:sp>
+      <p:sp>
+        <p:nvSpPr>
+          <p:cNvPr id="12" name="Shape 9"/>
+          <p:cNvSpPr/>
+          <p:nvPr/>
+        </p:nvSpPr>
+        <p:spPr>
+          <a:xfrm>
+            <a:off x="2596896" y="2944368"/>
+            <a:ext cx="237744" cy="0"/>
+          </a:xfrm>
+          <a:prstGeom prst="line">
+            <a:avLst/>
+          </a:prstGeom>
+          <a:noFill/>
+          <a:ln w="15875">
+            <a:solidFill>
+              <a:srgbClr val="5A32ED"/>
+            </a:solidFill>
+            <a:prstDash val="solid"/>
+            <a:tailEnd type="triangle"/>
+          </a:ln>
+        </p:spPr>
+      </p:sp>
+      <p:sp>
+        <p:nvSpPr>
+          <p:cNvPr id="13" name="Shape 10"/>
+          <p:cNvSpPr/>
+          <p:nvPr/>
+        </p:nvSpPr>
+        <p:spPr>
+          <a:xfrm>
+            <a:off x="2889504" y="1993392"/>
+            <a:ext cx="1901952" cy="1901952"/>
+          </a:xfrm>
+          <a:prstGeom prst="roundRect">
+            <a:avLst>
+              <a:gd name="adj" fmla="val 5769"/>
+            </a:avLst>
           </a:prstGeom>
           <a:solidFill>
             <a:srgbClr val="FFFFFF"/>
           </a:solidFill>
-          <a:ln w="19050">
+          <a:ln w="10795">
             <a:solidFill>
-              <a:srgbClr val="5A32ED"/>
+              <a:srgbClr val="D7CCFF"/>
             </a:solidFill>
             <a:prstDash val="solid"/>
           </a:ln>
@@ -2646,14 +2703,53 @@
       </p:sp>
       <p:sp>
         <p:nvSpPr>
+          <p:cNvPr id="14" name="Text 11"/>
+          <p:cNvSpPr/>
+          <p:nvPr/>
+        </p:nvSpPr>
+        <p:spPr>
+          <a:xfrm>
+            <a:off x="3090672" y="2258568"/>
+            <a:ext cx="402336" cy="118872"/>
+          </a:xfrm>
+          <a:prstGeom prst="rect">
+            <a:avLst/>
+          </a:prstGeom>
+          <a:noFill/>
+          <a:ln/>
+        </p:spPr>
+        <p:txBody>
+          <a:bodyPr wrap="square" lIns="0" tIns="0" rIns="0" bIns="0" rtlCol="0" anchor="ctr"/>
+          <a:lstStyle/>
+          <a:p>
+            <a:pPr indent="0" marL="0">
+              <a:buNone/>
+            </a:pPr>
+            <a:r>
+              <a:rPr lang="en-US" sz="780" b="1" dirty="0">
+                <a:solidFill>
+                  <a:srgbClr val="5A32ED"/>
+                </a:solidFill>
+                <a:latin typeface="Arial" pitchFamily="34" charset="0"/>
+                <a:ea typeface="Arial" pitchFamily="34" charset="-122"/>
+                <a:cs typeface="Arial" pitchFamily="34" charset="-120"/>
+              </a:rPr>
+              <a:t>02</a:t>
+            </a:r>
+            <a:endParaRPr lang="en-US" sz="780" dirty="0"/>
+          </a:p>
+        </p:txBody>
+      </p:sp>
+      <p:sp>
+        <p:nvSpPr>
           <p:cNvPr id="15" name="Text 12"/>
           <p:cNvSpPr/>
           <p:nvPr/>
         </p:nvSpPr>
         <p:spPr>
           <a:xfrm>
-            <a:off x="4526280" y="3200400"/>
-            <a:ext cx="987552" cy="182880"/>
+            <a:off x="3090672" y="2651760"/>
+            <a:ext cx="1481328" cy="182880"/>
           </a:xfrm>
           <a:prstGeom prst="rect">
             <a:avLst/>
@@ -2669,17 +2765,17 @@
               <a:buNone/>
             </a:pPr>
             <a:r>
-              <a:rPr lang="en-US" sz="1200" b="1" dirty="0">
-                <a:solidFill>
-                  <a:srgbClr val="5A32ED"/>
-                </a:solidFill>
-                <a:latin typeface="Aptos" pitchFamily="34" charset="0"/>
-                <a:ea typeface="Aptos" pitchFamily="34" charset="-122"/>
-                <a:cs typeface="Aptos" pitchFamily="34" charset="-120"/>
-              </a:rPr>
-              <a:t>02</a:t>
-            </a:r>
-            <a:endParaRPr lang="en-US" sz="1200" dirty="0"/>
+              <a:rPr lang="en-US" sz="1150" b="1" spc="50" kern="0" dirty="0">
+                <a:solidFill>
+                  <a:srgbClr val="101426"/>
+                </a:solidFill>
+                <a:latin typeface="Arial" pitchFamily="34" charset="0"/>
+                <a:ea typeface="Arial" pitchFamily="34" charset="-122"/>
+                <a:cs typeface="Arial" pitchFamily="34" charset="-120"/>
+              </a:rPr>
+              <a:t>QUALIFY</a:t>
+            </a:r>
+            <a:endParaRPr lang="en-US" sz="1150" dirty="0"/>
           </a:p>
         </p:txBody>
       </p:sp>
@@ -2691,98 +2787,85 @@
         </p:nvSpPr>
         <p:spPr>
           <a:xfrm>
-            <a:off x="4480560" y="4096512"/>
-            <a:ext cx="2788920" cy="274320"/>
-          </a:xfrm>
-          <a:prstGeom prst="rect">
-            <a:avLst/>
-          </a:prstGeom>
-          <a:noFill/>
-          <a:ln/>
-        </p:spPr>
-        <p:txBody>
-          <a:bodyPr wrap="square" lIns="0" tIns="0" rIns="0" bIns="0" rtlCol="0" anchor="ctr"/>
-          <a:lstStyle/>
-          <a:p>
-            <a:pPr indent="0" marL="0">
-              <a:buNone/>
-            </a:pPr>
-            <a:r>
-              <a:rPr lang="en-US" sz="1700" b="1" dirty="0">
-                <a:solidFill>
-                  <a:srgbClr val="101426"/>
-                </a:solidFill>
-                <a:latin typeface="Aptos Display" pitchFamily="34" charset="0"/>
-                <a:ea typeface="Aptos Display" pitchFamily="34" charset="-122"/>
-                <a:cs typeface="Aptos Display" pitchFamily="34" charset="-120"/>
-              </a:rPr>
-              <a:t>Complete context</a:t>
-            </a:r>
-            <a:endParaRPr lang="en-US" sz="1700" dirty="0"/>
-          </a:p>
-        </p:txBody>
-      </p:sp>
-      <p:sp>
-        <p:nvSpPr>
-          <p:cNvPr id="17" name="Text 14"/>
-          <p:cNvSpPr/>
-          <p:nvPr/>
-        </p:nvSpPr>
-        <p:spPr>
-          <a:xfrm>
-            <a:off x="4480560" y="4526280"/>
-            <a:ext cx="2788920" cy="768096"/>
-          </a:xfrm>
-          <a:prstGeom prst="rect">
-            <a:avLst/>
-          </a:prstGeom>
-          <a:noFill/>
-          <a:ln/>
-        </p:spPr>
-        <p:txBody>
-          <a:bodyPr wrap="square" lIns="0" tIns="0" rIns="0" bIns="0" rtlCol="0" anchor="t">
+            <a:off x="3090672" y="3127248"/>
+            <a:ext cx="1481328" cy="292608"/>
+          </a:xfrm>
+          <a:prstGeom prst="rect">
+            <a:avLst/>
+          </a:prstGeom>
+          <a:noFill/>
+          <a:ln/>
+        </p:spPr>
+        <p:txBody>
+          <a:bodyPr wrap="square" lIns="0" tIns="0" rIns="0" bIns="0" rtlCol="0" anchor="ctr">
             <a:normAutofit/>
           </a:bodyPr>
           <a:lstStyle/>
           <a:p>
-            <a:pPr indent="0" marL="0">
-              <a:buNone/>
-            </a:pPr>
-            <a:r>
-              <a:rPr lang="en-US" sz="1150" dirty="0">
+            <a:pPr algn="ctr" indent="0" marL="0">
+              <a:buNone/>
+            </a:pPr>
+            <a:r>
+              <a:rPr lang="en-US" sz="900" dirty="0">
                 <a:solidFill>
                   <a:srgbClr val="646A7E"/>
                 </a:solidFill>
-                <a:latin typeface="Aptos" pitchFamily="34" charset="0"/>
-                <a:ea typeface="Aptos" pitchFamily="34" charset="-122"/>
-                <a:cs typeface="Aptos" pitchFamily="34" charset="-120"/>
-              </a:rPr>
-              <a:t>The CRM retains who replied, why they engaged and where they came from.</a:t>
-            </a:r>
-            <a:endParaRPr lang="en-US" sz="1150" dirty="0"/>
-          </a:p>
-        </p:txBody>
-      </p:sp>
-      <p:sp>
-        <p:nvSpPr>
-          <p:cNvPr id="18" name="Shape 15"/>
-          <p:cNvSpPr/>
-          <p:nvPr/>
-        </p:nvSpPr>
-        <p:spPr>
-          <a:xfrm>
-            <a:off x="8046720" y="2852928"/>
-            <a:ext cx="987552" cy="987552"/>
-          </a:xfrm>
-          <a:prstGeom prst="ellipse">
-            <a:avLst/>
-          </a:prstGeom>
-          <a:solidFill>
-            <a:srgbClr val="FFFFFF"/>
-          </a:solidFill>
-          <a:ln w="19050">
+                <a:latin typeface="Arial" pitchFamily="34" charset="0"/>
+                <a:ea typeface="Arial" pitchFamily="34" charset="-122"/>
+                <a:cs typeface="Arial" pitchFamily="34" charset="-120"/>
+              </a:rPr>
+              <a:t>Find the best fit</a:t>
+            </a:r>
+            <a:endParaRPr lang="en-US" sz="900" dirty="0"/>
+          </a:p>
+        </p:txBody>
+      </p:sp>
+      <p:sp>
+        <p:nvSpPr>
+          <p:cNvPr id="17" name="Shape 14"/>
+          <p:cNvSpPr/>
+          <p:nvPr/>
+        </p:nvSpPr>
+        <p:spPr>
+          <a:xfrm>
+            <a:off x="4828032" y="2944368"/>
+            <a:ext cx="237744" cy="0"/>
+          </a:xfrm>
+          <a:prstGeom prst="line">
+            <a:avLst/>
+          </a:prstGeom>
+          <a:noFill/>
+          <a:ln w="15875">
             <a:solidFill>
               <a:srgbClr val="5A32ED"/>
+            </a:solidFill>
+            <a:prstDash val="solid"/>
+            <a:tailEnd type="triangle"/>
+          </a:ln>
+        </p:spPr>
+      </p:sp>
+      <p:sp>
+        <p:nvSpPr>
+          <p:cNvPr id="18" name="Shape 15"/>
+          <p:cNvSpPr/>
+          <p:nvPr/>
+        </p:nvSpPr>
+        <p:spPr>
+          <a:xfrm>
+            <a:off x="5120640" y="1993392"/>
+            <a:ext cx="1901952" cy="1901952"/>
+          </a:xfrm>
+          <a:prstGeom prst="roundRect">
+            <a:avLst>
+              <a:gd name="adj" fmla="val 5769"/>
+            </a:avLst>
+          </a:prstGeom>
+          <a:solidFill>
+            <a:srgbClr val="050A1F"/>
+          </a:solidFill>
+          <a:ln w="10795">
+            <a:solidFill>
+              <a:srgbClr val="050A1F"/>
             </a:solidFill>
             <a:prstDash val="solid"/>
           </a:ln>
@@ -2803,8 +2886,8 @@
         </p:nvSpPr>
         <p:spPr>
           <a:xfrm>
-            <a:off x="8046720" y="3200400"/>
-            <a:ext cx="987552" cy="182880"/>
+            <a:off x="5321808" y="2258568"/>
+            <a:ext cx="402336" cy="118872"/>
           </a:xfrm>
           <a:prstGeom prst="rect">
             <a:avLst/>
@@ -2816,60 +2899,60 @@
           <a:bodyPr wrap="square" lIns="0" tIns="0" rIns="0" bIns="0" rtlCol="0" anchor="ctr"/>
           <a:lstStyle/>
           <a:p>
+            <a:pPr indent="0" marL="0">
+              <a:buNone/>
+            </a:pPr>
+            <a:r>
+              <a:rPr lang="en-US" sz="780" b="1" dirty="0">
+                <a:solidFill>
+                  <a:srgbClr val="9F8BFF"/>
+                </a:solidFill>
+                <a:latin typeface="Arial" pitchFamily="34" charset="0"/>
+                <a:ea typeface="Arial" pitchFamily="34" charset="-122"/>
+                <a:cs typeface="Arial" pitchFamily="34" charset="-120"/>
+              </a:rPr>
+              <a:t>03</a:t>
+            </a:r>
+            <a:endParaRPr lang="en-US" sz="780" dirty="0"/>
+          </a:p>
+        </p:txBody>
+      </p:sp>
+      <p:sp>
+        <p:nvSpPr>
+          <p:cNvPr id="20" name="Text 17"/>
+          <p:cNvSpPr/>
+          <p:nvPr/>
+        </p:nvSpPr>
+        <p:spPr>
+          <a:xfrm>
+            <a:off x="5321808" y="2651760"/>
+            <a:ext cx="1481328" cy="182880"/>
+          </a:xfrm>
+          <a:prstGeom prst="rect">
+            <a:avLst/>
+          </a:prstGeom>
+          <a:noFill/>
+          <a:ln/>
+        </p:spPr>
+        <p:txBody>
+          <a:bodyPr wrap="square" lIns="0" tIns="0" rIns="0" bIns="0" rtlCol="0" anchor="ctr"/>
+          <a:lstStyle/>
+          <a:p>
             <a:pPr algn="ctr" indent="0" marL="0">
               <a:buNone/>
             </a:pPr>
             <a:r>
-              <a:rPr lang="en-US" sz="1200" b="1" dirty="0">
-                <a:solidFill>
-                  <a:srgbClr val="5A32ED"/>
-                </a:solidFill>
-                <a:latin typeface="Aptos" pitchFamily="34" charset="0"/>
-                <a:ea typeface="Aptos" pitchFamily="34" charset="-122"/>
-                <a:cs typeface="Aptos" pitchFamily="34" charset="-120"/>
-              </a:rPr>
-              <a:t>03</a:t>
-            </a:r>
-            <a:endParaRPr lang="en-US" sz="1200" dirty="0"/>
-          </a:p>
-        </p:txBody>
-      </p:sp>
-      <p:sp>
-        <p:nvSpPr>
-          <p:cNvPr id="20" name="Text 17"/>
-          <p:cNvSpPr/>
-          <p:nvPr/>
-        </p:nvSpPr>
-        <p:spPr>
-          <a:xfrm>
-            <a:off x="8001000" y="4096512"/>
-            <a:ext cx="2788920" cy="274320"/>
-          </a:xfrm>
-          <a:prstGeom prst="rect">
-            <a:avLst/>
-          </a:prstGeom>
-          <a:noFill/>
-          <a:ln/>
-        </p:spPr>
-        <p:txBody>
-          <a:bodyPr wrap="square" lIns="0" tIns="0" rIns="0" bIns="0" rtlCol="0" anchor="ctr"/>
-          <a:lstStyle/>
-          <a:p>
-            <a:pPr indent="0" marL="0">
-              <a:buNone/>
-            </a:pPr>
-            <a:r>
-              <a:rPr lang="en-US" sz="1700" b="1" dirty="0">
-                <a:solidFill>
-                  <a:srgbClr val="101426"/>
-                </a:solidFill>
-                <a:latin typeface="Aptos Display" pitchFamily="34" charset="0"/>
-                <a:ea typeface="Aptos Display" pitchFamily="34" charset="-122"/>
-                <a:cs typeface="Aptos Display" pitchFamily="34" charset="-120"/>
-              </a:rPr>
-              <a:t>Sales momentum</a:t>
-            </a:r>
-            <a:endParaRPr lang="en-US" sz="1700" dirty="0"/>
+              <a:rPr lang="en-US" sz="1150" b="1" spc="50" kern="0" dirty="0">
+                <a:solidFill>
+                  <a:srgbClr val="FFFFFF"/>
+                </a:solidFill>
+                <a:latin typeface="Arial" pitchFamily="34" charset="0"/>
+                <a:ea typeface="Arial" pitchFamily="34" charset="-122"/>
+                <a:cs typeface="Arial" pitchFamily="34" charset="-120"/>
+              </a:rPr>
+              <a:t>PERSONALIZE</a:t>
+            </a:r>
+            <a:endParaRPr lang="en-US" sz="1150" dirty="0"/>
           </a:p>
         </p:txBody>
       </p:sp>
@@ -2881,36 +2964,36 @@
         </p:nvSpPr>
         <p:spPr>
           <a:xfrm>
-            <a:off x="8001000" y="4526280"/>
-            <a:ext cx="2788920" cy="768096"/>
-          </a:xfrm>
-          <a:prstGeom prst="rect">
-            <a:avLst/>
-          </a:prstGeom>
-          <a:noFill/>
-          <a:ln/>
-        </p:spPr>
-        <p:txBody>
-          <a:bodyPr wrap="square" lIns="0" tIns="0" rIns="0" bIns="0" rtlCol="0" anchor="t">
+            <a:off x="5321808" y="3127248"/>
+            <a:ext cx="1481328" cy="292608"/>
+          </a:xfrm>
+          <a:prstGeom prst="rect">
+            <a:avLst/>
+          </a:prstGeom>
+          <a:noFill/>
+          <a:ln/>
+        </p:spPr>
+        <p:txBody>
+          <a:bodyPr wrap="square" lIns="0" tIns="0" rIns="0" bIns="0" rtlCol="0" anchor="ctr">
             <a:normAutofit/>
           </a:bodyPr>
           <a:lstStyle/>
           <a:p>
-            <a:pPr indent="0" marL="0">
-              <a:buNone/>
-            </a:pPr>
-            <a:r>
-              <a:rPr lang="en-US" sz="1150" dirty="0">
-                <a:solidFill>
-                  <a:srgbClr val="646A7E"/>
-                </a:solidFill>
-                <a:latin typeface="Aptos" pitchFamily="34" charset="0"/>
-                <a:ea typeface="Aptos" pitchFamily="34" charset="-122"/>
-                <a:cs typeface="Aptos" pitchFamily="34" charset="-120"/>
-              </a:rPr>
-              <a:t>Teams follow up from a familiar workflow without losing the conversation history.</a:t>
-            </a:r>
-            <a:endParaRPr lang="en-US" sz="1150" dirty="0"/>
+            <a:pPr algn="ctr" indent="0" marL="0">
+              <a:buNone/>
+            </a:pPr>
+            <a:r>
+              <a:rPr lang="en-US" sz="900" dirty="0">
+                <a:solidFill>
+                  <a:srgbClr val="D6D9E5"/>
+                </a:solidFill>
+                <a:latin typeface="Arial" pitchFamily="34" charset="0"/>
+                <a:ea typeface="Arial" pitchFamily="34" charset="-122"/>
+                <a:cs typeface="Arial" pitchFamily="34" charset="-120"/>
+              </a:rPr>
+              <a:t>Message + video</a:t>
+            </a:r>
+            <a:endParaRPr lang="en-US" sz="900" dirty="0"/>
           </a:p>
         </p:txBody>
       </p:sp>
@@ -2922,35 +3005,66 @@
         </p:nvSpPr>
         <p:spPr>
           <a:xfrm>
-            <a:off x="987552" y="5650992"/>
-            <a:ext cx="1673352" cy="329184"/>
+            <a:off x="7059168" y="2944368"/>
+            <a:ext cx="237744" cy="0"/>
+          </a:xfrm>
+          <a:prstGeom prst="line">
+            <a:avLst/>
+          </a:prstGeom>
+          <a:noFill/>
+          <a:ln w="15875">
+            <a:solidFill>
+              <a:srgbClr val="5A32ED"/>
+            </a:solidFill>
+            <a:prstDash val="solid"/>
+            <a:tailEnd type="triangle"/>
+          </a:ln>
+        </p:spPr>
+      </p:sp>
+      <p:sp>
+        <p:nvSpPr>
+          <p:cNvPr id="23" name="Shape 20"/>
+          <p:cNvSpPr/>
+          <p:nvPr/>
+        </p:nvSpPr>
+        <p:spPr>
+          <a:xfrm>
+            <a:off x="7351776" y="1993392"/>
+            <a:ext cx="1901952" cy="1901952"/>
           </a:xfrm>
           <a:prstGeom prst="roundRect">
             <a:avLst>
-              <a:gd name="adj" fmla="val 22222"/>
+              <a:gd name="adj" fmla="val 5769"/>
             </a:avLst>
           </a:prstGeom>
           <a:solidFill>
-            <a:srgbClr val="F7F5FF"/>
+            <a:srgbClr val="FFFFFF"/>
           </a:solidFill>
-          <a:ln w="8890">
+          <a:ln w="10795">
             <a:solidFill>
               <a:srgbClr val="D7CCFF"/>
             </a:solidFill>
             <a:prstDash val="solid"/>
           </a:ln>
-        </p:spPr>
-      </p:sp>
-      <p:sp>
-        <p:nvSpPr>
-          <p:cNvPr id="23" name="Text 20"/>
-          <p:cNvSpPr/>
-          <p:nvPr/>
-        </p:nvSpPr>
-        <p:spPr>
-          <a:xfrm>
-            <a:off x="1097280" y="5742432"/>
-            <a:ext cx="1453896" cy="109728"/>
+          <a:effectLst>
+            <a:outerShdw sx="100000" sy="100000" kx="0" ky="0" algn="bl" rotWithShape="0" blurRad="1.0657517203310059e+29" dist="2.1315034406620118e+29" dir="1.259712e+35">
+              <a:srgbClr val="CFC7E8">
+                <a:alpha val="1.6e+34"/>
+              </a:srgbClr>
+            </a:outerShdw>
+          </a:effectLst>
+        </p:spPr>
+      </p:sp>
+      <p:sp>
+        <p:nvSpPr>
+          <p:cNvPr id="24" name="Text 21"/>
+          <p:cNvSpPr/>
+          <p:nvPr/>
+        </p:nvSpPr>
+        <p:spPr>
+          <a:xfrm>
+            <a:off x="7552944" y="2258568"/>
+            <a:ext cx="402336" cy="118872"/>
           </a:xfrm>
           <a:prstGeom prst="rect">
             <a:avLst/>
@@ -2962,61 +3076,172 @@
           <a:bodyPr wrap="square" lIns="0" tIns="0" rIns="0" bIns="0" rtlCol="0" anchor="ctr"/>
           <a:lstStyle/>
           <a:p>
+            <a:pPr indent="0" marL="0">
+              <a:buNone/>
+            </a:pPr>
+            <a:r>
+              <a:rPr lang="en-US" sz="780" b="1" dirty="0">
+                <a:solidFill>
+                  <a:srgbClr val="5A32ED"/>
+                </a:solidFill>
+                <a:latin typeface="Arial" pitchFamily="34" charset="0"/>
+                <a:ea typeface="Arial" pitchFamily="34" charset="-122"/>
+                <a:cs typeface="Arial" pitchFamily="34" charset="-120"/>
+              </a:rPr>
+              <a:t>04</a:t>
+            </a:r>
+            <a:endParaRPr lang="en-US" sz="780" dirty="0"/>
+          </a:p>
+        </p:txBody>
+      </p:sp>
+      <p:sp>
+        <p:nvSpPr>
+          <p:cNvPr id="25" name="Text 22"/>
+          <p:cNvSpPr/>
+          <p:nvPr/>
+        </p:nvSpPr>
+        <p:spPr>
+          <a:xfrm>
+            <a:off x="7552944" y="2651760"/>
+            <a:ext cx="1481328" cy="182880"/>
+          </a:xfrm>
+          <a:prstGeom prst="rect">
+            <a:avLst/>
+          </a:prstGeom>
+          <a:noFill/>
+          <a:ln/>
+        </p:spPr>
+        <p:txBody>
+          <a:bodyPr wrap="square" lIns="0" tIns="0" rIns="0" bIns="0" rtlCol="0" anchor="ctr"/>
+          <a:lstStyle/>
+          <a:p>
             <a:pPr algn="ctr" indent="0" marL="0">
               <a:buNone/>
             </a:pPr>
             <a:r>
-              <a:rPr lang="en-US" sz="850" b="1" dirty="0">
-                <a:solidFill>
-                  <a:srgbClr val="5A32ED"/>
-                </a:solidFill>
-                <a:latin typeface="Aptos" pitchFamily="34" charset="0"/>
-                <a:ea typeface="Aptos" pitchFamily="34" charset="-122"/>
-                <a:cs typeface="Aptos" pitchFamily="34" charset="-120"/>
-              </a:rPr>
-              <a:t>NO LOST CONTEXT</a:t>
-            </a:r>
-            <a:endParaRPr lang="en-US" sz="850" dirty="0"/>
-          </a:p>
-        </p:txBody>
-      </p:sp>
-      <p:sp>
-        <p:nvSpPr>
-          <p:cNvPr id="24" name="Shape 21"/>
-          <p:cNvSpPr/>
-          <p:nvPr/>
-        </p:nvSpPr>
-        <p:spPr>
-          <a:xfrm>
-            <a:off x="4480560" y="5650992"/>
-            <a:ext cx="1847088" cy="329184"/>
+              <a:rPr lang="en-US" sz="1150" b="1" spc="50" kern="0" dirty="0">
+                <a:solidFill>
+                  <a:srgbClr val="101426"/>
+                </a:solidFill>
+                <a:latin typeface="Arial" pitchFamily="34" charset="0"/>
+                <a:ea typeface="Arial" pitchFamily="34" charset="-122"/>
+                <a:cs typeface="Arial" pitchFamily="34" charset="-120"/>
+              </a:rPr>
+              <a:t>APPROVE</a:t>
+            </a:r>
+            <a:endParaRPr lang="en-US" sz="1150" dirty="0"/>
+          </a:p>
+        </p:txBody>
+      </p:sp>
+      <p:sp>
+        <p:nvSpPr>
+          <p:cNvPr id="26" name="Text 23"/>
+          <p:cNvSpPr/>
+          <p:nvPr/>
+        </p:nvSpPr>
+        <p:spPr>
+          <a:xfrm>
+            <a:off x="7552944" y="3127248"/>
+            <a:ext cx="1481328" cy="292608"/>
+          </a:xfrm>
+          <a:prstGeom prst="rect">
+            <a:avLst/>
+          </a:prstGeom>
+          <a:noFill/>
+          <a:ln/>
+        </p:spPr>
+        <p:txBody>
+          <a:bodyPr wrap="square" lIns="0" tIns="0" rIns="0" bIns="0" rtlCol="0" anchor="ctr">
+            <a:normAutofit/>
+          </a:bodyPr>
+          <a:lstStyle/>
+          <a:p>
+            <a:pPr algn="ctr" indent="0" marL="0">
+              <a:buNone/>
+            </a:pPr>
+            <a:r>
+              <a:rPr lang="en-US" sz="900" dirty="0">
+                <a:solidFill>
+                  <a:srgbClr val="646A7E"/>
+                </a:solidFill>
+                <a:latin typeface="Arial" pitchFamily="34" charset="0"/>
+                <a:ea typeface="Arial" pitchFamily="34" charset="-122"/>
+                <a:cs typeface="Arial" pitchFamily="34" charset="-120"/>
+              </a:rPr>
+              <a:t>User reviews all</a:t>
+            </a:r>
+            <a:endParaRPr lang="en-US" sz="900" dirty="0"/>
+          </a:p>
+        </p:txBody>
+      </p:sp>
+      <p:sp>
+        <p:nvSpPr>
+          <p:cNvPr id="27" name="Shape 24"/>
+          <p:cNvSpPr/>
+          <p:nvPr/>
+        </p:nvSpPr>
+        <p:spPr>
+          <a:xfrm>
+            <a:off x="9290304" y="2944368"/>
+            <a:ext cx="237744" cy="0"/>
+          </a:xfrm>
+          <a:prstGeom prst="line">
+            <a:avLst/>
+          </a:prstGeom>
+          <a:noFill/>
+          <a:ln w="15875">
+            <a:solidFill>
+              <a:srgbClr val="5A32ED"/>
+            </a:solidFill>
+            <a:prstDash val="solid"/>
+            <a:tailEnd type="triangle"/>
+          </a:ln>
+        </p:spPr>
+      </p:sp>
+      <p:sp>
+        <p:nvSpPr>
+          <p:cNvPr id="28" name="Shape 25"/>
+          <p:cNvSpPr/>
+          <p:nvPr/>
+        </p:nvSpPr>
+        <p:spPr>
+          <a:xfrm>
+            <a:off x="9582912" y="1993392"/>
+            <a:ext cx="1901952" cy="1901952"/>
           </a:xfrm>
           <a:prstGeom prst="roundRect">
             <a:avLst>
-              <a:gd name="adj" fmla="val 22222"/>
+              <a:gd name="adj" fmla="val 5769"/>
             </a:avLst>
           </a:prstGeom>
           <a:solidFill>
-            <a:srgbClr val="F7F5FF"/>
+            <a:srgbClr val="FFFFFF"/>
           </a:solidFill>
-          <a:ln w="8890">
+          <a:ln w="10795">
             <a:solidFill>
               <a:srgbClr val="D7CCFF"/>
             </a:solidFill>
             <a:prstDash val="solid"/>
           </a:ln>
-        </p:spPr>
-      </p:sp>
-      <p:sp>
-        <p:nvSpPr>
-          <p:cNvPr id="25" name="Text 22"/>
-          <p:cNvSpPr/>
-          <p:nvPr/>
-        </p:nvSpPr>
-        <p:spPr>
-          <a:xfrm>
-            <a:off x="4590288" y="5742432"/>
-            <a:ext cx="1627632" cy="109728"/>
+          <a:effectLst>
+            <a:outerShdw sx="100000" sy="100000" kx="0" ky="0" algn="bl" rotWithShape="0" blurRad="1.3535046848203775e+33" dist="2.707009369640755e+33" dir="7.558272e+39">
+              <a:srgbClr val="CFC7E8">
+                <a:alpha val="1.6e+39"/>
+              </a:srgbClr>
+            </a:outerShdw>
+          </a:effectLst>
+        </p:spPr>
+      </p:sp>
+      <p:sp>
+        <p:nvSpPr>
+          <p:cNvPr id="29" name="Text 26"/>
+          <p:cNvSpPr/>
+          <p:nvPr/>
+        </p:nvSpPr>
+        <p:spPr>
+          <a:xfrm>
+            <a:off x="9784080" y="2258568"/>
+            <a:ext cx="402336" cy="118872"/>
           </a:xfrm>
           <a:prstGeom prst="rect">
             <a:avLst/>
@@ -3028,44 +3253,124 @@
           <a:bodyPr wrap="square" lIns="0" tIns="0" rIns="0" bIns="0" rtlCol="0" anchor="ctr"/>
           <a:lstStyle/>
           <a:p>
+            <a:pPr indent="0" marL="0">
+              <a:buNone/>
+            </a:pPr>
+            <a:r>
+              <a:rPr lang="en-US" sz="780" b="1" dirty="0">
+                <a:solidFill>
+                  <a:srgbClr val="5A32ED"/>
+                </a:solidFill>
+                <a:latin typeface="Arial" pitchFamily="34" charset="0"/>
+                <a:ea typeface="Arial" pitchFamily="34" charset="-122"/>
+                <a:cs typeface="Arial" pitchFamily="34" charset="-120"/>
+              </a:rPr>
+              <a:t>05</a:t>
+            </a:r>
+            <a:endParaRPr lang="en-US" sz="780" dirty="0"/>
+          </a:p>
+        </p:txBody>
+      </p:sp>
+      <p:sp>
+        <p:nvSpPr>
+          <p:cNvPr id="30" name="Text 27"/>
+          <p:cNvSpPr/>
+          <p:nvPr/>
+        </p:nvSpPr>
+        <p:spPr>
+          <a:xfrm>
+            <a:off x="9784080" y="2651760"/>
+            <a:ext cx="1481328" cy="182880"/>
+          </a:xfrm>
+          <a:prstGeom prst="rect">
+            <a:avLst/>
+          </a:prstGeom>
+          <a:noFill/>
+          <a:ln/>
+        </p:spPr>
+        <p:txBody>
+          <a:bodyPr wrap="square" lIns="0" tIns="0" rIns="0" bIns="0" rtlCol="0" anchor="ctr"/>
+          <a:lstStyle/>
+          <a:p>
             <a:pPr algn="ctr" indent="0" marL="0">
               <a:buNone/>
             </a:pPr>
             <a:r>
-              <a:rPr lang="en-US" sz="850" b="1" dirty="0">
-                <a:solidFill>
-                  <a:srgbClr val="5A32ED"/>
-                </a:solidFill>
-                <a:latin typeface="Aptos" pitchFamily="34" charset="0"/>
-                <a:ea typeface="Aptos" pitchFamily="34" charset="-122"/>
-                <a:cs typeface="Aptos" pitchFamily="34" charset="-120"/>
-              </a:rPr>
-              <a:t>CLEANER HANDOFFS</a:t>
-            </a:r>
-            <a:endParaRPr lang="en-US" sz="850" dirty="0"/>
-          </a:p>
-        </p:txBody>
-      </p:sp>
-      <p:sp>
-        <p:nvSpPr>
-          <p:cNvPr id="26" name="Shape 23"/>
-          <p:cNvSpPr/>
-          <p:nvPr/>
-        </p:nvSpPr>
-        <p:spPr>
-          <a:xfrm>
-            <a:off x="7982712" y="5650992"/>
-            <a:ext cx="2057400" cy="329184"/>
+              <a:rPr lang="en-US" sz="1150" b="1" spc="50" kern="0" dirty="0">
+                <a:solidFill>
+                  <a:srgbClr val="101426"/>
+                </a:solidFill>
+                <a:latin typeface="Arial" pitchFamily="34" charset="0"/>
+                <a:ea typeface="Arial" pitchFamily="34" charset="-122"/>
+                <a:cs typeface="Arial" pitchFamily="34" charset="-120"/>
+              </a:rPr>
+              <a:t>REPORT</a:t>
+            </a:r>
+            <a:endParaRPr lang="en-US" sz="1150" dirty="0"/>
+          </a:p>
+        </p:txBody>
+      </p:sp>
+      <p:sp>
+        <p:nvSpPr>
+          <p:cNvPr id="31" name="Text 28"/>
+          <p:cNvSpPr/>
+          <p:nvPr/>
+        </p:nvSpPr>
+        <p:spPr>
+          <a:xfrm>
+            <a:off x="9784080" y="3127248"/>
+            <a:ext cx="1481328" cy="292608"/>
+          </a:xfrm>
+          <a:prstGeom prst="rect">
+            <a:avLst/>
+          </a:prstGeom>
+          <a:noFill/>
+          <a:ln/>
+        </p:spPr>
+        <p:txBody>
+          <a:bodyPr wrap="square" lIns="0" tIns="0" rIns="0" bIns="0" rtlCol="0" anchor="ctr">
+            <a:normAutofit/>
+          </a:bodyPr>
+          <a:lstStyle/>
+          <a:p>
+            <a:pPr algn="ctr" indent="0" marL="0">
+              <a:buNone/>
+            </a:pPr>
+            <a:r>
+              <a:rPr lang="en-US" sz="900" dirty="0">
+                <a:solidFill>
+                  <a:srgbClr val="646A7E"/>
+                </a:solidFill>
+                <a:latin typeface="Arial" pitchFamily="34" charset="0"/>
+                <a:ea typeface="Arial" pitchFamily="34" charset="-122"/>
+                <a:cs typeface="Arial" pitchFamily="34" charset="-120"/>
+              </a:rPr>
+              <a:t>Results return</a:t>
+            </a:r>
+            <a:endParaRPr lang="en-US" sz="900" dirty="0"/>
+          </a:p>
+        </p:txBody>
+      </p:sp>
+      <p:sp>
+        <p:nvSpPr>
+          <p:cNvPr id="32" name="Shape 29"/>
+          <p:cNvSpPr/>
+          <p:nvPr/>
+        </p:nvSpPr>
+        <p:spPr>
+          <a:xfrm>
+            <a:off x="658368" y="4315968"/>
+            <a:ext cx="10972800" cy="1481328"/>
           </a:xfrm>
           <a:prstGeom prst="roundRect">
             <a:avLst>
-              <a:gd name="adj" fmla="val 22222"/>
+              <a:gd name="adj" fmla="val 6790"/>
             </a:avLst>
           </a:prstGeom>
           <a:solidFill>
             <a:srgbClr val="F7F5FF"/>
           </a:solidFill>
-          <a:ln w="8890">
+          <a:ln w="10160">
             <a:solidFill>
               <a:srgbClr val="D7CCFF"/>
             </a:solidFill>
@@ -3075,14 +3380,14 @@
       </p:sp>
       <p:sp>
         <p:nvSpPr>
-          <p:cNvPr id="27" name="Text 24"/>
-          <p:cNvSpPr/>
-          <p:nvPr/>
-        </p:nvSpPr>
-        <p:spPr>
-          <a:xfrm>
-            <a:off x="8092440" y="5742432"/>
-            <a:ext cx="1837944" cy="109728"/>
+          <p:cNvPr id="33" name="Text 30"/>
+          <p:cNvSpPr/>
+          <p:nvPr/>
+        </p:nvSpPr>
+        <p:spPr>
+          <a:xfrm>
+            <a:off x="987552" y="4617720"/>
+            <a:ext cx="1325880" cy="118872"/>
           </a:xfrm>
           <a:prstGeom prst="rect">
             <a:avLst/>
@@ -3094,27 +3399,171 @@
           <a:bodyPr wrap="square" lIns="0" tIns="0" rIns="0" bIns="0" rtlCol="0" anchor="ctr"/>
           <a:lstStyle/>
           <a:p>
-            <a:pPr algn="ctr" indent="0" marL="0">
-              <a:buNone/>
-            </a:pPr>
-            <a:r>
-              <a:rPr lang="en-US" sz="850" b="1" dirty="0">
+            <a:pPr indent="0" marL="0">
+              <a:buNone/>
+            </a:pPr>
+            <a:r>
+              <a:rPr lang="en-US" sz="780" b="1" spc="100" kern="0" dirty="0">
                 <a:solidFill>
                   <a:srgbClr val="5A32ED"/>
                 </a:solidFill>
-                <a:latin typeface="Aptos" pitchFamily="34" charset="0"/>
-                <a:ea typeface="Aptos" pitchFamily="34" charset="-122"/>
-                <a:cs typeface="Aptos" pitchFamily="34" charset="-120"/>
-              </a:rPr>
-              <a:t>ONE CUSTOMER HISTORY</a:t>
-            </a:r>
-            <a:endParaRPr lang="en-US" sz="850" dirty="0"/>
-          </a:p>
-        </p:txBody>
-      </p:sp>
-      <p:sp>
-        <p:nvSpPr>
-          <p:cNvPr id="28" name="Shape 25"/>
+                <a:latin typeface="Arial" pitchFamily="34" charset="0"/>
+                <a:ea typeface="Arial" pitchFamily="34" charset="-122"/>
+                <a:cs typeface="Arial" pitchFamily="34" charset="-120"/>
+              </a:rPr>
+              <a:t>STATFLO OWNS</a:t>
+            </a:r>
+            <a:endParaRPr lang="en-US" sz="780" dirty="0"/>
+          </a:p>
+        </p:txBody>
+      </p:sp>
+      <p:sp>
+        <p:nvSpPr>
+          <p:cNvPr id="34" name="Text 31"/>
+          <p:cNvSpPr/>
+          <p:nvPr/>
+        </p:nvSpPr>
+        <p:spPr>
+          <a:xfrm>
+            <a:off x="987552" y="4956048"/>
+            <a:ext cx="4343400" cy="274320"/>
+          </a:xfrm>
+          <a:prstGeom prst="rect">
+            <a:avLst/>
+          </a:prstGeom>
+          <a:noFill/>
+          <a:ln/>
+        </p:spPr>
+        <p:txBody>
+          <a:bodyPr wrap="square" lIns="0" tIns="0" rIns="0" bIns="0" rtlCol="0" anchor="ctr">
+            <a:normAutofit/>
+          </a:bodyPr>
+          <a:lstStyle/>
+          <a:p>
+            <a:pPr indent="0" marL="0">
+              <a:buNone/>
+            </a:pPr>
+            <a:r>
+              <a:rPr lang="en-US" sz="1220" b="1" dirty="0">
+                <a:solidFill>
+                  <a:srgbClr val="101426"/>
+                </a:solidFill>
+                <a:latin typeface="Arial" pitchFamily="34" charset="0"/>
+                <a:ea typeface="Arial" pitchFamily="34" charset="-122"/>
+                <a:cs typeface="Arial" pitchFamily="34" charset="-120"/>
+              </a:rPr>
+              <a:t>Customer records, assignments and compliant conversations</a:t>
+            </a:r>
+            <a:endParaRPr lang="en-US" sz="1220" dirty="0"/>
+          </a:p>
+        </p:txBody>
+      </p:sp>
+      <p:sp>
+        <p:nvSpPr>
+          <p:cNvPr id="35" name="Shape 32"/>
+          <p:cNvSpPr/>
+          <p:nvPr/>
+        </p:nvSpPr>
+        <p:spPr>
+          <a:xfrm>
+            <a:off x="5925312" y="4553712"/>
+            <a:ext cx="0" cy="960120"/>
+          </a:xfrm>
+          <a:prstGeom prst="line">
+            <a:avLst/>
+          </a:prstGeom>
+          <a:noFill/>
+          <a:ln w="10160">
+            <a:solidFill>
+              <a:srgbClr val="D7CCFF"/>
+            </a:solidFill>
+            <a:prstDash val="solid"/>
+          </a:ln>
+        </p:spPr>
+      </p:sp>
+      <p:sp>
+        <p:nvSpPr>
+          <p:cNvPr id="36" name="Text 33"/>
+          <p:cNvSpPr/>
+          <p:nvPr/>
+        </p:nvSpPr>
+        <p:spPr>
+          <a:xfrm>
+            <a:off x="6327648" y="4617720"/>
+            <a:ext cx="1691640" cy="118872"/>
+          </a:xfrm>
+          <a:prstGeom prst="rect">
+            <a:avLst/>
+          </a:prstGeom>
+          <a:noFill/>
+          <a:ln/>
+        </p:spPr>
+        <p:txBody>
+          <a:bodyPr wrap="square" lIns="0" tIns="0" rIns="0" bIns="0" rtlCol="0" anchor="ctr"/>
+          <a:lstStyle/>
+          <a:p>
+            <a:pPr indent="0" marL="0">
+              <a:buNone/>
+            </a:pPr>
+            <a:r>
+              <a:rPr lang="en-US" sz="780" b="1" spc="100" kern="0" dirty="0">
+                <a:solidFill>
+                  <a:srgbClr val="5A32ED"/>
+                </a:solidFill>
+                <a:latin typeface="Arial" pitchFamily="34" charset="0"/>
+                <a:ea typeface="Arial" pitchFamily="34" charset="-122"/>
+                <a:cs typeface="Arial" pitchFamily="34" charset="-120"/>
+              </a:rPr>
+              <a:t>LEADREACHER OWNS</a:t>
+            </a:r>
+            <a:endParaRPr lang="en-US" sz="780" dirty="0"/>
+          </a:p>
+        </p:txBody>
+      </p:sp>
+      <p:sp>
+        <p:nvSpPr>
+          <p:cNvPr id="37" name="Text 34"/>
+          <p:cNvSpPr/>
+          <p:nvPr/>
+        </p:nvSpPr>
+        <p:spPr>
+          <a:xfrm>
+            <a:off x="6327648" y="4956048"/>
+            <a:ext cx="4526280" cy="274320"/>
+          </a:xfrm>
+          <a:prstGeom prst="rect">
+            <a:avLst/>
+          </a:prstGeom>
+          <a:noFill/>
+          <a:ln/>
+        </p:spPr>
+        <p:txBody>
+          <a:bodyPr wrap="square" lIns="0" tIns="0" rIns="0" bIns="0" rtlCol="0" anchor="ctr">
+            <a:normAutofit/>
+          </a:bodyPr>
+          <a:lstStyle/>
+          <a:p>
+            <a:pPr indent="0" marL="0">
+              <a:buNone/>
+            </a:pPr>
+            <a:r>
+              <a:rPr lang="en-US" sz="1220" b="1" dirty="0">
+                <a:solidFill>
+                  <a:srgbClr val="101426"/>
+                </a:solidFill>
+                <a:latin typeface="Arial" pitchFamily="34" charset="0"/>
+                <a:ea typeface="Arial" pitchFamily="34" charset="-122"/>
+                <a:cs typeface="Arial" pitchFamily="34" charset="-120"/>
+              </a:rPr>
+              <a:t>Audience intelligence, personalization, outreach and reporting</a:t>
+            </a:r>
+            <a:endParaRPr lang="en-US" sz="1220" dirty="0"/>
+          </a:p>
+        </p:txBody>
+      </p:sp>
+      <p:sp>
+        <p:nvSpPr>
+          <p:cNvPr id="38" name="Shape 35"/>
           <p:cNvSpPr/>
           <p:nvPr/>
         </p:nvSpPr>
@@ -3137,7 +3586,7 @@
       </p:sp>
       <p:sp>
         <p:nvSpPr>
-          <p:cNvPr id="29" name="Text 26"/>
+          <p:cNvPr id="39" name="Text 36"/>
           <p:cNvSpPr/>
           <p:nvPr/>
         </p:nvSpPr>
@@ -3164,11 +3613,11 @@
                 <a:solidFill>
                   <a:srgbClr val="8A8FA0"/>
                 </a:solidFill>
-                <a:latin typeface="Aptos" pitchFamily="34" charset="0"/>
-                <a:ea typeface="Aptos" pitchFamily="34" charset="-122"/>
-                <a:cs typeface="Aptos" pitchFamily="34" charset="-120"/>
-              </a:rPr>
-              <a:t>LeadReacher CRM integration benefits</a:t>
+                <a:latin typeface="Arial" pitchFamily="34" charset="0"/>
+                <a:ea typeface="Arial" pitchFamily="34" charset="-122"/>
+                <a:cs typeface="Arial" pitchFamily="34" charset="-120"/>
+              </a:rPr>
+              <a:t>LeadReacher + Statflo | what the integration does</a:t>
             </a:r>
             <a:endParaRPr lang="en-US" sz="750" dirty="0"/>
           </a:p>
@@ -3275,9 +3724,9 @@
             <a:prstDash val="solid"/>
           </a:ln>
           <a:effectLst>
-            <a:outerShdw sx="100000" sy="100000" kx="0" ky="0" algn="bl" rotWithShape="0" blurRad="1.0657517203310059e+29" dist="2.1315034406620118e+29" dir="1.259712e+35">
+            <a:outerShdw sx="100000" sy="100000" kx="0" ky="0" algn="bl" rotWithShape="0" blurRad="1.7189509497218795e+37" dist="3.437901899443759e+37" dir="4.5349632000000006e+44">
               <a:srgbClr val="CFC7E8">
-                <a:alpha val="1.6e+34"/>
+                <a:alpha val="1.6e+44"/>
               </a:srgbClr>
             </a:outerShdw>
           </a:effectLst>
@@ -3342,11 +3791,11 @@
                 <a:solidFill>
                   <a:srgbClr val="5A32ED"/>
                 </a:solidFill>
-                <a:latin typeface="Aptos" pitchFamily="34" charset="0"/>
-                <a:ea typeface="Aptos" pitchFamily="34" charset="-122"/>
-                <a:cs typeface="Aptos" pitchFamily="34" charset="-120"/>
-              </a:rPr>
-              <a:t>CRM INTEGRATION</a:t>
+                <a:latin typeface="Arial" pitchFamily="34" charset="0"/>
+                <a:ea typeface="Arial" pitchFamily="34" charset="-122"/>
+                <a:cs typeface="Arial" pitchFamily="34" charset="-120"/>
+              </a:rPr>
+              <a:t>02 | WHY</a:t>
             </a:r>
             <a:endParaRPr lang="en-US" sz="850" dirty="0"/>
           </a:p>
@@ -3360,8 +3809,8 @@
         </p:nvSpPr>
         <p:spPr>
           <a:xfrm>
-            <a:off x="658368" y="1024128"/>
-            <a:ext cx="4754880" cy="164592"/>
+            <a:off x="658368" y="941832"/>
+            <a:ext cx="4389120" cy="164592"/>
           </a:xfrm>
           <a:prstGeom prst="rect">
             <a:avLst/>
@@ -3381,11 +3830,11 @@
                 <a:solidFill>
                   <a:srgbClr val="5A32ED"/>
                 </a:solidFill>
-                <a:latin typeface="Aptos" pitchFamily="34" charset="0"/>
-                <a:ea typeface="Aptos" pitchFamily="34" charset="-122"/>
-                <a:cs typeface="Aptos" pitchFamily="34" charset="-120"/>
-              </a:rPr>
-              <a:t>BENEFITS FOR THE SALES TEAM</a:t>
+                <a:latin typeface="Arial" pitchFamily="34" charset="0"/>
+                <a:ea typeface="Arial" pitchFamily="34" charset="-122"/>
+                <a:cs typeface="Arial" pitchFamily="34" charset="-120"/>
+              </a:rPr>
+              <a:t>ILLUSTRATIVE BUSINESS CASE</a:t>
             </a:r>
             <a:endParaRPr lang="en-US" sz="900" dirty="0"/>
           </a:p>
@@ -3399,86 +3848,8 @@
         </p:nvSpPr>
         <p:spPr>
           <a:xfrm>
-            <a:off x="658368" y="1335024"/>
-            <a:ext cx="10881360" cy="502920"/>
-          </a:xfrm>
-          <a:prstGeom prst="rect">
-            <a:avLst/>
-          </a:prstGeom>
-          <a:noFill/>
-          <a:ln/>
-        </p:spPr>
-        <p:txBody>
-          <a:bodyPr wrap="square" lIns="0" tIns="0" rIns="0" bIns="0" rtlCol="0" anchor="ctr"/>
-          <a:lstStyle/>
-          <a:p>
-            <a:pPr indent="0" marL="0">
-              <a:buNone/>
-            </a:pPr>
-            <a:r>
-              <a:rPr lang="en-US" sz="3000" b="1" dirty="0">
-                <a:solidFill>
-                  <a:srgbClr val="101426"/>
-                </a:solidFill>
-                <a:latin typeface="Aptos Display" pitchFamily="34" charset="0"/>
-                <a:ea typeface="Aptos Display" pitchFamily="34" charset="-122"/>
-                <a:cs typeface="Aptos Display" pitchFamily="34" charset="-120"/>
-              </a:rPr>
-              <a:t>More selling.</a:t>
-            </a:r>
-            <a:endParaRPr lang="en-US" sz="3000" dirty="0"/>
-          </a:p>
-        </p:txBody>
-      </p:sp>
-      <p:sp>
-        <p:nvSpPr>
-          <p:cNvPr id="7" name="Text 4"/>
-          <p:cNvSpPr/>
-          <p:nvPr/>
-        </p:nvSpPr>
-        <p:spPr>
-          <a:xfrm>
-            <a:off x="658368" y="1773936"/>
-            <a:ext cx="10881360" cy="566928"/>
-          </a:xfrm>
-          <a:prstGeom prst="rect">
-            <a:avLst/>
-          </a:prstGeom>
-          <a:noFill/>
-          <a:ln/>
-        </p:spPr>
-        <p:txBody>
-          <a:bodyPr wrap="square" lIns="0" tIns="0" rIns="0" bIns="0" rtlCol="0" anchor="ctr"/>
-          <a:lstStyle/>
-          <a:p>
-            <a:pPr indent="0" marL="0">
-              <a:buNone/>
-            </a:pPr>
-            <a:r>
-              <a:rPr lang="en-US" sz="3000" b="1" dirty="0">
-                <a:solidFill>
-                  <a:srgbClr val="5A32ED"/>
-                </a:solidFill>
-                <a:latin typeface="Aptos Display" pitchFamily="34" charset="0"/>
-                <a:ea typeface="Aptos Display" pitchFamily="34" charset="-122"/>
-                <a:cs typeface="Aptos Display" pitchFamily="34" charset="-120"/>
-              </a:rPr>
-              <a:t>Less admin.</a:t>
-            </a:r>
-            <a:endParaRPr lang="en-US" sz="3000" dirty="0"/>
-          </a:p>
-        </p:txBody>
-      </p:sp>
-      <p:sp>
-        <p:nvSpPr>
-          <p:cNvPr id="8" name="Text 5"/>
-          <p:cNvSpPr/>
-          <p:nvPr/>
-        </p:nvSpPr>
-        <p:spPr>
-          <a:xfrm>
-            <a:off x="6784848" y="1581912"/>
-            <a:ext cx="4526280" cy="566928"/>
+            <a:off x="658368" y="1188720"/>
+            <a:ext cx="7589520" cy="457200"/>
           </a:xfrm>
           <a:prstGeom prst="rect">
             <a:avLst/>
@@ -3496,128 +3867,105 @@
               <a:buNone/>
             </a:pPr>
             <a:r>
-              <a:rPr lang="en-US" sz="1500" dirty="0">
+              <a:rPr lang="en-US" sz="2600" b="1" dirty="0">
+                <a:solidFill>
+                  <a:srgbClr val="101426"/>
+                </a:solidFill>
+                <a:latin typeface="Arial" pitchFamily="34" charset="0"/>
+                <a:ea typeface="Arial" pitchFamily="34" charset="-122"/>
+                <a:cs typeface="Arial" pitchFamily="34" charset="-120"/>
+              </a:rPr>
+              <a:t>More qualified conversations create the upside.</a:t>
+            </a:r>
+            <a:endParaRPr lang="en-US" sz="2600" dirty="0"/>
+          </a:p>
+        </p:txBody>
+      </p:sp>
+      <p:sp>
+        <p:nvSpPr>
+          <p:cNvPr id="7" name="Text 4"/>
+          <p:cNvSpPr/>
+          <p:nvPr/>
+        </p:nvSpPr>
+        <p:spPr>
+          <a:xfrm>
+            <a:off x="7909560" y="1234440"/>
+            <a:ext cx="3246120" cy="329184"/>
+          </a:xfrm>
+          <a:prstGeom prst="rect">
+            <a:avLst/>
+          </a:prstGeom>
+          <a:noFill/>
+          <a:ln/>
+        </p:spPr>
+        <p:txBody>
+          <a:bodyPr wrap="square" lIns="0" tIns="0" rIns="0" bIns="0" rtlCol="0" anchor="ctr">
+            <a:normAutofit/>
+          </a:bodyPr>
+          <a:lstStyle/>
+          <a:p>
+            <a:pPr algn="r" indent="0" marL="0">
+              <a:buNone/>
+            </a:pPr>
+            <a:r>
+              <a:rPr lang="en-US" sz="980" dirty="0">
                 <a:solidFill>
                   <a:srgbClr val="646A7E"/>
                 </a:solidFill>
-                <a:latin typeface="Aptos" pitchFamily="34" charset="0"/>
-                <a:ea typeface="Aptos" pitchFamily="34" charset="-122"/>
-                <a:cs typeface="Aptos" pitchFamily="34" charset="-120"/>
-              </a:rPr>
-              <a:t>Keep the team focused on conversations and next actions, not duplicate entry.</a:t>
-            </a:r>
-            <a:endParaRPr lang="en-US" sz="1500" dirty="0"/>
-          </a:p>
-        </p:txBody>
-      </p:sp>
-      <p:sp>
-        <p:nvSpPr>
-          <p:cNvPr id="9" name="Shape 6"/>
-          <p:cNvSpPr/>
-          <p:nvPr/>
-        </p:nvSpPr>
-        <p:spPr>
-          <a:xfrm>
-            <a:off x="658368" y="2542032"/>
-            <a:ext cx="5742432" cy="3337560"/>
+                <a:latin typeface="Arial" pitchFamily="34" charset="0"/>
+                <a:ea typeface="Arial" pitchFamily="34" charset="-122"/>
+                <a:cs typeface="Arial" pitchFamily="34" charset="-120"/>
+              </a:rPr>
+              <a:t>Example assumptions only. Replace with Statflo data before external use.</a:t>
+            </a:r>
+            <a:endParaRPr lang="en-US" sz="980" dirty="0"/>
+          </a:p>
+        </p:txBody>
+      </p:sp>
+      <p:sp>
+        <p:nvSpPr>
+          <p:cNvPr id="8" name="Shape 5"/>
+          <p:cNvSpPr/>
+          <p:nvPr/>
+        </p:nvSpPr>
+        <p:spPr>
+          <a:xfrm>
+            <a:off x="658368" y="1993392"/>
+            <a:ext cx="2450592" cy="2212848"/>
           </a:xfrm>
           <a:prstGeom prst="roundRect">
             <a:avLst>
-              <a:gd name="adj" fmla="val 4384"/>
+              <a:gd name="adj" fmla="val 4959"/>
             </a:avLst>
           </a:prstGeom>
           <a:solidFill>
             <a:srgbClr val="FFFFFF"/>
           </a:solidFill>
-          <a:ln w="10160">
-            <a:solidFill>
-              <a:srgbClr val="E6E2F2"/>
-            </a:solidFill>
-            <a:prstDash val="solid"/>
-          </a:ln>
-          <a:effectLst>
-            <a:outerShdw sx="100000" sy="100000" kx="0" ky="0" algn="bl" rotWithShape="0" blurRad="1.3535046848203775e+33" dist="2.707009369640755e+33" dir="7.558272e+39">
-              <a:srgbClr val="CFC7E8">
-                <a:alpha val="1.6e+39"/>
-              </a:srgbClr>
-            </a:outerShdw>
-          </a:effectLst>
-        </p:spPr>
-      </p:sp>
-      <p:sp>
-        <p:nvSpPr>
-          <p:cNvPr id="10" name="Text 7"/>
-          <p:cNvSpPr/>
-          <p:nvPr/>
-        </p:nvSpPr>
-        <p:spPr>
-          <a:xfrm>
-            <a:off x="987552" y="2862072"/>
-            <a:ext cx="2011680" cy="164592"/>
-          </a:xfrm>
-          <a:prstGeom prst="rect">
-            <a:avLst/>
-          </a:prstGeom>
-          <a:noFill/>
-          <a:ln/>
-        </p:spPr>
-        <p:txBody>
-          <a:bodyPr wrap="square" lIns="0" tIns="0" rIns="0" bIns="0" rtlCol="0" anchor="ctr"/>
-          <a:lstStyle/>
-          <a:p>
-            <a:pPr indent="0" marL="0">
-              <a:buNone/>
-            </a:pPr>
-            <a:r>
-              <a:rPr lang="en-US" sz="850" b="1" spc="140" kern="0" dirty="0">
-                <a:solidFill>
-                  <a:srgbClr val="5A32ED"/>
-                </a:solidFill>
-                <a:latin typeface="Aptos" pitchFamily="34" charset="0"/>
-                <a:ea typeface="Aptos" pitchFamily="34" charset="-122"/>
-                <a:cs typeface="Aptos" pitchFamily="34" charset="-120"/>
-              </a:rPr>
-              <a:t>NEW CRM ACTIVITY</a:t>
-            </a:r>
-            <a:endParaRPr lang="en-US" sz="850" dirty="0"/>
-          </a:p>
-        </p:txBody>
-      </p:sp>
-      <p:sp>
-        <p:nvSpPr>
-          <p:cNvPr id="11" name="Shape 8"/>
-          <p:cNvSpPr/>
-          <p:nvPr/>
-        </p:nvSpPr>
-        <p:spPr>
-          <a:xfrm>
-            <a:off x="987552" y="3337560"/>
-            <a:ext cx="566928" cy="566928"/>
-          </a:xfrm>
-          <a:prstGeom prst="ellipse">
-            <a:avLst/>
-          </a:prstGeom>
-          <a:solidFill>
-            <a:srgbClr val="EEE9FF"/>
-          </a:solidFill>
-          <a:ln w="8890">
+          <a:ln w="10795">
             <a:solidFill>
               <a:srgbClr val="D7CCFF"/>
             </a:solidFill>
             <a:prstDash val="solid"/>
           </a:ln>
-        </p:spPr>
-      </p:sp>
-      <p:sp>
-        <p:nvSpPr>
-          <p:cNvPr id="12" name="Text 9"/>
-          <p:cNvSpPr/>
-          <p:nvPr/>
-        </p:nvSpPr>
-        <p:spPr>
-          <a:xfrm>
-            <a:off x="987552" y="3511296"/>
-            <a:ext cx="566928" cy="164592"/>
+          <a:effectLst>
+            <a:outerShdw sx="100000" sy="100000" kx="0" ky="0" algn="bl" rotWithShape="0" blurRad="2.183067706146787e+41" dist="4.366135412293574e+41" dir="2.72097792e+49">
+              <a:srgbClr val="CFC7E8">
+                <a:alpha val="1.6e+49"/>
+              </a:srgbClr>
+            </a:outerShdw>
+          </a:effectLst>
+        </p:spPr>
+      </p:sp>
+      <p:sp>
+        <p:nvSpPr>
+          <p:cNvPr id="9" name="Text 6"/>
+          <p:cNvSpPr/>
+          <p:nvPr/>
+        </p:nvSpPr>
+        <p:spPr>
+          <a:xfrm>
+            <a:off x="859536" y="2359152"/>
+            <a:ext cx="2048256" cy="475488"/>
           </a:xfrm>
           <a:prstGeom prst="rect">
             <a:avLst/>
@@ -3633,69 +3981,69 @@
               <a:buNone/>
             </a:pPr>
             <a:r>
-              <a:rPr lang="en-US" sz="1100" b="1" dirty="0">
+              <a:rPr lang="en-US" sz="3000" b="1" dirty="0">
+                <a:solidFill>
+                  <a:srgbClr val="101426"/>
+                </a:solidFill>
+                <a:latin typeface="Arial" pitchFamily="34" charset="0"/>
+                <a:ea typeface="Arial" pitchFamily="34" charset="-122"/>
+                <a:cs typeface="Arial" pitchFamily="34" charset="-120"/>
+              </a:rPr>
+              <a:t>10,000</a:t>
+            </a:r>
+            <a:endParaRPr lang="en-US" sz="3000" dirty="0"/>
+          </a:p>
+        </p:txBody>
+      </p:sp>
+      <p:sp>
+        <p:nvSpPr>
+          <p:cNvPr id="10" name="Text 7"/>
+          <p:cNvSpPr/>
+          <p:nvPr/>
+        </p:nvSpPr>
+        <p:spPr>
+          <a:xfrm>
+            <a:off x="859536" y="3063240"/>
+            <a:ext cx="2048256" cy="128016"/>
+          </a:xfrm>
+          <a:prstGeom prst="rect">
+            <a:avLst/>
+          </a:prstGeom>
+          <a:noFill/>
+          <a:ln/>
+        </p:spPr>
+        <p:txBody>
+          <a:bodyPr wrap="square" lIns="0" tIns="0" rIns="0" bIns="0" rtlCol="0" anchor="ctr"/>
+          <a:lstStyle/>
+          <a:p>
+            <a:pPr algn="ctr" indent="0" marL="0">
+              <a:buNone/>
+            </a:pPr>
+            <a:r>
+              <a:rPr lang="en-US" sz="800" b="1" spc="90" kern="0" dirty="0">
                 <a:solidFill>
                   <a:srgbClr val="5A32ED"/>
                 </a:solidFill>
-                <a:latin typeface="Aptos" pitchFamily="34" charset="0"/>
-                <a:ea typeface="Aptos" pitchFamily="34" charset="-122"/>
-                <a:cs typeface="Aptos" pitchFamily="34" charset="-120"/>
-              </a:rPr>
-              <a:t>R</a:t>
-            </a:r>
-            <a:endParaRPr lang="en-US" sz="1100" dirty="0"/>
-          </a:p>
-        </p:txBody>
-      </p:sp>
-      <p:sp>
-        <p:nvSpPr>
-          <p:cNvPr id="13" name="Text 10"/>
-          <p:cNvSpPr/>
-          <p:nvPr/>
-        </p:nvSpPr>
-        <p:spPr>
-          <a:xfrm>
-            <a:off x="1755648" y="3300984"/>
-            <a:ext cx="2468880" cy="274320"/>
-          </a:xfrm>
-          <a:prstGeom prst="rect">
-            <a:avLst/>
-          </a:prstGeom>
-          <a:noFill/>
-          <a:ln/>
-        </p:spPr>
-        <p:txBody>
-          <a:bodyPr wrap="square" lIns="0" tIns="0" rIns="0" bIns="0" rtlCol="0" anchor="ctr"/>
-          <a:lstStyle/>
-          <a:p>
-            <a:pPr indent="0" marL="0">
-              <a:buNone/>
-            </a:pPr>
-            <a:r>
-              <a:rPr lang="en-US" sz="1600" b="1" dirty="0">
-                <a:solidFill>
-                  <a:srgbClr val="101426"/>
-                </a:solidFill>
-                <a:latin typeface="Aptos Display" pitchFamily="34" charset="0"/>
-                <a:ea typeface="Aptos Display" pitchFamily="34" charset="-122"/>
-                <a:cs typeface="Aptos Display" pitchFamily="34" charset="-120"/>
-              </a:rPr>
-              <a:t>Prospect replied</a:t>
-            </a:r>
-            <a:endParaRPr lang="en-US" sz="1600" dirty="0"/>
-          </a:p>
-        </p:txBody>
-      </p:sp>
-      <p:sp>
-        <p:nvSpPr>
-          <p:cNvPr id="14" name="Text 11"/>
-          <p:cNvSpPr/>
-          <p:nvPr/>
-        </p:nvSpPr>
-        <p:spPr>
-          <a:xfrm>
-            <a:off x="1755648" y="3694176"/>
-            <a:ext cx="3520440" cy="438912"/>
+                <a:latin typeface="Arial" pitchFamily="34" charset="0"/>
+                <a:ea typeface="Arial" pitchFamily="34" charset="-122"/>
+                <a:cs typeface="Arial" pitchFamily="34" charset="-120"/>
+              </a:rPr>
+              <a:t>ELIGIBLE CONTACTS</a:t>
+            </a:r>
+            <a:endParaRPr lang="en-US" sz="800" dirty="0"/>
+          </a:p>
+        </p:txBody>
+      </p:sp>
+      <p:sp>
+        <p:nvSpPr>
+          <p:cNvPr id="11" name="Text 8"/>
+          <p:cNvSpPr/>
+          <p:nvPr/>
+        </p:nvSpPr>
+        <p:spPr>
+          <a:xfrm>
+            <a:off x="859536" y="3456432"/>
+            <a:ext cx="2048256" cy="219456"/>
           </a:xfrm>
           <a:prstGeom prst="rect">
             <a:avLst/>
@@ -3709,46 +4057,159 @@
           </a:bodyPr>
           <a:lstStyle/>
           <a:p>
-            <a:pPr indent="0" marL="0">
-              <a:buNone/>
-            </a:pPr>
-            <a:r>
-              <a:rPr lang="en-US" sz="1050" dirty="0">
+            <a:pPr algn="ctr" indent="0" marL="0">
+              <a:buNone/>
+            </a:pPr>
+            <a:r>
+              <a:rPr lang="en-US" sz="950" dirty="0">
                 <a:solidFill>
                   <a:srgbClr val="646A7E"/>
                 </a:solidFill>
-                <a:latin typeface="Aptos" pitchFamily="34" charset="0"/>
-                <a:ea typeface="Aptos" pitchFamily="34" charset="-122"/>
-                <a:cs typeface="Aptos" pitchFamily="34" charset="-120"/>
-              </a:rPr>
-              <a:t>Campaign context and conversation history are attached.</a:t>
-            </a:r>
-            <a:endParaRPr lang="en-US" sz="1050" dirty="0"/>
-          </a:p>
-        </p:txBody>
-      </p:sp>
-      <p:sp>
-        <p:nvSpPr>
-          <p:cNvPr id="15" name="Shape 12"/>
-          <p:cNvSpPr/>
-          <p:nvPr/>
-        </p:nvSpPr>
-        <p:spPr>
-          <a:xfrm>
-            <a:off x="987552" y="4416552"/>
-            <a:ext cx="5047488" cy="0"/>
+                <a:latin typeface="Arial" pitchFamily="34" charset="0"/>
+                <a:ea typeface="Arial" pitchFamily="34" charset="-122"/>
+                <a:cs typeface="Arial" pitchFamily="34" charset="-120"/>
+              </a:rPr>
+              <a:t>Approved starting audience</a:t>
+            </a:r>
+            <a:endParaRPr lang="en-US" sz="950" dirty="0"/>
+          </a:p>
+        </p:txBody>
+      </p:sp>
+      <p:sp>
+        <p:nvSpPr>
+          <p:cNvPr id="12" name="Shape 9"/>
+          <p:cNvSpPr/>
+          <p:nvPr/>
+        </p:nvSpPr>
+        <p:spPr>
+          <a:xfrm>
+            <a:off x="3154680" y="3090672"/>
+            <a:ext cx="228600" cy="0"/>
           </a:xfrm>
           <a:prstGeom prst="line">
             <a:avLst/>
           </a:prstGeom>
           <a:noFill/>
-          <a:ln w="8890">
+          <a:ln w="15875">
             <a:solidFill>
-              <a:srgbClr val="E6E2F2"/>
+              <a:srgbClr val="5A32ED"/>
+            </a:solidFill>
+            <a:prstDash val="solid"/>
+            <a:tailEnd type="triangle"/>
+          </a:ln>
+        </p:spPr>
+      </p:sp>
+      <p:sp>
+        <p:nvSpPr>
+          <p:cNvPr id="13" name="Shape 10"/>
+          <p:cNvSpPr/>
+          <p:nvPr/>
+        </p:nvSpPr>
+        <p:spPr>
+          <a:xfrm>
+            <a:off x="3447288" y="1993392"/>
+            <a:ext cx="2450592" cy="2212848"/>
+          </a:xfrm>
+          <a:prstGeom prst="roundRect">
+            <a:avLst>
+              <a:gd name="adj" fmla="val 4959"/>
+            </a:avLst>
+          </a:prstGeom>
+          <a:solidFill>
+            <a:srgbClr val="050A1F"/>
+          </a:solidFill>
+          <a:ln w="10795">
+            <a:solidFill>
+              <a:srgbClr val="050A1F"/>
             </a:solidFill>
             <a:prstDash val="solid"/>
           </a:ln>
-        </p:spPr>
+          <a:effectLst>
+            <a:outerShdw sx="100000" sy="100000" kx="0" ky="0" algn="bl" rotWithShape="0" blurRad="2.7724959868064195e+45" dist="5.544991973612839e+45" dir="1.6325867520000003e+54">
+              <a:srgbClr val="CFC7E8">
+                <a:alpha val="1.6e+54"/>
+              </a:srgbClr>
+            </a:outerShdw>
+          </a:effectLst>
+        </p:spPr>
+      </p:sp>
+      <p:sp>
+        <p:nvSpPr>
+          <p:cNvPr id="14" name="Text 11"/>
+          <p:cNvSpPr/>
+          <p:nvPr/>
+        </p:nvSpPr>
+        <p:spPr>
+          <a:xfrm>
+            <a:off x="3648456" y="2359152"/>
+            <a:ext cx="2048256" cy="475488"/>
+          </a:xfrm>
+          <a:prstGeom prst="rect">
+            <a:avLst/>
+          </a:prstGeom>
+          <a:noFill/>
+          <a:ln/>
+        </p:spPr>
+        <p:txBody>
+          <a:bodyPr wrap="square" lIns="0" tIns="0" rIns="0" bIns="0" rtlCol="0" anchor="ctr"/>
+          <a:lstStyle/>
+          <a:p>
+            <a:pPr algn="ctr" indent="0" marL="0">
+              <a:buNone/>
+            </a:pPr>
+            <a:r>
+              <a:rPr lang="en-US" sz="3000" b="1" dirty="0">
+                <a:solidFill>
+                  <a:srgbClr val="FFFFFF"/>
+                </a:solidFill>
+                <a:latin typeface="Arial" pitchFamily="34" charset="0"/>
+                <a:ea typeface="Arial" pitchFamily="34" charset="-122"/>
+                <a:cs typeface="Arial" pitchFamily="34" charset="-120"/>
+              </a:rPr>
+              <a:t>8%</a:t>
+            </a:r>
+            <a:endParaRPr lang="en-US" sz="3000" dirty="0"/>
+          </a:p>
+        </p:txBody>
+      </p:sp>
+      <p:sp>
+        <p:nvSpPr>
+          <p:cNvPr id="15" name="Text 12"/>
+          <p:cNvSpPr/>
+          <p:nvPr/>
+        </p:nvSpPr>
+        <p:spPr>
+          <a:xfrm>
+            <a:off x="3648456" y="3063240"/>
+            <a:ext cx="2048256" cy="128016"/>
+          </a:xfrm>
+          <a:prstGeom prst="rect">
+            <a:avLst/>
+          </a:prstGeom>
+          <a:noFill/>
+          <a:ln/>
+        </p:spPr>
+        <p:txBody>
+          <a:bodyPr wrap="square" lIns="0" tIns="0" rIns="0" bIns="0" rtlCol="0" anchor="ctr"/>
+          <a:lstStyle/>
+          <a:p>
+            <a:pPr algn="ctr" indent="0" marL="0">
+              <a:buNone/>
+            </a:pPr>
+            <a:r>
+              <a:rPr lang="en-US" sz="800" b="1" spc="90" kern="0" dirty="0">
+                <a:solidFill>
+                  <a:srgbClr val="9F8BFF"/>
+                </a:solidFill>
+                <a:latin typeface="Arial" pitchFamily="34" charset="0"/>
+                <a:ea typeface="Arial" pitchFamily="34" charset="-122"/>
+                <a:cs typeface="Arial" pitchFamily="34" charset="-120"/>
+              </a:rPr>
+              <a:t>POSITIVE REPLIES</a:t>
+            </a:r>
+            <a:endParaRPr lang="en-US" sz="800" dirty="0"/>
+          </a:p>
+        </p:txBody>
       </p:sp>
       <p:sp>
         <p:nvSpPr>
@@ -3758,8 +4219,107 @@
         </p:nvSpPr>
         <p:spPr>
           <a:xfrm>
-            <a:off x="987552" y="4709160"/>
-            <a:ext cx="804672" cy="137160"/>
+            <a:off x="3648456" y="3456432"/>
+            <a:ext cx="2048256" cy="219456"/>
+          </a:xfrm>
+          <a:prstGeom prst="rect">
+            <a:avLst/>
+          </a:prstGeom>
+          <a:noFill/>
+          <a:ln/>
+        </p:spPr>
+        <p:txBody>
+          <a:bodyPr wrap="square" lIns="0" tIns="0" rIns="0" bIns="0" rtlCol="0" anchor="ctr">
+            <a:normAutofit/>
+          </a:bodyPr>
+          <a:lstStyle/>
+          <a:p>
+            <a:pPr algn="ctr" indent="0" marL="0">
+              <a:buNone/>
+            </a:pPr>
+            <a:r>
+              <a:rPr lang="en-US" sz="950" dirty="0">
+                <a:solidFill>
+                  <a:srgbClr val="D6D9E5"/>
+                </a:solidFill>
+                <a:latin typeface="Arial" pitchFamily="34" charset="0"/>
+                <a:ea typeface="Arial" pitchFamily="34" charset="-122"/>
+                <a:cs typeface="Arial" pitchFamily="34" charset="-120"/>
+              </a:rPr>
+              <a:t>800 conversations</a:t>
+            </a:r>
+            <a:endParaRPr lang="en-US" sz="950" dirty="0"/>
+          </a:p>
+        </p:txBody>
+      </p:sp>
+      <p:sp>
+        <p:nvSpPr>
+          <p:cNvPr id="17" name="Shape 14"/>
+          <p:cNvSpPr/>
+          <p:nvPr/>
+        </p:nvSpPr>
+        <p:spPr>
+          <a:xfrm>
+            <a:off x="5943600" y="3090672"/>
+            <a:ext cx="228600" cy="0"/>
+          </a:xfrm>
+          <a:prstGeom prst="line">
+            <a:avLst/>
+          </a:prstGeom>
+          <a:noFill/>
+          <a:ln w="15875">
+            <a:solidFill>
+              <a:srgbClr val="5A32ED"/>
+            </a:solidFill>
+            <a:prstDash val="solid"/>
+            <a:tailEnd type="triangle"/>
+          </a:ln>
+        </p:spPr>
+      </p:sp>
+      <p:sp>
+        <p:nvSpPr>
+          <p:cNvPr id="18" name="Shape 15"/>
+          <p:cNvSpPr/>
+          <p:nvPr/>
+        </p:nvSpPr>
+        <p:spPr>
+          <a:xfrm>
+            <a:off x="6236208" y="1993392"/>
+            <a:ext cx="2450592" cy="2212848"/>
+          </a:xfrm>
+          <a:prstGeom prst="roundRect">
+            <a:avLst>
+              <a:gd name="adj" fmla="val 4959"/>
+            </a:avLst>
+          </a:prstGeom>
+          <a:solidFill>
+            <a:srgbClr val="FFFFFF"/>
+          </a:solidFill>
+          <a:ln w="10795">
+            <a:solidFill>
+              <a:srgbClr val="D7CCFF"/>
+            </a:solidFill>
+            <a:prstDash val="solid"/>
+          </a:ln>
+          <a:effectLst>
+            <a:outerShdw sx="100000" sy="100000" kx="0" ky="0" algn="bl" rotWithShape="0" blurRad="3.5210699032441527e+49" dist="7.042139806488305e+49" dir="9.795520512000002e+58">
+              <a:srgbClr val="CFC7E8">
+                <a:alpha val="1.6e+59"/>
+              </a:srgbClr>
+            </a:outerShdw>
+          </a:effectLst>
+        </p:spPr>
+      </p:sp>
+      <p:sp>
+        <p:nvSpPr>
+          <p:cNvPr id="19" name="Text 16"/>
+          <p:cNvSpPr/>
+          <p:nvPr/>
+        </p:nvSpPr>
+        <p:spPr>
+          <a:xfrm>
+            <a:off x="6437376" y="2359152"/>
+            <a:ext cx="2048256" cy="475488"/>
           </a:xfrm>
           <a:prstGeom prst="rect">
             <a:avLst/>
@@ -3771,19 +4331,58 @@
           <a:bodyPr wrap="square" lIns="0" tIns="0" rIns="0" bIns="0" rtlCol="0" anchor="ctr"/>
           <a:lstStyle/>
           <a:p>
-            <a:pPr indent="0" marL="0">
-              <a:buNone/>
-            </a:pPr>
-            <a:r>
-              <a:rPr lang="en-US" sz="800" b="1" dirty="0">
-                <a:solidFill>
-                  <a:srgbClr val="8A8FA0"/>
-                </a:solidFill>
-                <a:latin typeface="Aptos" pitchFamily="34" charset="0"/>
-                <a:ea typeface="Aptos" pitchFamily="34" charset="-122"/>
-                <a:cs typeface="Aptos" pitchFamily="34" charset="-120"/>
-              </a:rPr>
-              <a:t>SOURCE</a:t>
+            <a:pPr algn="ctr" indent="0" marL="0">
+              <a:buNone/>
+            </a:pPr>
+            <a:r>
+              <a:rPr lang="en-US" sz="3000" b="1" dirty="0">
+                <a:solidFill>
+                  <a:srgbClr val="101426"/>
+                </a:solidFill>
+                <a:latin typeface="Arial" pitchFamily="34" charset="0"/>
+                <a:ea typeface="Arial" pitchFamily="34" charset="-122"/>
+                <a:cs typeface="Arial" pitchFamily="34" charset="-120"/>
+              </a:rPr>
+              <a:t>20%</a:t>
+            </a:r>
+            <a:endParaRPr lang="en-US" sz="3000" dirty="0"/>
+          </a:p>
+        </p:txBody>
+      </p:sp>
+      <p:sp>
+        <p:nvSpPr>
+          <p:cNvPr id="20" name="Text 17"/>
+          <p:cNvSpPr/>
+          <p:nvPr/>
+        </p:nvSpPr>
+        <p:spPr>
+          <a:xfrm>
+            <a:off x="6437376" y="3063240"/>
+            <a:ext cx="2048256" cy="128016"/>
+          </a:xfrm>
+          <a:prstGeom prst="rect">
+            <a:avLst/>
+          </a:prstGeom>
+          <a:noFill/>
+          <a:ln/>
+        </p:spPr>
+        <p:txBody>
+          <a:bodyPr wrap="square" lIns="0" tIns="0" rIns="0" bIns="0" rtlCol="0" anchor="ctr"/>
+          <a:lstStyle/>
+          <a:p>
+            <a:pPr algn="ctr" indent="0" marL="0">
+              <a:buNone/>
+            </a:pPr>
+            <a:r>
+              <a:rPr lang="en-US" sz="800" b="1" spc="90" kern="0" dirty="0">
+                <a:solidFill>
+                  <a:srgbClr val="5A32ED"/>
+                </a:solidFill>
+                <a:latin typeface="Arial" pitchFamily="34" charset="0"/>
+                <a:ea typeface="Arial" pitchFamily="34" charset="-122"/>
+                <a:cs typeface="Arial" pitchFamily="34" charset="-120"/>
+              </a:rPr>
+              <a:t>QUALIFIED</a:t>
             </a:r>
             <a:endParaRPr lang="en-US" sz="800" dirty="0"/>
           </a:p>
@@ -3791,156 +4390,89 @@
       </p:sp>
       <p:sp>
         <p:nvSpPr>
-          <p:cNvPr id="17" name="Text 14"/>
-          <p:cNvSpPr/>
-          <p:nvPr/>
-        </p:nvSpPr>
-        <p:spPr>
-          <a:xfrm>
-            <a:off x="1993392" y="4681728"/>
-            <a:ext cx="1965960" cy="164592"/>
-          </a:xfrm>
-          <a:prstGeom prst="rect">
-            <a:avLst/>
-          </a:prstGeom>
-          <a:noFill/>
-          <a:ln/>
-        </p:spPr>
-        <p:txBody>
-          <a:bodyPr wrap="square" lIns="0" tIns="0" rIns="0" bIns="0" rtlCol="0" anchor="ctr"/>
-          <a:lstStyle/>
-          <a:p>
-            <a:pPr indent="0" marL="0">
-              <a:buNone/>
-            </a:pPr>
-            <a:r>
-              <a:rPr lang="en-US" sz="1000" b="1" dirty="0">
-                <a:solidFill>
-                  <a:srgbClr val="101426"/>
-                </a:solidFill>
-                <a:latin typeface="Aptos" pitchFamily="34" charset="0"/>
-                <a:ea typeface="Aptos" pitchFamily="34" charset="-122"/>
-                <a:cs typeface="Aptos" pitchFamily="34" charset="-120"/>
-              </a:rPr>
-              <a:t>LeadReacher campaign</a:t>
-            </a:r>
-            <a:endParaRPr lang="en-US" sz="1000" dirty="0"/>
-          </a:p>
-        </p:txBody>
-      </p:sp>
-      <p:sp>
-        <p:nvSpPr>
-          <p:cNvPr id="18" name="Text 15"/>
-          <p:cNvSpPr/>
-          <p:nvPr/>
-        </p:nvSpPr>
-        <p:spPr>
-          <a:xfrm>
-            <a:off x="987552" y="5138928"/>
-            <a:ext cx="932688" cy="137160"/>
-          </a:xfrm>
-          <a:prstGeom prst="rect">
-            <a:avLst/>
-          </a:prstGeom>
-          <a:noFill/>
-          <a:ln/>
-        </p:spPr>
-        <p:txBody>
-          <a:bodyPr wrap="square" lIns="0" tIns="0" rIns="0" bIns="0" rtlCol="0" anchor="ctr"/>
-          <a:lstStyle/>
-          <a:p>
-            <a:pPr indent="0" marL="0">
-              <a:buNone/>
-            </a:pPr>
-            <a:r>
-              <a:rPr lang="en-US" sz="800" b="1" dirty="0">
-                <a:solidFill>
-                  <a:srgbClr val="8A8FA0"/>
-                </a:solidFill>
-                <a:latin typeface="Aptos" pitchFamily="34" charset="0"/>
-                <a:ea typeface="Aptos" pitchFamily="34" charset="-122"/>
-                <a:cs typeface="Aptos" pitchFamily="34" charset="-120"/>
-              </a:rPr>
-              <a:t>NEXT ACTION</a:t>
-            </a:r>
-            <a:endParaRPr lang="en-US" sz="800" dirty="0"/>
-          </a:p>
-        </p:txBody>
-      </p:sp>
-      <p:sp>
-        <p:nvSpPr>
-          <p:cNvPr id="19" name="Text 16"/>
-          <p:cNvSpPr/>
-          <p:nvPr/>
-        </p:nvSpPr>
-        <p:spPr>
-          <a:xfrm>
-            <a:off x="1993392" y="5111496"/>
-            <a:ext cx="2606040" cy="164592"/>
-          </a:xfrm>
-          <a:prstGeom prst="rect">
-            <a:avLst/>
-          </a:prstGeom>
-          <a:noFill/>
-          <a:ln/>
-        </p:spPr>
-        <p:txBody>
-          <a:bodyPr wrap="square" lIns="0" tIns="0" rIns="0" bIns="0" rtlCol="0" anchor="ctr"/>
-          <a:lstStyle/>
-          <a:p>
-            <a:pPr indent="0" marL="0">
-              <a:buNone/>
-            </a:pPr>
-            <a:r>
-              <a:rPr lang="en-US" sz="1000" b="1" dirty="0">
-                <a:solidFill>
-                  <a:srgbClr val="101426"/>
-                </a:solidFill>
-                <a:latin typeface="Aptos" pitchFamily="34" charset="0"/>
-                <a:ea typeface="Aptos" pitchFamily="34" charset="-122"/>
-                <a:cs typeface="Aptos" pitchFamily="34" charset="-120"/>
-              </a:rPr>
-              <a:t>Follow up while interest is fresh</a:t>
-            </a:r>
-            <a:endParaRPr lang="en-US" sz="1000" dirty="0"/>
-          </a:p>
-        </p:txBody>
-      </p:sp>
-      <p:sp>
-        <p:nvSpPr>
-          <p:cNvPr id="20" name="Shape 17"/>
-          <p:cNvSpPr/>
-          <p:nvPr/>
-        </p:nvSpPr>
-        <p:spPr>
-          <a:xfrm>
-            <a:off x="5532120" y="4956048"/>
-            <a:ext cx="320040" cy="320040"/>
-          </a:xfrm>
-          <a:prstGeom prst="ellipse">
-            <a:avLst/>
+          <p:cNvPr id="21" name="Text 18"/>
+          <p:cNvSpPr/>
+          <p:nvPr/>
+        </p:nvSpPr>
+        <p:spPr>
+          <a:xfrm>
+            <a:off x="6437376" y="3456432"/>
+            <a:ext cx="2048256" cy="219456"/>
+          </a:xfrm>
+          <a:prstGeom prst="rect">
+            <a:avLst/>
+          </a:prstGeom>
+          <a:noFill/>
+          <a:ln/>
+        </p:spPr>
+        <p:txBody>
+          <a:bodyPr wrap="square" lIns="0" tIns="0" rIns="0" bIns="0" rtlCol="0" anchor="ctr">
+            <a:normAutofit/>
+          </a:bodyPr>
+          <a:lstStyle/>
+          <a:p>
+            <a:pPr algn="ctr" indent="0" marL="0">
+              <a:buNone/>
+            </a:pPr>
+            <a:r>
+              <a:rPr lang="en-US" sz="950" dirty="0">
+                <a:solidFill>
+                  <a:srgbClr val="646A7E"/>
+                </a:solidFill>
+                <a:latin typeface="Arial" pitchFamily="34" charset="0"/>
+                <a:ea typeface="Arial" pitchFamily="34" charset="-122"/>
+                <a:cs typeface="Arial" pitchFamily="34" charset="-120"/>
+              </a:rPr>
+              <a:t>160 opportunities</a:t>
+            </a:r>
+            <a:endParaRPr lang="en-US" sz="950" dirty="0"/>
+          </a:p>
+        </p:txBody>
+      </p:sp>
+      <p:sp>
+        <p:nvSpPr>
+          <p:cNvPr id="22" name="Shape 19"/>
+          <p:cNvSpPr/>
+          <p:nvPr/>
+        </p:nvSpPr>
+        <p:spPr>
+          <a:xfrm>
+            <a:off x="9015984" y="1993392"/>
+            <a:ext cx="2615184" cy="2212848"/>
+          </a:xfrm>
+          <a:prstGeom prst="roundRect">
+            <a:avLst>
+              <a:gd name="adj" fmla="val 4959"/>
+            </a:avLst>
           </a:prstGeom>
           <a:solidFill>
-            <a:srgbClr val="EAF8F0"/>
+            <a:srgbClr val="5A32ED"/>
           </a:solidFill>
           <a:ln w="12700">
             <a:solidFill>
-              <a:srgbClr val="159956"/>
+              <a:srgbClr val="5A32ED"/>
             </a:solidFill>
             <a:prstDash val="solid"/>
           </a:ln>
-        </p:spPr>
-      </p:sp>
-      <p:sp>
-        <p:nvSpPr>
-          <p:cNvPr id="21" name="Text 18"/>
-          <p:cNvSpPr/>
-          <p:nvPr/>
-        </p:nvSpPr>
-        <p:spPr>
-          <a:xfrm>
-            <a:off x="5532120" y="5006340"/>
-            <a:ext cx="320040" cy="153619"/>
+          <a:effectLst>
+            <a:outerShdw sx="100000" sy="100000" kx="0" ky="0" algn="bl" rotWithShape="0" blurRad="4.471758777120074e+53" dist="8.943517554240149e+53" dir="5.877312307200001e+63">
+              <a:srgbClr val="CFC7E8">
+                <a:alpha val="1.5999999999999998e+64"/>
+              </a:srgbClr>
+            </a:outerShdw>
+          </a:effectLst>
+        </p:spPr>
+      </p:sp>
+      <p:sp>
+        <p:nvSpPr>
+          <p:cNvPr id="23" name="Text 20"/>
+          <p:cNvSpPr/>
+          <p:nvPr/>
+        </p:nvSpPr>
+        <p:spPr>
+          <a:xfrm>
+            <a:off x="9217152" y="2377440"/>
+            <a:ext cx="2212848" cy="512064"/>
           </a:xfrm>
           <a:prstGeom prst="rect">
             <a:avLst/>
@@ -3956,40 +4488,120 @@
               <a:buNone/>
             </a:pPr>
             <a:r>
-              <a:rPr lang="en-US" sz="900" b="1" dirty="0">
-                <a:solidFill>
-                  <a:srgbClr val="159956"/>
-                </a:solidFill>
-                <a:latin typeface="Aptos" pitchFamily="34" charset="0"/>
-                <a:ea typeface="Aptos" pitchFamily="34" charset="-122"/>
-                <a:cs typeface="Aptos" pitchFamily="34" charset="-120"/>
-              </a:rPr>
-              <a:t>✓</a:t>
-            </a:r>
-            <a:endParaRPr lang="en-US" sz="900" dirty="0"/>
-          </a:p>
-        </p:txBody>
-      </p:sp>
-      <p:sp>
-        <p:nvSpPr>
-          <p:cNvPr id="22" name="Shape 19"/>
-          <p:cNvSpPr/>
-          <p:nvPr/>
-        </p:nvSpPr>
-        <p:spPr>
-          <a:xfrm>
-            <a:off x="6931152" y="2734056"/>
-            <a:ext cx="228600" cy="228600"/>
-          </a:xfrm>
-          <a:prstGeom prst="ellipse">
-            <a:avLst/>
+              <a:rPr lang="en-US" sz="3100" b="1" dirty="0">
+                <a:solidFill>
+                  <a:srgbClr val="FFFFFF"/>
+                </a:solidFill>
+                <a:latin typeface="Arial" pitchFamily="34" charset="0"/>
+                <a:ea typeface="Arial" pitchFamily="34" charset="-122"/>
+                <a:cs typeface="Arial" pitchFamily="34" charset="-120"/>
+              </a:rPr>
+              <a:t>$800K</a:t>
+            </a:r>
+            <a:endParaRPr lang="en-US" sz="3100" dirty="0"/>
+          </a:p>
+        </p:txBody>
+      </p:sp>
+      <p:sp>
+        <p:nvSpPr>
+          <p:cNvPr id="24" name="Text 21"/>
+          <p:cNvSpPr/>
+          <p:nvPr/>
+        </p:nvSpPr>
+        <p:spPr>
+          <a:xfrm>
+            <a:off x="9217152" y="3063240"/>
+            <a:ext cx="2212848" cy="128016"/>
+          </a:xfrm>
+          <a:prstGeom prst="rect">
+            <a:avLst/>
+          </a:prstGeom>
+          <a:noFill/>
+          <a:ln/>
+        </p:spPr>
+        <p:txBody>
+          <a:bodyPr wrap="square" lIns="0" tIns="0" rIns="0" bIns="0" rtlCol="0" anchor="ctr"/>
+          <a:lstStyle/>
+          <a:p>
+            <a:pPr algn="ctr" indent="0" marL="0">
+              <a:buNone/>
+            </a:pPr>
+            <a:r>
+              <a:rPr lang="en-US" sz="800" b="1" spc="80" kern="0" dirty="0">
+                <a:solidFill>
+                  <a:srgbClr val="E4DEFF"/>
+                </a:solidFill>
+                <a:latin typeface="Arial" pitchFamily="34" charset="0"/>
+                <a:ea typeface="Arial" pitchFamily="34" charset="-122"/>
+                <a:cs typeface="Arial" pitchFamily="34" charset="-120"/>
+              </a:rPr>
+              <a:t>POTENTIAL PIPELINE</a:t>
+            </a:r>
+            <a:endParaRPr lang="en-US" sz="800" dirty="0"/>
+          </a:p>
+        </p:txBody>
+      </p:sp>
+      <p:sp>
+        <p:nvSpPr>
+          <p:cNvPr id="25" name="Text 22"/>
+          <p:cNvSpPr/>
+          <p:nvPr/>
+        </p:nvSpPr>
+        <p:spPr>
+          <a:xfrm>
+            <a:off x="9217152" y="3456432"/>
+            <a:ext cx="2212848" cy="219456"/>
+          </a:xfrm>
+          <a:prstGeom prst="rect">
+            <a:avLst/>
+          </a:prstGeom>
+          <a:noFill/>
+          <a:ln/>
+        </p:spPr>
+        <p:txBody>
+          <a:bodyPr wrap="square" lIns="0" tIns="0" rIns="0" bIns="0" rtlCol="0" anchor="ctr"/>
+          <a:lstStyle/>
+          <a:p>
+            <a:pPr algn="ctr" indent="0" marL="0">
+              <a:buNone/>
+            </a:pPr>
+            <a:r>
+              <a:rPr lang="en-US" sz="950" dirty="0">
+                <a:solidFill>
+                  <a:srgbClr val="FFFFFF"/>
+                </a:solidFill>
+                <a:latin typeface="Arial" pitchFamily="34" charset="0"/>
+                <a:ea typeface="Arial" pitchFamily="34" charset="-122"/>
+                <a:cs typeface="Arial" pitchFamily="34" charset="-120"/>
+              </a:rPr>
+              <a:t>160 × $5K opportunity value</a:t>
+            </a:r>
+            <a:endParaRPr lang="en-US" sz="950" dirty="0"/>
+          </a:p>
+        </p:txBody>
+      </p:sp>
+      <p:sp>
+        <p:nvSpPr>
+          <p:cNvPr id="26" name="Shape 23"/>
+          <p:cNvSpPr/>
+          <p:nvPr/>
+        </p:nvSpPr>
+        <p:spPr>
+          <a:xfrm>
+            <a:off x="658368" y="4590288"/>
+            <a:ext cx="10972800" cy="1143000"/>
+          </a:xfrm>
+          <a:prstGeom prst="roundRect">
+            <a:avLst>
+              <a:gd name="adj" fmla="val 8000"/>
+            </a:avLst>
           </a:prstGeom>
           <a:solidFill>
-            <a:srgbClr val="EAF8F0"/>
+            <a:srgbClr val="F7F5FF"/>
           </a:solidFill>
-          <a:ln w="12700">
+          <a:ln w="10160">
             <a:solidFill>
-              <a:srgbClr val="159956"/>
+              <a:srgbClr val="D7CCFF"/>
             </a:solidFill>
             <a:prstDash val="solid"/>
           </a:ln>
@@ -3997,14 +4609,14 @@
       </p:sp>
       <p:sp>
         <p:nvSpPr>
-          <p:cNvPr id="23" name="Text 20"/>
-          <p:cNvSpPr/>
-          <p:nvPr/>
-        </p:nvSpPr>
-        <p:spPr>
-          <a:xfrm>
-            <a:off x="6931152" y="2784348"/>
-            <a:ext cx="228600" cy="109728"/>
+          <p:cNvPr id="27" name="Text 24"/>
+          <p:cNvSpPr/>
+          <p:nvPr/>
+        </p:nvSpPr>
+        <p:spPr>
+          <a:xfrm>
+            <a:off x="960120" y="4882896"/>
+            <a:ext cx="1371600" cy="118872"/>
           </a:xfrm>
           <a:prstGeom prst="rect">
             <a:avLst/>
@@ -4016,395 +4628,107 @@
           <a:bodyPr wrap="square" lIns="0" tIns="0" rIns="0" bIns="0" rtlCol="0" anchor="ctr"/>
           <a:lstStyle/>
           <a:p>
-            <a:pPr algn="ctr" indent="0" marL="0">
-              <a:buNone/>
-            </a:pPr>
-            <a:r>
-              <a:rPr lang="en-US" sz="900" b="1" dirty="0">
-                <a:solidFill>
-                  <a:srgbClr val="159956"/>
-                </a:solidFill>
-                <a:latin typeface="Aptos" pitchFamily="34" charset="0"/>
-                <a:ea typeface="Aptos" pitchFamily="34" charset="-122"/>
-                <a:cs typeface="Aptos" pitchFamily="34" charset="-120"/>
-              </a:rPr>
-              <a:t>✓</a:t>
-            </a:r>
-            <a:endParaRPr lang="en-US" sz="900" dirty="0"/>
-          </a:p>
-        </p:txBody>
-      </p:sp>
-      <p:sp>
-        <p:nvSpPr>
-          <p:cNvPr id="24" name="Text 21"/>
-          <p:cNvSpPr/>
-          <p:nvPr/>
-        </p:nvSpPr>
-        <p:spPr>
-          <a:xfrm>
-            <a:off x="7278624" y="2724912"/>
-            <a:ext cx="3675888" cy="192024"/>
-          </a:xfrm>
-          <a:prstGeom prst="rect">
-            <a:avLst/>
-          </a:prstGeom>
-          <a:noFill/>
-          <a:ln/>
-        </p:spPr>
-        <p:txBody>
-          <a:bodyPr wrap="square" lIns="0" tIns="0" rIns="0" bIns="0" rtlCol="0" anchor="ctr"/>
-          <a:lstStyle/>
-          <a:p>
             <a:pPr indent="0" marL="0">
               <a:buNone/>
             </a:pPr>
             <a:r>
-              <a:rPr lang="en-US" sz="1250" b="1" dirty="0">
-                <a:solidFill>
-                  <a:srgbClr val="101426"/>
-                </a:solidFill>
-                <a:latin typeface="Aptos" pitchFamily="34" charset="0"/>
-                <a:ea typeface="Aptos" pitchFamily="34" charset="-122"/>
-                <a:cs typeface="Aptos" pitchFamily="34" charset="-120"/>
-              </a:rPr>
-              <a:t>Replies retain context</a:t>
-            </a:r>
-            <a:endParaRPr lang="en-US" sz="1250" dirty="0"/>
-          </a:p>
-        </p:txBody>
-      </p:sp>
-      <p:sp>
-        <p:nvSpPr>
-          <p:cNvPr id="25" name="Text 22"/>
-          <p:cNvSpPr/>
-          <p:nvPr/>
-        </p:nvSpPr>
-        <p:spPr>
-          <a:xfrm>
-            <a:off x="7278624" y="2980944"/>
-            <a:ext cx="3675888" cy="438912"/>
-          </a:xfrm>
-          <a:prstGeom prst="rect">
-            <a:avLst/>
-          </a:prstGeom>
-          <a:noFill/>
-          <a:ln/>
-        </p:spPr>
-        <p:txBody>
-          <a:bodyPr wrap="square" lIns="0" tIns="0" rIns="0" bIns="0" rtlCol="0" anchor="t">
+              <a:rPr lang="en-US" sz="780" b="1" spc="100" kern="0" dirty="0">
+                <a:solidFill>
+                  <a:srgbClr val="5A32ED"/>
+                </a:solidFill>
+                <a:latin typeface="Arial" pitchFamily="34" charset="0"/>
+                <a:ea typeface="Arial" pitchFamily="34" charset="-122"/>
+                <a:cs typeface="Arial" pitchFamily="34" charset="-120"/>
+              </a:rPr>
+              <a:t>REVENUE MODEL</a:t>
+            </a:r>
+            <a:endParaRPr lang="en-US" sz="780" dirty="0"/>
+          </a:p>
+        </p:txBody>
+      </p:sp>
+      <p:sp>
+        <p:nvSpPr>
+          <p:cNvPr id="28" name="Text 25"/>
+          <p:cNvSpPr/>
+          <p:nvPr/>
+        </p:nvSpPr>
+        <p:spPr>
+          <a:xfrm>
+            <a:off x="2450592" y="4818888"/>
+            <a:ext cx="6675120" cy="256032"/>
+          </a:xfrm>
+          <a:prstGeom prst="rect">
+            <a:avLst/>
+          </a:prstGeom>
+          <a:noFill/>
+          <a:ln/>
+        </p:spPr>
+        <p:txBody>
+          <a:bodyPr wrap="square" lIns="0" tIns="0" rIns="0" bIns="0" rtlCol="0" anchor="ctr">
             <a:normAutofit/>
           </a:bodyPr>
           <a:lstStyle/>
           <a:p>
-            <a:pPr indent="0" marL="0">
-              <a:buNone/>
-            </a:pPr>
-            <a:r>
-              <a:rPr lang="en-US" sz="1050" dirty="0">
+            <a:pPr algn="ctr" indent="0" marL="0">
+              <a:buNone/>
+            </a:pPr>
+            <a:r>
+              <a:rPr lang="en-US" sz="1300" b="1" dirty="0">
+                <a:solidFill>
+                  <a:srgbClr val="101426"/>
+                </a:solidFill>
+                <a:latin typeface="Arial" pitchFamily="34" charset="0"/>
+                <a:ea typeface="Arial" pitchFamily="34" charset="-122"/>
+                <a:cs typeface="Arial" pitchFamily="34" charset="-120"/>
+              </a:rPr>
+              <a:t>Eligible audience × positive reply rate × qualification rate × opportunity value</a:t>
+            </a:r>
+            <a:endParaRPr lang="en-US" sz="1300" dirty="0"/>
+          </a:p>
+        </p:txBody>
+      </p:sp>
+      <p:sp>
+        <p:nvSpPr>
+          <p:cNvPr id="29" name="Text 26"/>
+          <p:cNvSpPr/>
+          <p:nvPr/>
+        </p:nvSpPr>
+        <p:spPr>
+          <a:xfrm>
+            <a:off x="9281160" y="4882896"/>
+            <a:ext cx="1920240" cy="128016"/>
+          </a:xfrm>
+          <a:prstGeom prst="rect">
+            <a:avLst/>
+          </a:prstGeom>
+          <a:noFill/>
+          <a:ln/>
+        </p:spPr>
+        <p:txBody>
+          <a:bodyPr wrap="square" lIns="0" tIns="0" rIns="0" bIns="0" rtlCol="0" anchor="ctr"/>
+          <a:lstStyle/>
+          <a:p>
+            <a:pPr algn="r" indent="0" marL="0">
+              <a:buNone/>
+            </a:pPr>
+            <a:r>
+              <a:rPr lang="en-US" sz="820" dirty="0">
                 <a:solidFill>
                   <a:srgbClr val="646A7E"/>
                 </a:solidFill>
-                <a:latin typeface="Aptos" pitchFamily="34" charset="0"/>
-                <a:ea typeface="Aptos" pitchFamily="34" charset="-122"/>
-                <a:cs typeface="Aptos" pitchFamily="34" charset="-120"/>
-              </a:rPr>
-              <a:t>The source, campaign and conversation stay connected for the rep.</a:t>
-            </a:r>
-            <a:endParaRPr lang="en-US" sz="1050" dirty="0"/>
-          </a:p>
-        </p:txBody>
-      </p:sp>
-      <p:sp>
-        <p:nvSpPr>
-          <p:cNvPr id="26" name="Shape 23"/>
-          <p:cNvSpPr/>
-          <p:nvPr/>
-        </p:nvSpPr>
-        <p:spPr>
-          <a:xfrm>
-            <a:off x="6931152" y="3712464"/>
-            <a:ext cx="228600" cy="228600"/>
-          </a:xfrm>
-          <a:prstGeom prst="ellipse">
-            <a:avLst/>
-          </a:prstGeom>
-          <a:solidFill>
-            <a:srgbClr val="EAF8F0"/>
-          </a:solidFill>
-          <a:ln w="12700">
-            <a:solidFill>
-              <a:srgbClr val="159956"/>
-            </a:solidFill>
-            <a:prstDash val="solid"/>
-          </a:ln>
-        </p:spPr>
-      </p:sp>
-      <p:sp>
-        <p:nvSpPr>
-          <p:cNvPr id="27" name="Text 24"/>
-          <p:cNvSpPr/>
-          <p:nvPr/>
-        </p:nvSpPr>
-        <p:spPr>
-          <a:xfrm>
-            <a:off x="6931152" y="3762756"/>
-            <a:ext cx="228600" cy="109728"/>
-          </a:xfrm>
-          <a:prstGeom prst="rect">
-            <a:avLst/>
-          </a:prstGeom>
-          <a:noFill/>
-          <a:ln/>
-        </p:spPr>
-        <p:txBody>
-          <a:bodyPr wrap="square" lIns="0" tIns="0" rIns="0" bIns="0" rtlCol="0" anchor="ctr"/>
-          <a:lstStyle/>
-          <a:p>
-            <a:pPr algn="ctr" indent="0" marL="0">
-              <a:buNone/>
-            </a:pPr>
-            <a:r>
-              <a:rPr lang="en-US" sz="900" b="1" dirty="0">
-                <a:solidFill>
-                  <a:srgbClr val="159956"/>
-                </a:solidFill>
-                <a:latin typeface="Aptos" pitchFamily="34" charset="0"/>
-                <a:ea typeface="Aptos" pitchFamily="34" charset="-122"/>
-                <a:cs typeface="Aptos" pitchFamily="34" charset="-120"/>
-              </a:rPr>
-              <a:t>✓</a:t>
-            </a:r>
-            <a:endParaRPr lang="en-US" sz="900" dirty="0"/>
-          </a:p>
-        </p:txBody>
-      </p:sp>
-      <p:sp>
-        <p:nvSpPr>
-          <p:cNvPr id="28" name="Text 25"/>
-          <p:cNvSpPr/>
-          <p:nvPr/>
-        </p:nvSpPr>
-        <p:spPr>
-          <a:xfrm>
-            <a:off x="7278624" y="3703320"/>
-            <a:ext cx="3675888" cy="192024"/>
-          </a:xfrm>
-          <a:prstGeom prst="rect">
-            <a:avLst/>
-          </a:prstGeom>
-          <a:noFill/>
-          <a:ln/>
-        </p:spPr>
-        <p:txBody>
-          <a:bodyPr wrap="square" lIns="0" tIns="0" rIns="0" bIns="0" rtlCol="0" anchor="ctr"/>
-          <a:lstStyle/>
-          <a:p>
-            <a:pPr indent="0" marL="0">
-              <a:buNone/>
-            </a:pPr>
-            <a:r>
-              <a:rPr lang="en-US" sz="1250" b="1" dirty="0">
-                <a:solidFill>
-                  <a:srgbClr val="101426"/>
-                </a:solidFill>
-                <a:latin typeface="Aptos" pitchFamily="34" charset="0"/>
-                <a:ea typeface="Aptos" pitchFamily="34" charset="-122"/>
-                <a:cs typeface="Aptos" pitchFamily="34" charset="-120"/>
-              </a:rPr>
-              <a:t>Fewer duplicate updates</a:t>
-            </a:r>
-            <a:endParaRPr lang="en-US" sz="1250" dirty="0"/>
-          </a:p>
-        </p:txBody>
-      </p:sp>
-      <p:sp>
-        <p:nvSpPr>
-          <p:cNvPr id="29" name="Text 26"/>
-          <p:cNvSpPr/>
-          <p:nvPr/>
-        </p:nvSpPr>
-        <p:spPr>
-          <a:xfrm>
-            <a:off x="7278624" y="3959352"/>
-            <a:ext cx="3675888" cy="438912"/>
-          </a:xfrm>
-          <a:prstGeom prst="rect">
-            <a:avLst/>
-          </a:prstGeom>
-          <a:noFill/>
-          <a:ln/>
-        </p:spPr>
-        <p:txBody>
-          <a:bodyPr wrap="square" lIns="0" tIns="0" rIns="0" bIns="0" rtlCol="0" anchor="t">
-            <a:normAutofit/>
-          </a:bodyPr>
-          <a:lstStyle/>
-          <a:p>
-            <a:pPr indent="0" marL="0">
-              <a:buNone/>
-            </a:pPr>
-            <a:r>
-              <a:rPr lang="en-US" sz="1050" dirty="0">
-                <a:solidFill>
-                  <a:srgbClr val="646A7E"/>
-                </a:solidFill>
-                <a:latin typeface="Aptos" pitchFamily="34" charset="0"/>
-                <a:ea typeface="Aptos" pitchFamily="34" charset="-122"/>
-                <a:cs typeface="Aptos" pitchFamily="34" charset="-120"/>
-              </a:rPr>
-              <a:t>Less copying between outreach tools, notes and CRM records.</a:t>
-            </a:r>
-            <a:endParaRPr lang="en-US" sz="1050" dirty="0"/>
+                <a:latin typeface="Arial" pitchFamily="34" charset="0"/>
+                <a:ea typeface="Arial" pitchFamily="34" charset="-122"/>
+                <a:cs typeface="Arial" pitchFamily="34" charset="-120"/>
+              </a:rPr>
+              <a:t>Validate each input with Statflo</a:t>
+            </a:r>
+            <a:endParaRPr lang="en-US" sz="820" dirty="0"/>
           </a:p>
         </p:txBody>
       </p:sp>
       <p:sp>
         <p:nvSpPr>
           <p:cNvPr id="30" name="Shape 27"/>
-          <p:cNvSpPr/>
-          <p:nvPr/>
-        </p:nvSpPr>
-        <p:spPr>
-          <a:xfrm>
-            <a:off x="6931152" y="4690872"/>
-            <a:ext cx="228600" cy="228600"/>
-          </a:xfrm>
-          <a:prstGeom prst="ellipse">
-            <a:avLst/>
-          </a:prstGeom>
-          <a:solidFill>
-            <a:srgbClr val="EAF8F0"/>
-          </a:solidFill>
-          <a:ln w="12700">
-            <a:solidFill>
-              <a:srgbClr val="159956"/>
-            </a:solidFill>
-            <a:prstDash val="solid"/>
-          </a:ln>
-        </p:spPr>
-      </p:sp>
-      <p:sp>
-        <p:nvSpPr>
-          <p:cNvPr id="31" name="Text 28"/>
-          <p:cNvSpPr/>
-          <p:nvPr/>
-        </p:nvSpPr>
-        <p:spPr>
-          <a:xfrm>
-            <a:off x="6931152" y="4741164"/>
-            <a:ext cx="228600" cy="109728"/>
-          </a:xfrm>
-          <a:prstGeom prst="rect">
-            <a:avLst/>
-          </a:prstGeom>
-          <a:noFill/>
-          <a:ln/>
-        </p:spPr>
-        <p:txBody>
-          <a:bodyPr wrap="square" lIns="0" tIns="0" rIns="0" bIns="0" rtlCol="0" anchor="ctr"/>
-          <a:lstStyle/>
-          <a:p>
-            <a:pPr algn="ctr" indent="0" marL="0">
-              <a:buNone/>
-            </a:pPr>
-            <a:r>
-              <a:rPr lang="en-US" sz="900" b="1" dirty="0">
-                <a:solidFill>
-                  <a:srgbClr val="159956"/>
-                </a:solidFill>
-                <a:latin typeface="Aptos" pitchFamily="34" charset="0"/>
-                <a:ea typeface="Aptos" pitchFamily="34" charset="-122"/>
-                <a:cs typeface="Aptos" pitchFamily="34" charset="-120"/>
-              </a:rPr>
-              <a:t>✓</a:t>
-            </a:r>
-            <a:endParaRPr lang="en-US" sz="900" dirty="0"/>
-          </a:p>
-        </p:txBody>
-      </p:sp>
-      <p:sp>
-        <p:nvSpPr>
-          <p:cNvPr id="32" name="Text 29"/>
-          <p:cNvSpPr/>
-          <p:nvPr/>
-        </p:nvSpPr>
-        <p:spPr>
-          <a:xfrm>
-            <a:off x="7278624" y="4681728"/>
-            <a:ext cx="3675888" cy="192024"/>
-          </a:xfrm>
-          <a:prstGeom prst="rect">
-            <a:avLst/>
-          </a:prstGeom>
-          <a:noFill/>
-          <a:ln/>
-        </p:spPr>
-        <p:txBody>
-          <a:bodyPr wrap="square" lIns="0" tIns="0" rIns="0" bIns="0" rtlCol="0" anchor="ctr"/>
-          <a:lstStyle/>
-          <a:p>
-            <a:pPr indent="0" marL="0">
-              <a:buNone/>
-            </a:pPr>
-            <a:r>
-              <a:rPr lang="en-US" sz="1250" b="1" dirty="0">
-                <a:solidFill>
-                  <a:srgbClr val="101426"/>
-                </a:solidFill>
-                <a:latin typeface="Aptos" pitchFamily="34" charset="0"/>
-                <a:ea typeface="Aptos" pitchFamily="34" charset="-122"/>
-                <a:cs typeface="Aptos" pitchFamily="34" charset="-120"/>
-              </a:rPr>
-              <a:t>Faster follow-up</a:t>
-            </a:r>
-            <a:endParaRPr lang="en-US" sz="1250" dirty="0"/>
-          </a:p>
-        </p:txBody>
-      </p:sp>
-      <p:sp>
-        <p:nvSpPr>
-          <p:cNvPr id="33" name="Text 30"/>
-          <p:cNvSpPr/>
-          <p:nvPr/>
-        </p:nvSpPr>
-        <p:spPr>
-          <a:xfrm>
-            <a:off x="7278624" y="4937760"/>
-            <a:ext cx="3675888" cy="438912"/>
-          </a:xfrm>
-          <a:prstGeom prst="rect">
-            <a:avLst/>
-          </a:prstGeom>
-          <a:noFill/>
-          <a:ln/>
-        </p:spPr>
-        <p:txBody>
-          <a:bodyPr wrap="square" lIns="0" tIns="0" rIns="0" bIns="0" rtlCol="0" anchor="t">
-            <a:normAutofit/>
-          </a:bodyPr>
-          <a:lstStyle/>
-          <a:p>
-            <a:pPr indent="0" marL="0">
-              <a:buNone/>
-            </a:pPr>
-            <a:r>
-              <a:rPr lang="en-US" sz="1050" dirty="0">
-                <a:solidFill>
-                  <a:srgbClr val="646A7E"/>
-                </a:solidFill>
-                <a:latin typeface="Aptos" pitchFamily="34" charset="0"/>
-                <a:ea typeface="Aptos" pitchFamily="34" charset="-122"/>
-                <a:cs typeface="Aptos" pitchFamily="34" charset="-120"/>
-              </a:rPr>
-              <a:t>Teams can act from the workflow they already know and use every day.</a:t>
-            </a:r>
-            <a:endParaRPr lang="en-US" sz="1050" dirty="0"/>
-          </a:p>
-        </p:txBody>
-      </p:sp>
-      <p:sp>
-        <p:nvSpPr>
-          <p:cNvPr id="34" name="Shape 31"/>
           <p:cNvSpPr/>
           <p:nvPr/>
         </p:nvSpPr>
@@ -4427,7 +4751,7 @@
       </p:sp>
       <p:sp>
         <p:nvSpPr>
-          <p:cNvPr id="35" name="Text 32"/>
+          <p:cNvPr id="31" name="Text 28"/>
           <p:cNvSpPr/>
           <p:nvPr/>
         </p:nvSpPr>
@@ -4454,11 +4778,11 @@
                 <a:solidFill>
                   <a:srgbClr val="8A8FA0"/>
                 </a:solidFill>
-                <a:latin typeface="Aptos" pitchFamily="34" charset="0"/>
-                <a:ea typeface="Aptos" pitchFamily="34" charset="-122"/>
-                <a:cs typeface="Aptos" pitchFamily="34" charset="-120"/>
-              </a:rPr>
-              <a:t>LeadReacher CRM integration benefits</a:t>
+                <a:latin typeface="Arial" pitchFamily="34" charset="0"/>
+                <a:ea typeface="Arial" pitchFamily="34" charset="-122"/>
+                <a:cs typeface="Arial" pitchFamily="34" charset="-120"/>
+              </a:rPr>
+              <a:t>LeadReacher + Statflo | illustrative revenue case</a:t>
             </a:r>
             <a:endParaRPr lang="en-US" sz="750" dirty="0"/>
           </a:p>
@@ -4565,9 +4889,9 @@
             <a:prstDash val="solid"/>
           </a:ln>
           <a:effectLst>
-            <a:outerShdw sx="100000" sy="100000" kx="0" ky="0" algn="bl" rotWithShape="0" blurRad="1.7189509497218795e+37" dist="3.437901899443759e+37" dir="4.5349632000000006e+44">
+            <a:outerShdw sx="100000" sy="100000" kx="0" ky="0" algn="bl" rotWithShape="0" blurRad="5.679133646942494e+57" dist="1.1358267293884988e+58" dir="3.526387384320001e+68">
               <a:srgbClr val="CFC7E8">
-                <a:alpha val="1.6e+44"/>
+                <a:alpha val="1.5999999999999997e+69"/>
               </a:srgbClr>
             </a:outerShdw>
           </a:effectLst>
@@ -4632,11 +4956,11 @@
                 <a:solidFill>
                   <a:srgbClr val="5A32ED"/>
                 </a:solidFill>
-                <a:latin typeface="Aptos" pitchFamily="34" charset="0"/>
-                <a:ea typeface="Aptos" pitchFamily="34" charset="-122"/>
-                <a:cs typeface="Aptos" pitchFamily="34" charset="-120"/>
-              </a:rPr>
-              <a:t>CRM INTEGRATION</a:t>
+                <a:latin typeface="Arial" pitchFamily="34" charset="0"/>
+                <a:ea typeface="Arial" pitchFamily="34" charset="-122"/>
+                <a:cs typeface="Arial" pitchFamily="34" charset="-120"/>
+              </a:rPr>
+              <a:t>03 | HOW</a:t>
             </a:r>
             <a:endParaRPr lang="en-US" sz="850" dirty="0"/>
           </a:p>
@@ -4650,8 +4974,8 @@
         </p:nvSpPr>
         <p:spPr>
           <a:xfrm>
-            <a:off x="658368" y="1033272"/>
-            <a:ext cx="4754880" cy="164592"/>
+            <a:off x="658368" y="941832"/>
+            <a:ext cx="3474720" cy="164592"/>
           </a:xfrm>
           <a:prstGeom prst="rect">
             <a:avLst/>
@@ -4671,11 +4995,11 @@
                 <a:solidFill>
                   <a:srgbClr val="5A32ED"/>
                 </a:solidFill>
-                <a:latin typeface="Aptos" pitchFamily="34" charset="0"/>
-                <a:ea typeface="Aptos" pitchFamily="34" charset="-122"/>
-                <a:cs typeface="Aptos" pitchFamily="34" charset="-120"/>
-              </a:rPr>
-              <a:t>BENEFITS FOR SALES LEADERS</a:t>
+                <a:latin typeface="Arial" pitchFamily="34" charset="0"/>
+                <a:ea typeface="Arial" pitchFamily="34" charset="-122"/>
+                <a:cs typeface="Arial" pitchFamily="34" charset="-120"/>
+              </a:rPr>
+              <a:t>THE FIRST PILOT</a:t>
             </a:r>
             <a:endParaRPr lang="en-US" sz="900" dirty="0"/>
           </a:p>
@@ -4689,8 +5013,8 @@
         </p:nvSpPr>
         <p:spPr>
           <a:xfrm>
-            <a:off x="658368" y="1353312"/>
-            <a:ext cx="10881360" cy="502920"/>
+            <a:off x="658368" y="1188720"/>
+            <a:ext cx="6583680" cy="457200"/>
           </a:xfrm>
           <a:prstGeom prst="rect">
             <a:avLst/>
@@ -4706,17 +5030,17 @@
               <a:buNone/>
             </a:pPr>
             <a:r>
-              <a:rPr lang="en-US" sz="3000" b="1" dirty="0">
+              <a:rPr lang="en-US" sz="2600" b="1" dirty="0">
                 <a:solidFill>
                   <a:srgbClr val="101426"/>
                 </a:solidFill>
-                <a:latin typeface="Aptos Display" pitchFamily="34" charset="0"/>
-                <a:ea typeface="Aptos Display" pitchFamily="34" charset="-122"/>
-                <a:cs typeface="Aptos Display" pitchFamily="34" charset="-120"/>
-              </a:rPr>
-              <a:t>The pipeline becomes</a:t>
-            </a:r>
-            <a:endParaRPr lang="en-US" sz="3000" dirty="0"/>
+                <a:latin typeface="Arial" pitchFamily="34" charset="0"/>
+                <a:ea typeface="Arial" pitchFamily="34" charset="-122"/>
+                <a:cs typeface="Arial" pitchFamily="34" charset="-120"/>
+              </a:rPr>
+              <a:t>Start small. Prove value. Then scale.</a:t>
+            </a:r>
+            <a:endParaRPr lang="en-US" sz="2600" dirty="0"/>
           </a:p>
         </p:txBody>
       </p:sp>
@@ -4728,47 +5052,8 @@
         </p:nvSpPr>
         <p:spPr>
           <a:xfrm>
-            <a:off x="658368" y="1792224"/>
-            <a:ext cx="10881360" cy="566928"/>
-          </a:xfrm>
-          <a:prstGeom prst="rect">
-            <a:avLst/>
-          </a:prstGeom>
-          <a:noFill/>
-          <a:ln/>
-        </p:spPr>
-        <p:txBody>
-          <a:bodyPr wrap="square" lIns="0" tIns="0" rIns="0" bIns="0" rtlCol="0" anchor="ctr"/>
-          <a:lstStyle/>
-          <a:p>
-            <a:pPr indent="0" marL="0">
-              <a:buNone/>
-            </a:pPr>
-            <a:r>
-              <a:rPr lang="en-US" sz="3000" b="1" dirty="0">
-                <a:solidFill>
-                  <a:srgbClr val="5A32ED"/>
-                </a:solidFill>
-                <a:latin typeface="Aptos Display" pitchFamily="34" charset="0"/>
-                <a:ea typeface="Aptos Display" pitchFamily="34" charset="-122"/>
-                <a:cs typeface="Aptos Display" pitchFamily="34" charset="-120"/>
-              </a:rPr>
-              <a:t>easier to trust.</a:t>
-            </a:r>
-            <a:endParaRPr lang="en-US" sz="3000" dirty="0"/>
-          </a:p>
-        </p:txBody>
-      </p:sp>
-      <p:sp>
-        <p:nvSpPr>
-          <p:cNvPr id="8" name="Text 5"/>
-          <p:cNvSpPr/>
-          <p:nvPr/>
-        </p:nvSpPr>
-        <p:spPr>
-          <a:xfrm>
-            <a:off x="6693408" y="1572768"/>
-            <a:ext cx="4645152" cy="640080"/>
+            <a:off x="7772400" y="1234440"/>
+            <a:ext cx="3401568" cy="329184"/>
           </a:xfrm>
           <a:prstGeom prst="rect">
             <a:avLst/>
@@ -4786,82 +5071,241 @@
               <a:buNone/>
             </a:pPr>
             <a:r>
-              <a:rPr lang="en-US" sz="1500" dirty="0">
+              <a:rPr lang="en-US" sz="1080" dirty="0">
                 <a:solidFill>
                   <a:srgbClr val="646A7E"/>
                 </a:solidFill>
-                <a:latin typeface="Aptos" pitchFamily="34" charset="0"/>
-                <a:ea typeface="Aptos" pitchFamily="34" charset="-122"/>
-                <a:cs typeface="Aptos" pitchFamily="34" charset="-120"/>
-              </a:rPr>
-              <a:t>Outreach activity, opportunity progress and revenue context can tell one consistent story.</a:t>
-            </a:r>
-            <a:endParaRPr lang="en-US" sz="1500" dirty="0"/>
-          </a:p>
-        </p:txBody>
-      </p:sp>
-      <p:sp>
-        <p:nvSpPr>
-          <p:cNvPr id="9" name="Shape 6"/>
-          <p:cNvSpPr/>
-          <p:nvPr/>
-        </p:nvSpPr>
-        <p:spPr>
-          <a:xfrm>
-            <a:off x="658368" y="2578608"/>
-            <a:ext cx="10972800" cy="1335024"/>
+                <a:latin typeface="Arial" pitchFamily="34" charset="0"/>
+                <a:ea typeface="Arial" pitchFamily="34" charset="-122"/>
+                <a:cs typeface="Arial" pitchFamily="34" charset="-120"/>
+              </a:rPr>
+              <a:t>One approved Smart List gives both teams a controlled way to test the integration.</a:t>
+            </a:r>
+            <a:endParaRPr lang="en-US" sz="1080" dirty="0"/>
+          </a:p>
+        </p:txBody>
+      </p:sp>
+      <p:sp>
+        <p:nvSpPr>
+          <p:cNvPr id="8" name="Shape 5"/>
+          <p:cNvSpPr/>
+          <p:nvPr/>
+        </p:nvSpPr>
+        <p:spPr>
+          <a:xfrm>
+            <a:off x="658368" y="2057400"/>
+            <a:ext cx="2487168" cy="2487168"/>
           </a:xfrm>
           <a:prstGeom prst="roundRect">
             <a:avLst>
-              <a:gd name="adj" fmla="val 10274"/>
+              <a:gd name="adj" fmla="val 4779"/>
             </a:avLst>
           </a:prstGeom>
           <a:solidFill>
-            <a:srgbClr val="F7F5FF"/>
+            <a:srgbClr val="FFFFFF"/>
           </a:solidFill>
-          <a:ln w="10160">
+          <a:ln w="10795">
             <a:solidFill>
               <a:srgbClr val="D7CCFF"/>
             </a:solidFill>
             <a:prstDash val="solid"/>
           </a:ln>
-        </p:spPr>
-      </p:sp>
-      <p:sp>
-        <p:nvSpPr>
-          <p:cNvPr id="10" name="Shape 7"/>
-          <p:cNvSpPr/>
-          <p:nvPr/>
-        </p:nvSpPr>
-        <p:spPr>
-          <a:xfrm>
-            <a:off x="960120" y="2944368"/>
-            <a:ext cx="512064" cy="512064"/>
-          </a:xfrm>
-          <a:prstGeom prst="ellipse">
-            <a:avLst/>
-          </a:prstGeom>
-          <a:solidFill>
-            <a:srgbClr val="FFFFFF"/>
-          </a:solidFill>
-          <a:ln w="13970">
+          <a:effectLst>
+            <a:outerShdw sx="100000" sy="100000" kx="0" ky="0" algn="bl" rotWithShape="0" blurRad="7.212499731616968e+61" dist="1.4424999463233936e+62" dir="2.1158324305920003e+73">
+              <a:srgbClr val="CFC7E8">
+                <a:alpha val="1.5999999999999997e+74"/>
+              </a:srgbClr>
+            </a:outerShdw>
+          </a:effectLst>
+        </p:spPr>
+      </p:sp>
+      <p:sp>
+        <p:nvSpPr>
+          <p:cNvPr id="9" name="Text 6"/>
+          <p:cNvSpPr/>
+          <p:nvPr/>
+        </p:nvSpPr>
+        <p:spPr>
+          <a:xfrm>
+            <a:off x="896112" y="2359152"/>
+            <a:ext cx="411480" cy="118872"/>
+          </a:xfrm>
+          <a:prstGeom prst="rect">
+            <a:avLst/>
+          </a:prstGeom>
+          <a:noFill/>
+          <a:ln/>
+        </p:spPr>
+        <p:txBody>
+          <a:bodyPr wrap="square" lIns="0" tIns="0" rIns="0" bIns="0" rtlCol="0" anchor="ctr"/>
+          <a:lstStyle/>
+          <a:p>
+            <a:pPr indent="0" marL="0">
+              <a:buNone/>
+            </a:pPr>
+            <a:r>
+              <a:rPr lang="en-US" sz="800" b="1" dirty="0">
+                <a:solidFill>
+                  <a:srgbClr val="5A32ED"/>
+                </a:solidFill>
+                <a:latin typeface="Arial" pitchFamily="34" charset="0"/>
+                <a:ea typeface="Arial" pitchFamily="34" charset="-122"/>
+                <a:cs typeface="Arial" pitchFamily="34" charset="-120"/>
+              </a:rPr>
+              <a:t>01</a:t>
+            </a:r>
+            <a:endParaRPr lang="en-US" sz="800" dirty="0"/>
+          </a:p>
+        </p:txBody>
+      </p:sp>
+      <p:sp>
+        <p:nvSpPr>
+          <p:cNvPr id="10" name="Text 7"/>
+          <p:cNvSpPr/>
+          <p:nvPr/>
+        </p:nvSpPr>
+        <p:spPr>
+          <a:xfrm>
+            <a:off x="896112" y="2862072"/>
+            <a:ext cx="1993392" cy="164592"/>
+          </a:xfrm>
+          <a:prstGeom prst="rect">
+            <a:avLst/>
+          </a:prstGeom>
+          <a:noFill/>
+          <a:ln/>
+        </p:spPr>
+        <p:txBody>
+          <a:bodyPr wrap="square" lIns="0" tIns="0" rIns="0" bIns="0" rtlCol="0" anchor="ctr"/>
+          <a:lstStyle/>
+          <a:p>
+            <a:pPr algn="ctr" indent="0" marL="0">
+              <a:buNone/>
+            </a:pPr>
+            <a:r>
+              <a:rPr lang="en-US" sz="1350" b="1" spc="50" kern="0" dirty="0">
+                <a:solidFill>
+                  <a:srgbClr val="101426"/>
+                </a:solidFill>
+                <a:latin typeface="Arial" pitchFamily="34" charset="0"/>
+                <a:ea typeface="Arial" pitchFamily="34" charset="-122"/>
+                <a:cs typeface="Arial" pitchFamily="34" charset="-120"/>
+              </a:rPr>
+              <a:t>AUDIENCE</a:t>
+            </a:r>
+            <a:endParaRPr lang="en-US" sz="1350" dirty="0"/>
+          </a:p>
+        </p:txBody>
+      </p:sp>
+      <p:sp>
+        <p:nvSpPr>
+          <p:cNvPr id="11" name="Text 8"/>
+          <p:cNvSpPr/>
+          <p:nvPr/>
+        </p:nvSpPr>
+        <p:spPr>
+          <a:xfrm>
+            <a:off x="932688" y="3401568"/>
+            <a:ext cx="1920240" cy="502920"/>
+          </a:xfrm>
+          <a:prstGeom prst="rect">
+            <a:avLst/>
+          </a:prstGeom>
+          <a:noFill/>
+          <a:ln/>
+        </p:spPr>
+        <p:txBody>
+          <a:bodyPr wrap="square" lIns="0" tIns="0" rIns="0" bIns="0" rtlCol="0" anchor="ctr">
+            <a:normAutofit/>
+          </a:bodyPr>
+          <a:lstStyle/>
+          <a:p>
+            <a:pPr algn="ctr" indent="0" marL="0">
+              <a:buNone/>
+            </a:pPr>
+            <a:r>
+              <a:rPr lang="en-US" sz="1000" dirty="0">
+                <a:solidFill>
+                  <a:srgbClr val="646A7E"/>
+                </a:solidFill>
+                <a:latin typeface="Arial" pitchFamily="34" charset="0"/>
+                <a:ea typeface="Arial" pitchFamily="34" charset="-122"/>
+                <a:cs typeface="Arial" pitchFamily="34" charset="-120"/>
+              </a:rPr>
+              <a:t>Statflo provides an approved Smart List</a:t>
+            </a:r>
+            <a:endParaRPr lang="en-US" sz="1000" dirty="0"/>
+          </a:p>
+        </p:txBody>
+      </p:sp>
+      <p:sp>
+        <p:nvSpPr>
+          <p:cNvPr id="12" name="Shape 9"/>
+          <p:cNvSpPr/>
+          <p:nvPr/>
+        </p:nvSpPr>
+        <p:spPr>
+          <a:xfrm>
+            <a:off x="3182112" y="3291840"/>
+            <a:ext cx="219456" cy="0"/>
+          </a:xfrm>
+          <a:prstGeom prst="line">
+            <a:avLst/>
+          </a:prstGeom>
+          <a:noFill/>
+          <a:ln w="15875">
             <a:solidFill>
               <a:srgbClr val="5A32ED"/>
             </a:solidFill>
             <a:prstDash val="solid"/>
+            <a:tailEnd type="triangle"/>
           </a:ln>
         </p:spPr>
       </p:sp>
       <p:sp>
         <p:nvSpPr>
-          <p:cNvPr id="11" name="Text 8"/>
-          <p:cNvSpPr/>
-          <p:nvPr/>
-        </p:nvSpPr>
-        <p:spPr>
-          <a:xfrm>
-            <a:off x="960120" y="3118104"/>
-            <a:ext cx="512064" cy="128016"/>
+          <p:cNvPr id="13" name="Shape 10"/>
+          <p:cNvSpPr/>
+          <p:nvPr/>
+        </p:nvSpPr>
+        <p:spPr>
+          <a:xfrm>
+            <a:off x="3456432" y="2057400"/>
+            <a:ext cx="2487168" cy="2487168"/>
+          </a:xfrm>
+          <a:prstGeom prst="roundRect">
+            <a:avLst>
+              <a:gd name="adj" fmla="val 4779"/>
+            </a:avLst>
+          </a:prstGeom>
+          <a:solidFill>
+            <a:srgbClr val="050A1F"/>
+          </a:solidFill>
+          <a:ln w="10795">
+            <a:solidFill>
+              <a:srgbClr val="050A1F"/>
+            </a:solidFill>
+            <a:prstDash val="solid"/>
+          </a:ln>
+          <a:effectLst>
+            <a:outerShdw sx="100000" sy="100000" kx="0" ky="0" algn="bl" rotWithShape="0" blurRad="9.15987465915355e+65" dist="1.83197493183071e+66" dir="1.2694994583552002e+78">
+              <a:srgbClr val="CFC7E8">
+                <a:alpha val="1.5999999999999997e+79"/>
+              </a:srgbClr>
+            </a:outerShdw>
+          </a:effectLst>
+        </p:spPr>
+      </p:sp>
+      <p:sp>
+        <p:nvSpPr>
+          <p:cNvPr id="14" name="Text 11"/>
+          <p:cNvSpPr/>
+          <p:nvPr/>
+        </p:nvSpPr>
+        <p:spPr>
+          <a:xfrm>
+            <a:off x="3694176" y="2359152"/>
+            <a:ext cx="411480" cy="118872"/>
           </a:xfrm>
           <a:prstGeom prst="rect">
             <a:avLst/>
@@ -4873,361 +5317,546 @@
           <a:bodyPr wrap="square" lIns="0" tIns="0" rIns="0" bIns="0" rtlCol="0" anchor="ctr"/>
           <a:lstStyle/>
           <a:p>
+            <a:pPr indent="0" marL="0">
+              <a:buNone/>
+            </a:pPr>
+            <a:r>
+              <a:rPr lang="en-US" sz="800" b="1" dirty="0">
+                <a:solidFill>
+                  <a:srgbClr val="9F8BFF"/>
+                </a:solidFill>
+                <a:latin typeface="Arial" pitchFamily="34" charset="0"/>
+                <a:ea typeface="Arial" pitchFamily="34" charset="-122"/>
+                <a:cs typeface="Arial" pitchFamily="34" charset="-120"/>
+              </a:rPr>
+              <a:t>02</a:t>
+            </a:r>
+            <a:endParaRPr lang="en-US" sz="800" dirty="0"/>
+          </a:p>
+        </p:txBody>
+      </p:sp>
+      <p:sp>
+        <p:nvSpPr>
+          <p:cNvPr id="15" name="Text 12"/>
+          <p:cNvSpPr/>
+          <p:nvPr/>
+        </p:nvSpPr>
+        <p:spPr>
+          <a:xfrm>
+            <a:off x="3694176" y="2862072"/>
+            <a:ext cx="1993392" cy="164592"/>
+          </a:xfrm>
+          <a:prstGeom prst="rect">
+            <a:avLst/>
+          </a:prstGeom>
+          <a:noFill/>
+          <a:ln/>
+        </p:spPr>
+        <p:txBody>
+          <a:bodyPr wrap="square" lIns="0" tIns="0" rIns="0" bIns="0" rtlCol="0" anchor="ctr"/>
+          <a:lstStyle/>
+          <a:p>
             <a:pPr algn="ctr" indent="0" marL="0">
               <a:buNone/>
             </a:pPr>
             <a:r>
-              <a:rPr lang="en-US" sz="850" b="1" dirty="0">
-                <a:solidFill>
-                  <a:srgbClr val="5A32ED"/>
-                </a:solidFill>
-                <a:latin typeface="Aptos" pitchFamily="34" charset="0"/>
-                <a:ea typeface="Aptos" pitchFamily="34" charset="-122"/>
-                <a:cs typeface="Aptos" pitchFamily="34" charset="-120"/>
-              </a:rPr>
-              <a:t>01</a:t>
-            </a:r>
-            <a:endParaRPr lang="en-US" sz="850" dirty="0"/>
-          </a:p>
-        </p:txBody>
-      </p:sp>
-      <p:sp>
-        <p:nvSpPr>
-          <p:cNvPr id="12" name="Text 9"/>
-          <p:cNvSpPr/>
-          <p:nvPr/>
-        </p:nvSpPr>
-        <p:spPr>
-          <a:xfrm>
-            <a:off x="1673352" y="3090672"/>
-            <a:ext cx="1371600" cy="146304"/>
-          </a:xfrm>
-          <a:prstGeom prst="rect">
-            <a:avLst/>
-          </a:prstGeom>
-          <a:noFill/>
-          <a:ln/>
-        </p:spPr>
-        <p:txBody>
-          <a:bodyPr wrap="square" lIns="0" tIns="0" rIns="0" bIns="0" rtlCol="0" anchor="ctr"/>
-          <a:lstStyle/>
-          <a:p>
-            <a:pPr indent="0" marL="0">
-              <a:buNone/>
-            </a:pPr>
-            <a:r>
-              <a:rPr lang="en-US" sz="950" b="1" spc="70" kern="0" dirty="0">
-                <a:solidFill>
-                  <a:srgbClr val="101426"/>
-                </a:solidFill>
-                <a:latin typeface="Aptos" pitchFamily="34" charset="0"/>
-                <a:ea typeface="Aptos" pitchFamily="34" charset="-122"/>
-                <a:cs typeface="Aptos" pitchFamily="34" charset="-120"/>
-              </a:rPr>
-              <a:t>OUTREACH</a:t>
-            </a:r>
-            <a:endParaRPr lang="en-US" sz="950" dirty="0"/>
-          </a:p>
-        </p:txBody>
-      </p:sp>
-      <p:sp>
-        <p:nvSpPr>
-          <p:cNvPr id="13" name="Shape 10"/>
-          <p:cNvSpPr/>
-          <p:nvPr/>
-        </p:nvSpPr>
-        <p:spPr>
-          <a:xfrm>
-            <a:off x="2953512" y="3200400"/>
-            <a:ext cx="530352" cy="0"/>
+              <a:rPr lang="en-US" sz="1350" b="1" spc="50" kern="0" dirty="0">
+                <a:solidFill>
+                  <a:srgbClr val="FFFFFF"/>
+                </a:solidFill>
+                <a:latin typeface="Arial" pitchFamily="34" charset="0"/>
+                <a:ea typeface="Arial" pitchFamily="34" charset="-122"/>
+                <a:cs typeface="Arial" pitchFamily="34" charset="-120"/>
+              </a:rPr>
+              <a:t>PREPARE</a:t>
+            </a:r>
+            <a:endParaRPr lang="en-US" sz="1350" dirty="0"/>
+          </a:p>
+        </p:txBody>
+      </p:sp>
+      <p:sp>
+        <p:nvSpPr>
+          <p:cNvPr id="16" name="Text 13"/>
+          <p:cNvSpPr/>
+          <p:nvPr/>
+        </p:nvSpPr>
+        <p:spPr>
+          <a:xfrm>
+            <a:off x="3730752" y="3401568"/>
+            <a:ext cx="1920240" cy="502920"/>
+          </a:xfrm>
+          <a:prstGeom prst="rect">
+            <a:avLst/>
+          </a:prstGeom>
+          <a:noFill/>
+          <a:ln/>
+        </p:spPr>
+        <p:txBody>
+          <a:bodyPr wrap="square" lIns="0" tIns="0" rIns="0" bIns="0" rtlCol="0" anchor="ctr">
+            <a:normAutofit/>
+          </a:bodyPr>
+          <a:lstStyle/>
+          <a:p>
+            <a:pPr algn="ctr" indent="0" marL="0">
+              <a:buNone/>
+            </a:pPr>
+            <a:r>
+              <a:rPr lang="en-US" sz="1000" dirty="0">
+                <a:solidFill>
+                  <a:srgbClr val="D6D9E5"/>
+                </a:solidFill>
+                <a:latin typeface="Arial" pitchFamily="34" charset="0"/>
+                <a:ea typeface="Arial" pitchFamily="34" charset="-122"/>
+                <a:cs typeface="Arial" pitchFamily="34" charset="-120"/>
+              </a:rPr>
+              <a:t>LeadReacher creates messaging and video</a:t>
+            </a:r>
+            <a:endParaRPr lang="en-US" sz="1000" dirty="0"/>
+          </a:p>
+        </p:txBody>
+      </p:sp>
+      <p:sp>
+        <p:nvSpPr>
+          <p:cNvPr id="17" name="Shape 14"/>
+          <p:cNvSpPr/>
+          <p:nvPr/>
+        </p:nvSpPr>
+        <p:spPr>
+          <a:xfrm>
+            <a:off x="5980176" y="3291840"/>
+            <a:ext cx="219456" cy="0"/>
           </a:xfrm>
           <a:prstGeom prst="line">
             <a:avLst/>
           </a:prstGeom>
           <a:noFill/>
-          <a:ln w="15240">
+          <a:ln w="15875">
+            <a:solidFill>
+              <a:srgbClr val="5A32ED"/>
+            </a:solidFill>
+            <a:prstDash val="solid"/>
+            <a:tailEnd type="triangle"/>
+          </a:ln>
+        </p:spPr>
+      </p:sp>
+      <p:sp>
+        <p:nvSpPr>
+          <p:cNvPr id="18" name="Shape 15"/>
+          <p:cNvSpPr/>
+          <p:nvPr/>
+        </p:nvSpPr>
+        <p:spPr>
+          <a:xfrm>
+            <a:off x="6254496" y="2057400"/>
+            <a:ext cx="2487168" cy="2487168"/>
+          </a:xfrm>
+          <a:prstGeom prst="roundRect">
+            <a:avLst>
+              <a:gd name="adj" fmla="val 4779"/>
+            </a:avLst>
+          </a:prstGeom>
+          <a:solidFill>
+            <a:srgbClr val="FFFFFF"/>
+          </a:solidFill>
+          <a:ln w="10795">
             <a:solidFill>
               <a:srgbClr val="D7CCFF"/>
             </a:solidFill>
             <a:prstDash val="solid"/>
-            <a:tailEnd type="triangle"/>
           </a:ln>
-        </p:spPr>
-      </p:sp>
-      <p:sp>
-        <p:nvSpPr>
-          <p:cNvPr id="14" name="Shape 11"/>
-          <p:cNvSpPr/>
-          <p:nvPr/>
-        </p:nvSpPr>
-        <p:spPr>
-          <a:xfrm>
-            <a:off x="3657600" y="2944368"/>
-            <a:ext cx="512064" cy="512064"/>
-          </a:xfrm>
-          <a:prstGeom prst="ellipse">
-            <a:avLst/>
-          </a:prstGeom>
-          <a:solidFill>
-            <a:srgbClr val="FFFFFF"/>
-          </a:solidFill>
-          <a:ln w="13970">
+          <a:effectLst>
+            <a:outerShdw sx="100000" sy="100000" kx="0" ky="0" algn="bl" rotWithShape="0" blurRad="1.1633040817125008e+70" dist="2.3266081634250016e+70" dir="7.616996750131201e+82">
+              <a:srgbClr val="CFC7E8">
+                <a:alpha val="1.5999999999999996e+84"/>
+              </a:srgbClr>
+            </a:outerShdw>
+          </a:effectLst>
+        </p:spPr>
+      </p:sp>
+      <p:sp>
+        <p:nvSpPr>
+          <p:cNvPr id="19" name="Text 16"/>
+          <p:cNvSpPr/>
+          <p:nvPr/>
+        </p:nvSpPr>
+        <p:spPr>
+          <a:xfrm>
+            <a:off x="6492240" y="2359152"/>
+            <a:ext cx="411480" cy="118872"/>
+          </a:xfrm>
+          <a:prstGeom prst="rect">
+            <a:avLst/>
+          </a:prstGeom>
+          <a:noFill/>
+          <a:ln/>
+        </p:spPr>
+        <p:txBody>
+          <a:bodyPr wrap="square" lIns="0" tIns="0" rIns="0" bIns="0" rtlCol="0" anchor="ctr"/>
+          <a:lstStyle/>
+          <a:p>
+            <a:pPr indent="0" marL="0">
+              <a:buNone/>
+            </a:pPr>
+            <a:r>
+              <a:rPr lang="en-US" sz="800" b="1" dirty="0">
+                <a:solidFill>
+                  <a:srgbClr val="5A32ED"/>
+                </a:solidFill>
+                <a:latin typeface="Arial" pitchFamily="34" charset="0"/>
+                <a:ea typeface="Arial" pitchFamily="34" charset="-122"/>
+                <a:cs typeface="Arial" pitchFamily="34" charset="-120"/>
+              </a:rPr>
+              <a:t>03</a:t>
+            </a:r>
+            <a:endParaRPr lang="en-US" sz="800" dirty="0"/>
+          </a:p>
+        </p:txBody>
+      </p:sp>
+      <p:sp>
+        <p:nvSpPr>
+          <p:cNvPr id="20" name="Text 17"/>
+          <p:cNvSpPr/>
+          <p:nvPr/>
+        </p:nvSpPr>
+        <p:spPr>
+          <a:xfrm>
+            <a:off x="6492240" y="2862072"/>
+            <a:ext cx="1993392" cy="164592"/>
+          </a:xfrm>
+          <a:prstGeom prst="rect">
+            <a:avLst/>
+          </a:prstGeom>
+          <a:noFill/>
+          <a:ln/>
+        </p:spPr>
+        <p:txBody>
+          <a:bodyPr wrap="square" lIns="0" tIns="0" rIns="0" bIns="0" rtlCol="0" anchor="ctr"/>
+          <a:lstStyle/>
+          <a:p>
+            <a:pPr algn="ctr" indent="0" marL="0">
+              <a:buNone/>
+            </a:pPr>
+            <a:r>
+              <a:rPr lang="en-US" sz="1350" b="1" spc="50" kern="0" dirty="0">
+                <a:solidFill>
+                  <a:srgbClr val="101426"/>
+                </a:solidFill>
+                <a:latin typeface="Arial" pitchFamily="34" charset="0"/>
+                <a:ea typeface="Arial" pitchFamily="34" charset="-122"/>
+                <a:cs typeface="Arial" pitchFamily="34" charset="-120"/>
+              </a:rPr>
+              <a:t>APPROVE</a:t>
+            </a:r>
+            <a:endParaRPr lang="en-US" sz="1350" dirty="0"/>
+          </a:p>
+        </p:txBody>
+      </p:sp>
+      <p:sp>
+        <p:nvSpPr>
+          <p:cNvPr id="21" name="Text 18"/>
+          <p:cNvSpPr/>
+          <p:nvPr/>
+        </p:nvSpPr>
+        <p:spPr>
+          <a:xfrm>
+            <a:off x="6528816" y="3401568"/>
+            <a:ext cx="1920240" cy="502920"/>
+          </a:xfrm>
+          <a:prstGeom prst="rect">
+            <a:avLst/>
+          </a:prstGeom>
+          <a:noFill/>
+          <a:ln/>
+        </p:spPr>
+        <p:txBody>
+          <a:bodyPr wrap="square" lIns="0" tIns="0" rIns="0" bIns="0" rtlCol="0" anchor="ctr">
+            <a:normAutofit/>
+          </a:bodyPr>
+          <a:lstStyle/>
+          <a:p>
+            <a:pPr algn="ctr" indent="0" marL="0">
+              <a:buNone/>
+            </a:pPr>
+            <a:r>
+              <a:rPr lang="en-US" sz="1000" dirty="0">
+                <a:solidFill>
+                  <a:srgbClr val="646A7E"/>
+                </a:solidFill>
+                <a:latin typeface="Arial" pitchFamily="34" charset="0"/>
+                <a:ea typeface="Arial" pitchFamily="34" charset="-122"/>
+                <a:cs typeface="Arial" pitchFamily="34" charset="-120"/>
+              </a:rPr>
+              <a:t>User reviews content, audience and channels</a:t>
+            </a:r>
+            <a:endParaRPr lang="en-US" sz="1000" dirty="0"/>
+          </a:p>
+        </p:txBody>
+      </p:sp>
+      <p:sp>
+        <p:nvSpPr>
+          <p:cNvPr id="22" name="Shape 19"/>
+          <p:cNvSpPr/>
+          <p:nvPr/>
+        </p:nvSpPr>
+        <p:spPr>
+          <a:xfrm>
+            <a:off x="8778240" y="3291840"/>
+            <a:ext cx="219456" cy="0"/>
+          </a:xfrm>
+          <a:prstGeom prst="line">
+            <a:avLst/>
+          </a:prstGeom>
+          <a:noFill/>
+          <a:ln w="15875">
             <a:solidFill>
               <a:srgbClr val="5A32ED"/>
             </a:solidFill>
             <a:prstDash val="solid"/>
+            <a:tailEnd type="triangle"/>
           </a:ln>
         </p:spPr>
       </p:sp>
       <p:sp>
         <p:nvSpPr>
-          <p:cNvPr id="15" name="Text 12"/>
-          <p:cNvSpPr/>
-          <p:nvPr/>
-        </p:nvSpPr>
-        <p:spPr>
-          <a:xfrm>
-            <a:off x="3657600" y="3118104"/>
-            <a:ext cx="512064" cy="128016"/>
-          </a:xfrm>
-          <a:prstGeom prst="rect">
-            <a:avLst/>
-          </a:prstGeom>
-          <a:noFill/>
-          <a:ln/>
-        </p:spPr>
-        <p:txBody>
-          <a:bodyPr wrap="square" lIns="0" tIns="0" rIns="0" bIns="0" rtlCol="0" anchor="ctr"/>
-          <a:lstStyle/>
-          <a:p>
-            <a:pPr algn="ctr" indent="0" marL="0">
-              <a:buNone/>
-            </a:pPr>
-            <a:r>
-              <a:rPr lang="en-US" sz="850" b="1" dirty="0">
-                <a:solidFill>
-                  <a:srgbClr val="5A32ED"/>
-                </a:solidFill>
-                <a:latin typeface="Aptos" pitchFamily="34" charset="0"/>
-                <a:ea typeface="Aptos" pitchFamily="34" charset="-122"/>
-                <a:cs typeface="Aptos" pitchFamily="34" charset="-120"/>
-              </a:rPr>
-              <a:t>02</a:t>
-            </a:r>
-            <a:endParaRPr lang="en-US" sz="850" dirty="0"/>
-          </a:p>
-        </p:txBody>
-      </p:sp>
-      <p:sp>
-        <p:nvSpPr>
-          <p:cNvPr id="16" name="Text 13"/>
-          <p:cNvSpPr/>
-          <p:nvPr/>
-        </p:nvSpPr>
-        <p:spPr>
-          <a:xfrm>
-            <a:off x="4370832" y="3090672"/>
-            <a:ext cx="1371600" cy="146304"/>
-          </a:xfrm>
-          <a:prstGeom prst="rect">
-            <a:avLst/>
-          </a:prstGeom>
-          <a:noFill/>
-          <a:ln/>
-        </p:spPr>
-        <p:txBody>
-          <a:bodyPr wrap="square" lIns="0" tIns="0" rIns="0" bIns="0" rtlCol="0" anchor="ctr"/>
-          <a:lstStyle/>
-          <a:p>
-            <a:pPr indent="0" marL="0">
-              <a:buNone/>
-            </a:pPr>
-            <a:r>
-              <a:rPr lang="en-US" sz="950" b="1" spc="70" kern="0" dirty="0">
-                <a:solidFill>
-                  <a:srgbClr val="101426"/>
-                </a:solidFill>
-                <a:latin typeface="Aptos" pitchFamily="34" charset="0"/>
-                <a:ea typeface="Aptos" pitchFamily="34" charset="-122"/>
-                <a:cs typeface="Aptos" pitchFamily="34" charset="-120"/>
-              </a:rPr>
-              <a:t>REPLY</a:t>
-            </a:r>
-            <a:endParaRPr lang="en-US" sz="950" dirty="0"/>
-          </a:p>
-        </p:txBody>
-      </p:sp>
-      <p:sp>
-        <p:nvSpPr>
-          <p:cNvPr id="17" name="Shape 14"/>
-          <p:cNvSpPr/>
-          <p:nvPr/>
-        </p:nvSpPr>
-        <p:spPr>
-          <a:xfrm>
-            <a:off x="5650992" y="3200400"/>
-            <a:ext cx="530352" cy="0"/>
-          </a:xfrm>
-          <a:prstGeom prst="line">
-            <a:avLst/>
-          </a:prstGeom>
-          <a:noFill/>
-          <a:ln w="15240">
+          <p:cNvPr id="23" name="Shape 20"/>
+          <p:cNvSpPr/>
+          <p:nvPr/>
+        </p:nvSpPr>
+        <p:spPr>
+          <a:xfrm>
+            <a:off x="9052560" y="2057400"/>
+            <a:ext cx="2487168" cy="2487168"/>
+          </a:xfrm>
+          <a:prstGeom prst="roundRect">
+            <a:avLst>
+              <a:gd name="adj" fmla="val 4779"/>
+            </a:avLst>
+          </a:prstGeom>
+          <a:solidFill>
+            <a:srgbClr val="FFFFFF"/>
+          </a:solidFill>
+          <a:ln w="10795">
             <a:solidFill>
               <a:srgbClr val="D7CCFF"/>
             </a:solidFill>
             <a:prstDash val="solid"/>
-            <a:tailEnd type="triangle"/>
           </a:ln>
-        </p:spPr>
-      </p:sp>
-      <p:sp>
-        <p:nvSpPr>
-          <p:cNvPr id="18" name="Shape 15"/>
-          <p:cNvSpPr/>
-          <p:nvPr/>
-        </p:nvSpPr>
-        <p:spPr>
-          <a:xfrm>
-            <a:off x="6355080" y="2944368"/>
-            <a:ext cx="512064" cy="512064"/>
-          </a:xfrm>
-          <a:prstGeom prst="ellipse">
-            <a:avLst/>
+          <a:effectLst>
+            <a:outerShdw sx="100000" sy="100000" kx="0" ky="0" algn="bl" rotWithShape="0" blurRad="1.477396183774876e+74" dist="2.954792367549752e+74" dir="4.57019805007872e+87">
+              <a:srgbClr val="CFC7E8">
+                <a:alpha val="1.5999999999999997e+89"/>
+              </a:srgbClr>
+            </a:outerShdw>
+          </a:effectLst>
+        </p:spPr>
+      </p:sp>
+      <p:sp>
+        <p:nvSpPr>
+          <p:cNvPr id="24" name="Text 21"/>
+          <p:cNvSpPr/>
+          <p:nvPr/>
+        </p:nvSpPr>
+        <p:spPr>
+          <a:xfrm>
+            <a:off x="9290304" y="2359152"/>
+            <a:ext cx="411480" cy="118872"/>
+          </a:xfrm>
+          <a:prstGeom prst="rect">
+            <a:avLst/>
+          </a:prstGeom>
+          <a:noFill/>
+          <a:ln/>
+        </p:spPr>
+        <p:txBody>
+          <a:bodyPr wrap="square" lIns="0" tIns="0" rIns="0" bIns="0" rtlCol="0" anchor="ctr"/>
+          <a:lstStyle/>
+          <a:p>
+            <a:pPr indent="0" marL="0">
+              <a:buNone/>
+            </a:pPr>
+            <a:r>
+              <a:rPr lang="en-US" sz="800" b="1" dirty="0">
+                <a:solidFill>
+                  <a:srgbClr val="5A32ED"/>
+                </a:solidFill>
+                <a:latin typeface="Arial" pitchFamily="34" charset="0"/>
+                <a:ea typeface="Arial" pitchFamily="34" charset="-122"/>
+                <a:cs typeface="Arial" pitchFamily="34" charset="-120"/>
+              </a:rPr>
+              <a:t>04</a:t>
+            </a:r>
+            <a:endParaRPr lang="en-US" sz="800" dirty="0"/>
+          </a:p>
+        </p:txBody>
+      </p:sp>
+      <p:sp>
+        <p:nvSpPr>
+          <p:cNvPr id="25" name="Text 22"/>
+          <p:cNvSpPr/>
+          <p:nvPr/>
+        </p:nvSpPr>
+        <p:spPr>
+          <a:xfrm>
+            <a:off x="9290304" y="2862072"/>
+            <a:ext cx="1993392" cy="164592"/>
+          </a:xfrm>
+          <a:prstGeom prst="rect">
+            <a:avLst/>
+          </a:prstGeom>
+          <a:noFill/>
+          <a:ln/>
+        </p:spPr>
+        <p:txBody>
+          <a:bodyPr wrap="square" lIns="0" tIns="0" rIns="0" bIns="0" rtlCol="0" anchor="ctr"/>
+          <a:lstStyle/>
+          <a:p>
+            <a:pPr algn="ctr" indent="0" marL="0">
+              <a:buNone/>
+            </a:pPr>
+            <a:r>
+              <a:rPr lang="en-US" sz="1350" b="1" spc="50" kern="0" dirty="0">
+                <a:solidFill>
+                  <a:srgbClr val="101426"/>
+                </a:solidFill>
+                <a:latin typeface="Arial" pitchFamily="34" charset="0"/>
+                <a:ea typeface="Arial" pitchFamily="34" charset="-122"/>
+                <a:cs typeface="Arial" pitchFamily="34" charset="-120"/>
+              </a:rPr>
+              <a:t>MEASURE</a:t>
+            </a:r>
+            <a:endParaRPr lang="en-US" sz="1350" dirty="0"/>
+          </a:p>
+        </p:txBody>
+      </p:sp>
+      <p:sp>
+        <p:nvSpPr>
+          <p:cNvPr id="26" name="Text 23"/>
+          <p:cNvSpPr/>
+          <p:nvPr/>
+        </p:nvSpPr>
+        <p:spPr>
+          <a:xfrm>
+            <a:off x="9326880" y="3401568"/>
+            <a:ext cx="1920240" cy="502920"/>
+          </a:xfrm>
+          <a:prstGeom prst="rect">
+            <a:avLst/>
+          </a:prstGeom>
+          <a:noFill/>
+          <a:ln/>
+        </p:spPr>
+        <p:txBody>
+          <a:bodyPr wrap="square" lIns="0" tIns="0" rIns="0" bIns="0" rtlCol="0" anchor="ctr">
+            <a:normAutofit/>
+          </a:bodyPr>
+          <a:lstStyle/>
+          <a:p>
+            <a:pPr algn="ctr" indent="0" marL="0">
+              <a:buNone/>
+            </a:pPr>
+            <a:r>
+              <a:rPr lang="en-US" sz="1000" dirty="0">
+                <a:solidFill>
+                  <a:srgbClr val="646A7E"/>
+                </a:solidFill>
+                <a:latin typeface="Arial" pitchFamily="34" charset="0"/>
+                <a:ea typeface="Arial" pitchFamily="34" charset="-122"/>
+                <a:cs typeface="Arial" pitchFamily="34" charset="-120"/>
+              </a:rPr>
+              <a:t>Outcomes and opt-outs return to Statflo</a:t>
+            </a:r>
+            <a:endParaRPr lang="en-US" sz="1000" dirty="0"/>
+          </a:p>
+        </p:txBody>
+      </p:sp>
+      <p:sp>
+        <p:nvSpPr>
+          <p:cNvPr id="27" name="Shape 24"/>
+          <p:cNvSpPr/>
+          <p:nvPr/>
+        </p:nvSpPr>
+        <p:spPr>
+          <a:xfrm>
+            <a:off x="914400" y="5001768"/>
+            <a:ext cx="1691640" cy="329184"/>
+          </a:xfrm>
+          <a:prstGeom prst="roundRect">
+            <a:avLst>
+              <a:gd name="adj" fmla="val 22222"/>
+            </a:avLst>
           </a:prstGeom>
           <a:solidFill>
-            <a:srgbClr val="FFFFFF"/>
+            <a:srgbClr val="F7F5FF"/>
           </a:solidFill>
-          <a:ln w="13970">
-            <a:solidFill>
-              <a:srgbClr val="5A32ED"/>
-            </a:solidFill>
-            <a:prstDash val="solid"/>
-          </a:ln>
-        </p:spPr>
-      </p:sp>
-      <p:sp>
-        <p:nvSpPr>
-          <p:cNvPr id="19" name="Text 16"/>
-          <p:cNvSpPr/>
-          <p:nvPr/>
-        </p:nvSpPr>
-        <p:spPr>
-          <a:xfrm>
-            <a:off x="6355080" y="3118104"/>
-            <a:ext cx="512064" cy="128016"/>
-          </a:xfrm>
-          <a:prstGeom prst="rect">
-            <a:avLst/>
-          </a:prstGeom>
-          <a:noFill/>
-          <a:ln/>
-        </p:spPr>
-        <p:txBody>
-          <a:bodyPr wrap="square" lIns="0" tIns="0" rIns="0" bIns="0" rtlCol="0" anchor="ctr"/>
-          <a:lstStyle/>
-          <a:p>
-            <a:pPr algn="ctr" indent="0" marL="0">
-              <a:buNone/>
-            </a:pPr>
-            <a:r>
-              <a:rPr lang="en-US" sz="850" b="1" dirty="0">
-                <a:solidFill>
-                  <a:srgbClr val="5A32ED"/>
-                </a:solidFill>
-                <a:latin typeface="Aptos" pitchFamily="34" charset="0"/>
-                <a:ea typeface="Aptos" pitchFamily="34" charset="-122"/>
-                <a:cs typeface="Aptos" pitchFamily="34" charset="-120"/>
-              </a:rPr>
-              <a:t>03</a:t>
-            </a:r>
-            <a:endParaRPr lang="en-US" sz="850" dirty="0"/>
-          </a:p>
-        </p:txBody>
-      </p:sp>
-      <p:sp>
-        <p:nvSpPr>
-          <p:cNvPr id="20" name="Text 17"/>
-          <p:cNvSpPr/>
-          <p:nvPr/>
-        </p:nvSpPr>
-        <p:spPr>
-          <a:xfrm>
-            <a:off x="7068312" y="3090672"/>
-            <a:ext cx="1371600" cy="146304"/>
-          </a:xfrm>
-          <a:prstGeom prst="rect">
-            <a:avLst/>
-          </a:prstGeom>
-          <a:noFill/>
-          <a:ln/>
-        </p:spPr>
-        <p:txBody>
-          <a:bodyPr wrap="square" lIns="0" tIns="0" rIns="0" bIns="0" rtlCol="0" anchor="ctr"/>
-          <a:lstStyle/>
-          <a:p>
-            <a:pPr indent="0" marL="0">
-              <a:buNone/>
-            </a:pPr>
-            <a:r>
-              <a:rPr lang="en-US" sz="950" b="1" spc="70" kern="0" dirty="0">
-                <a:solidFill>
-                  <a:srgbClr val="101426"/>
-                </a:solidFill>
-                <a:latin typeface="Aptos" pitchFamily="34" charset="0"/>
-                <a:ea typeface="Aptos" pitchFamily="34" charset="-122"/>
-                <a:cs typeface="Aptos" pitchFamily="34" charset="-120"/>
-              </a:rPr>
-              <a:t>OPPORTUNITY</a:t>
-            </a:r>
-            <a:endParaRPr lang="en-US" sz="950" dirty="0"/>
-          </a:p>
-        </p:txBody>
-      </p:sp>
-      <p:sp>
-        <p:nvSpPr>
-          <p:cNvPr id="21" name="Shape 18"/>
-          <p:cNvSpPr/>
-          <p:nvPr/>
-        </p:nvSpPr>
-        <p:spPr>
-          <a:xfrm>
-            <a:off x="8348472" y="3200400"/>
-            <a:ext cx="530352" cy="0"/>
-          </a:xfrm>
-          <a:prstGeom prst="line">
-            <a:avLst/>
-          </a:prstGeom>
-          <a:noFill/>
-          <a:ln w="15240">
+          <a:ln w="8890">
             <a:solidFill>
               <a:srgbClr val="D7CCFF"/>
             </a:solidFill>
             <a:prstDash val="solid"/>
-            <a:tailEnd type="triangle"/>
           </a:ln>
         </p:spPr>
       </p:sp>
       <p:sp>
         <p:nvSpPr>
-          <p:cNvPr id="22" name="Shape 19"/>
-          <p:cNvSpPr/>
-          <p:nvPr/>
-        </p:nvSpPr>
-        <p:spPr>
-          <a:xfrm>
-            <a:off x="9052560" y="2944368"/>
-            <a:ext cx="512064" cy="512064"/>
-          </a:xfrm>
-          <a:prstGeom prst="ellipse">
-            <a:avLst/>
+          <p:cNvPr id="28" name="Text 25"/>
+          <p:cNvSpPr/>
+          <p:nvPr/>
+        </p:nvSpPr>
+        <p:spPr>
+          <a:xfrm>
+            <a:off x="1024128" y="5093208"/>
+            <a:ext cx="1472184" cy="109728"/>
+          </a:xfrm>
+          <a:prstGeom prst="rect">
+            <a:avLst/>
+          </a:prstGeom>
+          <a:noFill/>
+          <a:ln/>
+        </p:spPr>
+        <p:txBody>
+          <a:bodyPr wrap="square" lIns="0" tIns="0" rIns="0" bIns="0" rtlCol="0" anchor="ctr"/>
+          <a:lstStyle/>
+          <a:p>
+            <a:pPr algn="ctr" indent="0" marL="0">
+              <a:buNone/>
+            </a:pPr>
+            <a:r>
+              <a:rPr lang="en-US" sz="850" b="1" dirty="0">
+                <a:solidFill>
+                  <a:srgbClr val="5A32ED"/>
+                </a:solidFill>
+                <a:latin typeface="Arial" pitchFamily="34" charset="0"/>
+                <a:ea typeface="Arial" pitchFamily="34" charset="-122"/>
+                <a:cs typeface="Arial" pitchFamily="34" charset="-120"/>
+              </a:rPr>
+              <a:t>CUSTOMER APPROVAL</a:t>
+            </a:r>
+            <a:endParaRPr lang="en-US" sz="850" dirty="0"/>
+          </a:p>
+        </p:txBody>
+      </p:sp>
+      <p:sp>
+        <p:nvSpPr>
+          <p:cNvPr id="29" name="Shape 26"/>
+          <p:cNvSpPr/>
+          <p:nvPr/>
+        </p:nvSpPr>
+        <p:spPr>
+          <a:xfrm>
+            <a:off x="2898648" y="5001768"/>
+            <a:ext cx="1691640" cy="329184"/>
+          </a:xfrm>
+          <a:prstGeom prst="roundRect">
+            <a:avLst>
+              <a:gd name="adj" fmla="val 22222"/>
+            </a:avLst>
           </a:prstGeom>
           <a:solidFill>
-            <a:srgbClr val="EAF8F0"/>
+            <a:srgbClr val="F7F5FF"/>
           </a:solidFill>
-          <a:ln w="13970">
+          <a:ln w="8890">
             <a:solidFill>
-              <a:srgbClr val="159956"/>
+              <a:srgbClr val="D7CCFF"/>
             </a:solidFill>
             <a:prstDash val="solid"/>
           </a:ln>
@@ -5235,14 +5864,14 @@
       </p:sp>
       <p:sp>
         <p:nvSpPr>
-          <p:cNvPr id="23" name="Text 20"/>
-          <p:cNvSpPr/>
-          <p:nvPr/>
-        </p:nvSpPr>
-        <p:spPr>
-          <a:xfrm>
-            <a:off x="9052560" y="3118104"/>
-            <a:ext cx="512064" cy="128016"/>
+          <p:cNvPr id="30" name="Text 27"/>
+          <p:cNvSpPr/>
+          <p:nvPr/>
+        </p:nvSpPr>
+        <p:spPr>
+          <a:xfrm>
+            <a:off x="3008376" y="5093208"/>
+            <a:ext cx="1472184" cy="109728"/>
           </a:xfrm>
           <a:prstGeom prst="rect">
             <a:avLst/>
@@ -5260,13 +5889,13 @@
             <a:r>
               <a:rPr lang="en-US" sz="850" b="1" dirty="0">
                 <a:solidFill>
-                  <a:srgbClr val="159956"/>
-                </a:solidFill>
-                <a:latin typeface="Aptos" pitchFamily="34" charset="0"/>
-                <a:ea typeface="Aptos" pitchFamily="34" charset="-122"/>
-                <a:cs typeface="Aptos" pitchFamily="34" charset="-120"/>
-              </a:rPr>
-              <a:t>04</a:t>
+                  <a:srgbClr val="5A32ED"/>
+                </a:solidFill>
+                <a:latin typeface="Arial" pitchFamily="34" charset="0"/>
+                <a:ea typeface="Arial" pitchFamily="34" charset="-122"/>
+                <a:cs typeface="Arial" pitchFamily="34" charset="-120"/>
+              </a:rPr>
+              <a:t>ELIGIBLE CHANNELS</a:t>
             </a:r>
             <a:endParaRPr lang="en-US" sz="850" dirty="0"/>
           </a:p>
@@ -5274,63 +5903,26 @@
       </p:sp>
       <p:sp>
         <p:nvSpPr>
-          <p:cNvPr id="24" name="Text 21"/>
-          <p:cNvSpPr/>
-          <p:nvPr/>
-        </p:nvSpPr>
-        <p:spPr>
-          <a:xfrm>
-            <a:off x="9765792" y="3090672"/>
-            <a:ext cx="1371600" cy="146304"/>
-          </a:xfrm>
-          <a:prstGeom prst="rect">
-            <a:avLst/>
-          </a:prstGeom>
-          <a:noFill/>
-          <a:ln/>
-        </p:spPr>
-        <p:txBody>
-          <a:bodyPr wrap="square" lIns="0" tIns="0" rIns="0" bIns="0" rtlCol="0" anchor="ctr"/>
-          <a:lstStyle/>
-          <a:p>
-            <a:pPr indent="0" marL="0">
-              <a:buNone/>
-            </a:pPr>
-            <a:r>
-              <a:rPr lang="en-US" sz="950" b="1" spc="70" kern="0" dirty="0">
-                <a:solidFill>
-                  <a:srgbClr val="101426"/>
-                </a:solidFill>
-                <a:latin typeface="Aptos" pitchFamily="34" charset="0"/>
-                <a:ea typeface="Aptos" pitchFamily="34" charset="-122"/>
-                <a:cs typeface="Aptos" pitchFamily="34" charset="-120"/>
-              </a:rPr>
-              <a:t>REVENUE</a:t>
-            </a:r>
-            <a:endParaRPr lang="en-US" sz="950" dirty="0"/>
-          </a:p>
-        </p:txBody>
-      </p:sp>
-      <p:sp>
-        <p:nvSpPr>
-          <p:cNvPr id="25" name="Shape 22"/>
-          <p:cNvSpPr/>
-          <p:nvPr/>
-        </p:nvSpPr>
-        <p:spPr>
-          <a:xfrm>
-            <a:off x="841248" y="4453128"/>
-            <a:ext cx="228600" cy="228600"/>
-          </a:xfrm>
-          <a:prstGeom prst="ellipse">
-            <a:avLst/>
+          <p:cNvPr id="31" name="Shape 28"/>
+          <p:cNvSpPr/>
+          <p:nvPr/>
+        </p:nvSpPr>
+        <p:spPr>
+          <a:xfrm>
+            <a:off x="4882896" y="5001768"/>
+            <a:ext cx="1417320" cy="329184"/>
+          </a:xfrm>
+          <a:prstGeom prst="roundRect">
+            <a:avLst>
+              <a:gd name="adj" fmla="val 22222"/>
+            </a:avLst>
           </a:prstGeom>
           <a:solidFill>
-            <a:srgbClr val="EAF8F0"/>
+            <a:srgbClr val="F7F5FF"/>
           </a:solidFill>
-          <a:ln w="12700">
+          <a:ln w="8890">
             <a:solidFill>
-              <a:srgbClr val="159956"/>
+              <a:srgbClr val="D7CCFF"/>
             </a:solidFill>
             <a:prstDash val="solid"/>
           </a:ln>
@@ -5338,14 +5930,14 @@
       </p:sp>
       <p:sp>
         <p:nvSpPr>
-          <p:cNvPr id="26" name="Text 23"/>
-          <p:cNvSpPr/>
-          <p:nvPr/>
-        </p:nvSpPr>
-        <p:spPr>
-          <a:xfrm>
-            <a:off x="841248" y="4503420"/>
-            <a:ext cx="228600" cy="109728"/>
+          <p:cNvPr id="32" name="Text 29"/>
+          <p:cNvSpPr/>
+          <p:nvPr/>
+        </p:nvSpPr>
+        <p:spPr>
+          <a:xfrm>
+            <a:off x="4992624" y="5093208"/>
+            <a:ext cx="1197864" cy="109728"/>
           </a:xfrm>
           <a:prstGeom prst="rect">
             <a:avLst/>
@@ -5361,120 +5953,42 @@
               <a:buNone/>
             </a:pPr>
             <a:r>
-              <a:rPr lang="en-US" sz="900" b="1" dirty="0">
-                <a:solidFill>
-                  <a:srgbClr val="159956"/>
-                </a:solidFill>
-                <a:latin typeface="Aptos" pitchFamily="34" charset="0"/>
-                <a:ea typeface="Aptos" pitchFamily="34" charset="-122"/>
-                <a:cs typeface="Aptos" pitchFamily="34" charset="-120"/>
-              </a:rPr>
-              <a:t>✓</a:t>
-            </a:r>
-            <a:endParaRPr lang="en-US" sz="900" dirty="0"/>
-          </a:p>
-        </p:txBody>
-      </p:sp>
-      <p:sp>
-        <p:nvSpPr>
-          <p:cNvPr id="27" name="Text 24"/>
-          <p:cNvSpPr/>
-          <p:nvPr/>
-        </p:nvSpPr>
-        <p:spPr>
-          <a:xfrm>
-            <a:off x="1188720" y="4443984"/>
-            <a:ext cx="2962656" cy="192024"/>
-          </a:xfrm>
-          <a:prstGeom prst="rect">
-            <a:avLst/>
-          </a:prstGeom>
-          <a:noFill/>
-          <a:ln/>
-        </p:spPr>
-        <p:txBody>
-          <a:bodyPr wrap="square" lIns="0" tIns="0" rIns="0" bIns="0" rtlCol="0" anchor="ctr"/>
-          <a:lstStyle/>
-          <a:p>
-            <a:pPr indent="0" marL="0">
-              <a:buNone/>
-            </a:pPr>
-            <a:r>
-              <a:rPr lang="en-US" sz="1250" b="1" dirty="0">
-                <a:solidFill>
-                  <a:srgbClr val="101426"/>
-                </a:solidFill>
-                <a:latin typeface="Aptos" pitchFamily="34" charset="0"/>
-                <a:ea typeface="Aptos" pitchFamily="34" charset="-122"/>
-                <a:cs typeface="Aptos" pitchFamily="34" charset="-120"/>
-              </a:rPr>
-              <a:t>Campaign-level attribution</a:t>
-            </a:r>
-            <a:endParaRPr lang="en-US" sz="1250" dirty="0"/>
-          </a:p>
-        </p:txBody>
-      </p:sp>
-      <p:sp>
-        <p:nvSpPr>
-          <p:cNvPr id="28" name="Text 25"/>
-          <p:cNvSpPr/>
-          <p:nvPr/>
-        </p:nvSpPr>
-        <p:spPr>
-          <a:xfrm>
-            <a:off x="1188720" y="4700016"/>
-            <a:ext cx="2962656" cy="438912"/>
-          </a:xfrm>
-          <a:prstGeom prst="rect">
-            <a:avLst/>
-          </a:prstGeom>
-          <a:noFill/>
-          <a:ln/>
-        </p:spPr>
-        <p:txBody>
-          <a:bodyPr wrap="square" lIns="0" tIns="0" rIns="0" bIns="0" rtlCol="0" anchor="t">
-            <a:normAutofit/>
-          </a:bodyPr>
-          <a:lstStyle/>
-          <a:p>
-            <a:pPr indent="0" marL="0">
-              <a:buNone/>
-            </a:pPr>
-            <a:r>
-              <a:rPr lang="en-US" sz="1050" dirty="0">
-                <a:solidFill>
-                  <a:srgbClr val="646A7E"/>
-                </a:solidFill>
-                <a:latin typeface="Aptos" pitchFamily="34" charset="0"/>
-                <a:ea typeface="Aptos" pitchFamily="34" charset="-122"/>
-                <a:cs typeface="Aptos" pitchFamily="34" charset="-120"/>
-              </a:rPr>
-              <a:t>Understand which outreach creates replies, opportunities and commercial momentum.</a:t>
-            </a:r>
-            <a:endParaRPr lang="en-US" sz="1050" dirty="0"/>
-          </a:p>
-        </p:txBody>
-      </p:sp>
-      <p:sp>
-        <p:nvSpPr>
-          <p:cNvPr id="29" name="Shape 26"/>
-          <p:cNvSpPr/>
-          <p:nvPr/>
-        </p:nvSpPr>
-        <p:spPr>
-          <a:xfrm>
-            <a:off x="4462272" y="4453128"/>
-            <a:ext cx="228600" cy="228600"/>
-          </a:xfrm>
-          <a:prstGeom prst="ellipse">
-            <a:avLst/>
+              <a:rPr lang="en-US" sz="850" b="1" dirty="0">
+                <a:solidFill>
+                  <a:srgbClr val="5A32ED"/>
+                </a:solidFill>
+                <a:latin typeface="Arial" pitchFamily="34" charset="0"/>
+                <a:ea typeface="Arial" pitchFamily="34" charset="-122"/>
+                <a:cs typeface="Arial" pitchFamily="34" charset="-120"/>
+              </a:rPr>
+              <a:t>CONSENT RULES</a:t>
+            </a:r>
+            <a:endParaRPr lang="en-US" sz="850" dirty="0"/>
+          </a:p>
+        </p:txBody>
+      </p:sp>
+      <p:sp>
+        <p:nvSpPr>
+          <p:cNvPr id="33" name="Shape 30"/>
+          <p:cNvSpPr/>
+          <p:nvPr/>
+        </p:nvSpPr>
+        <p:spPr>
+          <a:xfrm>
+            <a:off x="6592824" y="5001768"/>
+            <a:ext cx="1353312" cy="329184"/>
+          </a:xfrm>
+          <a:prstGeom prst="roundRect">
+            <a:avLst>
+              <a:gd name="adj" fmla="val 22222"/>
+            </a:avLst>
           </a:prstGeom>
           <a:solidFill>
-            <a:srgbClr val="EAF8F0"/>
+            <a:srgbClr val="F7F5FF"/>
           </a:solidFill>
-          <a:ln w="12700">
+          <a:ln w="8890">
             <a:solidFill>
-              <a:srgbClr val="159956"/>
+              <a:srgbClr val="D7CCFF"/>
             </a:solidFill>
             <a:prstDash val="solid"/>
           </a:ln>
@@ -5482,14 +5996,14 @@
       </p:sp>
       <p:sp>
         <p:nvSpPr>
-          <p:cNvPr id="30" name="Text 27"/>
-          <p:cNvSpPr/>
-          <p:nvPr/>
-        </p:nvSpPr>
-        <p:spPr>
-          <a:xfrm>
-            <a:off x="4462272" y="4503420"/>
-            <a:ext cx="228600" cy="109728"/>
+          <p:cNvPr id="34" name="Text 31"/>
+          <p:cNvSpPr/>
+          <p:nvPr/>
+        </p:nvSpPr>
+        <p:spPr>
+          <a:xfrm>
+            <a:off x="6702552" y="5093208"/>
+            <a:ext cx="1133856" cy="109728"/>
           </a:xfrm>
           <a:prstGeom prst="rect">
             <a:avLst/>
@@ -5505,120 +6019,42 @@
               <a:buNone/>
             </a:pPr>
             <a:r>
-              <a:rPr lang="en-US" sz="900" b="1" dirty="0">
-                <a:solidFill>
-                  <a:srgbClr val="159956"/>
-                </a:solidFill>
-                <a:latin typeface="Aptos" pitchFamily="34" charset="0"/>
-                <a:ea typeface="Aptos" pitchFamily="34" charset="-122"/>
-                <a:cs typeface="Aptos" pitchFamily="34" charset="-120"/>
-              </a:rPr>
-              <a:t>✓</a:t>
-            </a:r>
-            <a:endParaRPr lang="en-US" sz="900" dirty="0"/>
-          </a:p>
-        </p:txBody>
-      </p:sp>
-      <p:sp>
-        <p:nvSpPr>
-          <p:cNvPr id="31" name="Text 28"/>
-          <p:cNvSpPr/>
-          <p:nvPr/>
-        </p:nvSpPr>
-        <p:spPr>
-          <a:xfrm>
-            <a:off x="4809744" y="4443984"/>
-            <a:ext cx="2962656" cy="192024"/>
-          </a:xfrm>
-          <a:prstGeom prst="rect">
-            <a:avLst/>
-          </a:prstGeom>
-          <a:noFill/>
-          <a:ln/>
-        </p:spPr>
-        <p:txBody>
-          <a:bodyPr wrap="square" lIns="0" tIns="0" rIns="0" bIns="0" rtlCol="0" anchor="ctr"/>
-          <a:lstStyle/>
-          <a:p>
-            <a:pPr indent="0" marL="0">
-              <a:buNone/>
-            </a:pPr>
-            <a:r>
-              <a:rPr lang="en-US" sz="1250" b="1" dirty="0">
-                <a:solidFill>
-                  <a:srgbClr val="101426"/>
-                </a:solidFill>
-                <a:latin typeface="Aptos" pitchFamily="34" charset="0"/>
-                <a:ea typeface="Aptos" pitchFamily="34" charset="-122"/>
-                <a:cs typeface="Aptos" pitchFamily="34" charset="-120"/>
-              </a:rPr>
-              <a:t>Cleaner customer records</a:t>
-            </a:r>
-            <a:endParaRPr lang="en-US" sz="1250" dirty="0"/>
-          </a:p>
-        </p:txBody>
-      </p:sp>
-      <p:sp>
-        <p:nvSpPr>
-          <p:cNvPr id="32" name="Text 29"/>
-          <p:cNvSpPr/>
-          <p:nvPr/>
-        </p:nvSpPr>
-        <p:spPr>
-          <a:xfrm>
-            <a:off x="4809744" y="4700016"/>
-            <a:ext cx="2962656" cy="438912"/>
-          </a:xfrm>
-          <a:prstGeom prst="rect">
-            <a:avLst/>
-          </a:prstGeom>
-          <a:noFill/>
-          <a:ln/>
-        </p:spPr>
-        <p:txBody>
-          <a:bodyPr wrap="square" lIns="0" tIns="0" rIns="0" bIns="0" rtlCol="0" anchor="t">
-            <a:normAutofit/>
-          </a:bodyPr>
-          <a:lstStyle/>
-          <a:p>
-            <a:pPr indent="0" marL="0">
-              <a:buNone/>
-            </a:pPr>
-            <a:r>
-              <a:rPr lang="en-US" sz="1050" dirty="0">
-                <a:solidFill>
-                  <a:srgbClr val="646A7E"/>
-                </a:solidFill>
-                <a:latin typeface="Aptos" pitchFamily="34" charset="0"/>
-                <a:ea typeface="Aptos" pitchFamily="34" charset="-122"/>
-                <a:cs typeface="Aptos" pitchFamily="34" charset="-120"/>
-              </a:rPr>
-              <a:t>Give teams a more complete history with fewer gaps and fewer duplicates.</a:t>
-            </a:r>
-            <a:endParaRPr lang="en-US" sz="1050" dirty="0"/>
-          </a:p>
-        </p:txBody>
-      </p:sp>
-      <p:sp>
-        <p:nvSpPr>
-          <p:cNvPr id="33" name="Shape 30"/>
-          <p:cNvSpPr/>
-          <p:nvPr/>
-        </p:nvSpPr>
-        <p:spPr>
-          <a:xfrm>
-            <a:off x="8083296" y="4453128"/>
-            <a:ext cx="228600" cy="228600"/>
-          </a:xfrm>
-          <a:prstGeom prst="ellipse">
-            <a:avLst/>
+              <a:rPr lang="en-US" sz="850" b="1" dirty="0">
+                <a:solidFill>
+                  <a:srgbClr val="5A32ED"/>
+                </a:solidFill>
+                <a:latin typeface="Arial" pitchFamily="34" charset="0"/>
+                <a:ea typeface="Arial" pitchFamily="34" charset="-122"/>
+                <a:cs typeface="Arial" pitchFamily="34" charset="-120"/>
+              </a:rPr>
+              <a:t>OPT-OUT SYNC</a:t>
+            </a:r>
+            <a:endParaRPr lang="en-US" sz="850" dirty="0"/>
+          </a:p>
+        </p:txBody>
+      </p:sp>
+      <p:sp>
+        <p:nvSpPr>
+          <p:cNvPr id="35" name="Shape 32"/>
+          <p:cNvSpPr/>
+          <p:nvPr/>
+        </p:nvSpPr>
+        <p:spPr>
+          <a:xfrm>
+            <a:off x="8238744" y="5001768"/>
+            <a:ext cx="1783080" cy="329184"/>
+          </a:xfrm>
+          <a:prstGeom prst="roundRect">
+            <a:avLst>
+              <a:gd name="adj" fmla="val 22222"/>
+            </a:avLst>
           </a:prstGeom>
           <a:solidFill>
-            <a:srgbClr val="EAF8F0"/>
+            <a:srgbClr val="F7F5FF"/>
           </a:solidFill>
-          <a:ln w="12700">
+          <a:ln w="8890">
             <a:solidFill>
-              <a:srgbClr val="159956"/>
+              <a:srgbClr val="D7CCFF"/>
             </a:solidFill>
             <a:prstDash val="solid"/>
           </a:ln>
@@ -5626,14 +6062,14 @@
       </p:sp>
       <p:sp>
         <p:nvSpPr>
-          <p:cNvPr id="34" name="Text 31"/>
-          <p:cNvSpPr/>
-          <p:nvPr/>
-        </p:nvSpPr>
-        <p:spPr>
-          <a:xfrm>
-            <a:off x="8083296" y="4503420"/>
-            <a:ext cx="228600" cy="109728"/>
+          <p:cNvPr id="36" name="Text 33"/>
+          <p:cNvSpPr/>
+          <p:nvPr/>
+        </p:nvSpPr>
+        <p:spPr>
+          <a:xfrm>
+            <a:off x="8348472" y="5093208"/>
+            <a:ext cx="1563624" cy="109728"/>
           </a:xfrm>
           <a:prstGeom prst="rect">
             <a:avLst/>
@@ -5649,97 +6085,17 @@
               <a:buNone/>
             </a:pPr>
             <a:r>
-              <a:rPr lang="en-US" sz="900" b="1" dirty="0">
-                <a:solidFill>
-                  <a:srgbClr val="159956"/>
-                </a:solidFill>
-                <a:latin typeface="Aptos" pitchFamily="34" charset="0"/>
-                <a:ea typeface="Aptos" pitchFamily="34" charset="-122"/>
-                <a:cs typeface="Aptos" pitchFamily="34" charset="-120"/>
-              </a:rPr>
-              <a:t>✓</a:t>
-            </a:r>
-            <a:endParaRPr lang="en-US" sz="900" dirty="0"/>
-          </a:p>
-        </p:txBody>
-      </p:sp>
-      <p:sp>
-        <p:nvSpPr>
-          <p:cNvPr id="35" name="Text 32"/>
-          <p:cNvSpPr/>
-          <p:nvPr/>
-        </p:nvSpPr>
-        <p:spPr>
-          <a:xfrm>
-            <a:off x="8430768" y="4443984"/>
-            <a:ext cx="2962656" cy="192024"/>
-          </a:xfrm>
-          <a:prstGeom prst="rect">
-            <a:avLst/>
-          </a:prstGeom>
-          <a:noFill/>
-          <a:ln/>
-        </p:spPr>
-        <p:txBody>
-          <a:bodyPr wrap="square" lIns="0" tIns="0" rIns="0" bIns="0" rtlCol="0" anchor="ctr"/>
-          <a:lstStyle/>
-          <a:p>
-            <a:pPr indent="0" marL="0">
-              <a:buNone/>
-            </a:pPr>
-            <a:r>
-              <a:rPr lang="en-US" sz="1250" b="1" dirty="0">
-                <a:solidFill>
-                  <a:srgbClr val="101426"/>
-                </a:solidFill>
-                <a:latin typeface="Aptos" pitchFamily="34" charset="0"/>
-                <a:ea typeface="Aptos" pitchFamily="34" charset="-122"/>
-                <a:cs typeface="Aptos" pitchFamily="34" charset="-120"/>
-              </a:rPr>
-              <a:t>Shared visibility</a:t>
-            </a:r>
-            <a:endParaRPr lang="en-US" sz="1250" dirty="0"/>
-          </a:p>
-        </p:txBody>
-      </p:sp>
-      <p:sp>
-        <p:nvSpPr>
-          <p:cNvPr id="36" name="Text 33"/>
-          <p:cNvSpPr/>
-          <p:nvPr/>
-        </p:nvSpPr>
-        <p:spPr>
-          <a:xfrm>
-            <a:off x="8430768" y="4700016"/>
-            <a:ext cx="2962656" cy="438912"/>
-          </a:xfrm>
-          <a:prstGeom prst="rect">
-            <a:avLst/>
-          </a:prstGeom>
-          <a:noFill/>
-          <a:ln/>
-        </p:spPr>
-        <p:txBody>
-          <a:bodyPr wrap="square" lIns="0" tIns="0" rIns="0" bIns="0" rtlCol="0" anchor="t">
-            <a:normAutofit/>
-          </a:bodyPr>
-          <a:lstStyle/>
-          <a:p>
-            <a:pPr indent="0" marL="0">
-              <a:buNone/>
-            </a:pPr>
-            <a:r>
-              <a:rPr lang="en-US" sz="1050" dirty="0">
-                <a:solidFill>
-                  <a:srgbClr val="646A7E"/>
-                </a:solidFill>
-                <a:latin typeface="Aptos" pitchFamily="34" charset="0"/>
-                <a:ea typeface="Aptos" pitchFamily="34" charset="-122"/>
-                <a:cs typeface="Aptos" pitchFamily="34" charset="-120"/>
-              </a:rPr>
-              <a:t>Sales and leadership can work from the same view of pipeline progress.</a:t>
-            </a:r>
-            <a:endParaRPr lang="en-US" sz="1050" dirty="0"/>
+              <a:rPr lang="en-US" sz="850" b="1" dirty="0">
+                <a:solidFill>
+                  <a:srgbClr val="5A32ED"/>
+                </a:solidFill>
+                <a:latin typeface="Arial" pitchFamily="34" charset="0"/>
+                <a:ea typeface="Arial" pitchFamily="34" charset="-122"/>
+                <a:cs typeface="Arial" pitchFamily="34" charset="-120"/>
+              </a:rPr>
+              <a:t>COMBINED REPORTING</a:t>
+            </a:r>
+            <a:endParaRPr lang="en-US" sz="850" dirty="0"/>
           </a:p>
         </p:txBody>
       </p:sp>
@@ -5795,11 +6151,11 @@
                 <a:solidFill>
                   <a:srgbClr val="8A8FA0"/>
                 </a:solidFill>
-                <a:latin typeface="Aptos" pitchFamily="34" charset="0"/>
-                <a:ea typeface="Aptos" pitchFamily="34" charset="-122"/>
-                <a:cs typeface="Aptos" pitchFamily="34" charset="-120"/>
-              </a:rPr>
-              <a:t>LeadReacher CRM integration benefits</a:t>
+                <a:latin typeface="Arial" pitchFamily="34" charset="0"/>
+                <a:ea typeface="Arial" pitchFamily="34" charset="-122"/>
+                <a:cs typeface="Arial" pitchFamily="34" charset="-120"/>
+              </a:rPr>
+              <a:t>LeadReacher + Statflo | how the pilot works</a:t>
             </a:r>
             <a:endParaRPr lang="en-US" sz="750" dirty="0"/>
           </a:p>
@@ -5864,13 +6220,6 @@
 <file path=ppt/slides/slide5.xml><?xml version="1.0" encoding="utf-8"?>
 <p:sld xmlns:a="http://schemas.openxmlformats.org/drawingml/2006/main" xmlns:r="http://schemas.openxmlformats.org/officeDocument/2006/relationships" xmlns:p="http://schemas.openxmlformats.org/presentationml/2006/main">
   <p:cSld name="Slide 5">
-    <p:bg>
-      <p:bgPr>
-        <a:solidFill>
-          <a:srgbClr val="050A1F"/>
-        </a:solidFill>
-      </p:bgPr>
-    </p:bg>
     <p:spTree>
       <p:nvGrpSpPr>
         <p:cNvPr id="1" name=""/>
@@ -5885,9 +6234,45 @@
           <a:chExt cx="0" cy="0"/>
         </a:xfrm>
       </p:grpSpPr>
+      <p:sp>
+        <p:nvSpPr>
+          <p:cNvPr id="2" name="Shape 0"/>
+          <p:cNvSpPr/>
+          <p:nvPr/>
+        </p:nvSpPr>
+        <p:spPr>
+          <a:xfrm>
+            <a:off x="256032" y="182880"/>
+            <a:ext cx="11676888" cy="512064"/>
+          </a:xfrm>
+          <a:prstGeom prst="roundRect">
+            <a:avLst>
+              <a:gd name="adj" fmla="val 21429"/>
+            </a:avLst>
+          </a:prstGeom>
+          <a:solidFill>
+            <a:srgbClr val="FFFFFF">
+              <a:alpha val="97000"/>
+            </a:srgbClr>
+          </a:solidFill>
+          <a:ln w="8890">
+            <a:solidFill>
+              <a:srgbClr val="E6E2F2"/>
+            </a:solidFill>
+            <a:prstDash val="solid"/>
+          </a:ln>
+          <a:effectLst>
+            <a:outerShdw sx="100000" sy="100000" kx="0" ky="0" algn="bl" rotWithShape="0" blurRad="1.8762931533940924e+78" dist="3.752586306788185e+78" dir="2.742118830047232e+92">
+              <a:srgbClr val="CFC7E8">
+                <a:alpha val="1.5999999999999997e+94"/>
+              </a:srgbClr>
+            </a:outerShdw>
+          </a:effectLst>
+        </p:spPr>
+      </p:sp>
       <p:pic>
         <p:nvPicPr>
-          <p:cNvPr id="2" name="Image 0" descr="/Users/nicol/Desktop/PROJECTS/leadreacher/apps/web/public/logo/leadreacher_logo_white_transparent.svg">    </p:cNvPr>
+          <p:cNvPr id="3" name="Image 0" descr="/Users/nicol/Desktop/PROJECTS/leadreacher/apps/web/public/logo/leadreacher_logo_colored_transparent.svg">    </p:cNvPr>
           <p:cNvPicPr>
             <a:picLocks noChangeAspect="1"/>
           </p:cNvPicPr>
@@ -5907,7 +6292,7 @@
         </p:blipFill>
         <p:spPr>
           <a:xfrm>
-            <a:off x="621792" y="457200"/>
+            <a:off x="475488" y="310896"/>
             <a:ext cx="2240280" cy="192024"/>
           </a:xfrm>
           <a:prstGeom prst="rect">
@@ -5917,14 +6302,14 @@
       </p:pic>
       <p:sp>
         <p:nvSpPr>
-          <p:cNvPr id="3" name="Text 0"/>
-          <p:cNvSpPr/>
-          <p:nvPr/>
-        </p:nvSpPr>
-        <p:spPr>
-          <a:xfrm>
-            <a:off x="9217152" y="484632"/>
-            <a:ext cx="2267712" cy="146304"/>
+          <p:cNvPr id="4" name="Text 1"/>
+          <p:cNvSpPr/>
+          <p:nvPr/>
+        </p:nvSpPr>
+        <p:spPr>
+          <a:xfrm>
+            <a:off x="9464040" y="338328"/>
+            <a:ext cx="2148840" cy="128016"/>
           </a:xfrm>
           <a:prstGeom prst="rect">
             <a:avLst/>
@@ -5942,13 +6327,13 @@
             <a:r>
               <a:rPr lang="en-US" sz="850" b="1" spc="170" kern="0" dirty="0">
                 <a:solidFill>
-                  <a:srgbClr val="BCAEFF"/>
-                </a:solidFill>
-                <a:latin typeface="Aptos" pitchFamily="34" charset="0"/>
-                <a:ea typeface="Aptos" pitchFamily="34" charset="-122"/>
-                <a:cs typeface="Aptos" pitchFamily="34" charset="-120"/>
-              </a:rPr>
-              <a:t>CRM INTEGRATION DECK</a:t>
+                  <a:srgbClr val="5A32ED"/>
+                </a:solidFill>
+                <a:latin typeface="Arial" pitchFamily="34" charset="0"/>
+                <a:ea typeface="Arial" pitchFamily="34" charset="-122"/>
+                <a:cs typeface="Arial" pitchFamily="34" charset="-120"/>
+              </a:rPr>
+              <a:t>04 | HOW IT SCALES</a:t>
             </a:r>
             <a:endParaRPr lang="en-US" sz="850" dirty="0"/>
           </a:p>
@@ -5956,14 +6341,14 @@
       </p:sp>
       <p:sp>
         <p:nvSpPr>
-          <p:cNvPr id="4" name="Text 1"/>
-          <p:cNvSpPr/>
-          <p:nvPr/>
-        </p:nvSpPr>
-        <p:spPr>
-          <a:xfrm>
-            <a:off x="713232" y="1417320"/>
-            <a:ext cx="7726680" cy="640080"/>
+          <p:cNvPr id="5" name="Text 2"/>
+          <p:cNvSpPr/>
+          <p:nvPr/>
+        </p:nvSpPr>
+        <p:spPr>
+          <a:xfrm>
+            <a:off x="658368" y="941832"/>
+            <a:ext cx="4023360" cy="164592"/>
           </a:xfrm>
           <a:prstGeom prst="rect">
             <a:avLst/>
@@ -5979,30 +6364,30 @@
               <a:buNone/>
             </a:pPr>
             <a:r>
-              <a:rPr lang="en-US" sz="3800" b="1" dirty="0">
-                <a:solidFill>
-                  <a:srgbClr val="FFFFFF"/>
-                </a:solidFill>
-                <a:latin typeface="Aptos Display" pitchFamily="34" charset="0"/>
-                <a:ea typeface="Aptos Display" pitchFamily="34" charset="-122"/>
-                <a:cs typeface="Aptos Display" pitchFamily="34" charset="-120"/>
-              </a:rPr>
-              <a:t>LeadReacher starts</a:t>
-            </a:r>
-            <a:endParaRPr lang="en-US" sz="3800" dirty="0"/>
-          </a:p>
-        </p:txBody>
-      </p:sp>
-      <p:sp>
-        <p:nvSpPr>
-          <p:cNvPr id="5" name="Text 2"/>
-          <p:cNvSpPr/>
-          <p:nvPr/>
-        </p:nvSpPr>
-        <p:spPr>
-          <a:xfrm>
-            <a:off x="713232" y="1993392"/>
-            <a:ext cx="7726680" cy="640080"/>
+              <a:rPr lang="en-US" sz="900" b="1" spc="200" kern="0" dirty="0">
+                <a:solidFill>
+                  <a:srgbClr val="5A32ED"/>
+                </a:solidFill>
+                <a:latin typeface="Arial" pitchFamily="34" charset="0"/>
+                <a:ea typeface="Arial" pitchFamily="34" charset="-122"/>
+                <a:cs typeface="Arial" pitchFamily="34" charset="-120"/>
+              </a:rPr>
+              <a:t>TWO COMMERCIAL PATHS</a:t>
+            </a:r>
+            <a:endParaRPr lang="en-US" sz="900" dirty="0"/>
+          </a:p>
+        </p:txBody>
+      </p:sp>
+      <p:sp>
+        <p:nvSpPr>
+          <p:cNvPr id="6" name="Text 3"/>
+          <p:cNvSpPr/>
+          <p:nvPr/>
+        </p:nvSpPr>
+        <p:spPr>
+          <a:xfrm>
+            <a:off x="658368" y="1188720"/>
+            <a:ext cx="6583680" cy="457200"/>
           </a:xfrm>
           <a:prstGeom prst="rect">
             <a:avLst/>
@@ -6018,56 +6403,17 @@
               <a:buNone/>
             </a:pPr>
             <a:r>
-              <a:rPr lang="en-US" sz="3800" b="1" dirty="0">
-                <a:solidFill>
-                  <a:srgbClr val="FFFFFF"/>
-                </a:solidFill>
-                <a:latin typeface="Aptos Display" pitchFamily="34" charset="0"/>
-                <a:ea typeface="Aptos Display" pitchFamily="34" charset="-122"/>
-                <a:cs typeface="Aptos Display" pitchFamily="34" charset="-120"/>
-              </a:rPr>
-              <a:t>the conversation.</a:t>
-            </a:r>
-            <a:endParaRPr lang="en-US" sz="3800" dirty="0"/>
-          </a:p>
-        </p:txBody>
-      </p:sp>
-      <p:sp>
-        <p:nvSpPr>
-          <p:cNvPr id="6" name="Text 3"/>
-          <p:cNvSpPr/>
-          <p:nvPr/>
-        </p:nvSpPr>
-        <p:spPr>
-          <a:xfrm>
-            <a:off x="713232" y="2688336"/>
-            <a:ext cx="9784080" cy="658368"/>
-          </a:xfrm>
-          <a:prstGeom prst="rect">
-            <a:avLst/>
-          </a:prstGeom>
-          <a:noFill/>
-          <a:ln/>
-        </p:spPr>
-        <p:txBody>
-          <a:bodyPr wrap="square" lIns="0" tIns="0" rIns="0" bIns="0" rtlCol="0" anchor="ctr"/>
-          <a:lstStyle/>
-          <a:p>
-            <a:pPr indent="0" marL="0">
-              <a:buNone/>
-            </a:pPr>
-            <a:r>
-              <a:rPr lang="en-US" sz="3800" b="1" dirty="0">
-                <a:solidFill>
-                  <a:srgbClr val="9A7FFF"/>
-                </a:solidFill>
-                <a:latin typeface="Aptos Display" pitchFamily="34" charset="0"/>
-                <a:ea typeface="Aptos Display" pitchFamily="34" charset="-122"/>
-                <a:cs typeface="Aptos Display" pitchFamily="34" charset="-120"/>
-              </a:rPr>
-              <a:t>Your CRM carries it forward.</a:t>
-            </a:r>
-            <a:endParaRPr lang="en-US" sz="3800" dirty="0"/>
+              <a:rPr lang="en-US" sz="2600" b="1" dirty="0">
+                <a:solidFill>
+                  <a:srgbClr val="101426"/>
+                </a:solidFill>
+                <a:latin typeface="Arial" pitchFamily="34" charset="0"/>
+                <a:ea typeface="Arial" pitchFamily="34" charset="-122"/>
+                <a:cs typeface="Arial" pitchFamily="34" charset="-120"/>
+              </a:rPr>
+              <a:t>Launch lightly or build the full engine.</a:t>
+            </a:r>
+            <a:endParaRPr lang="en-US" sz="2600" dirty="0"/>
           </a:p>
         </p:txBody>
       </p:sp>
@@ -6079,8 +6425,8 @@
         </p:nvSpPr>
         <p:spPr>
           <a:xfrm>
-            <a:off x="749808" y="3694176"/>
-            <a:ext cx="6583680" cy="566928"/>
+            <a:off x="7772400" y="1234440"/>
+            <a:ext cx="3401568" cy="329184"/>
           </a:xfrm>
           <a:prstGeom prst="rect">
             <a:avLst/>
@@ -6098,17 +6444,17 @@
               <a:buNone/>
             </a:pPr>
             <a:r>
-              <a:rPr lang="en-US" sz="1700" dirty="0">
-                <a:solidFill>
-                  <a:srgbClr val="C7C9D4"/>
-                </a:solidFill>
-                <a:latin typeface="Aptos" pitchFamily="34" charset="0"/>
-                <a:ea typeface="Aptos" pitchFamily="34" charset="-122"/>
-                <a:cs typeface="Aptos" pitchFamily="34" charset="-120"/>
-              </a:rPr>
-              <a:t>A connected acquisition workflow, built around the tools your team already uses.</a:t>
-            </a:r>
-            <a:endParaRPr lang="en-US" sz="1700" dirty="0"/>
+              <a:rPr lang="en-US" sz="1080" dirty="0">
+                <a:solidFill>
+                  <a:srgbClr val="646A7E"/>
+                </a:solidFill>
+                <a:latin typeface="Arial" pitchFamily="34" charset="0"/>
+                <a:ea typeface="Arial" pitchFamily="34" charset="-122"/>
+                <a:cs typeface="Arial" pitchFamily="34" charset="-120"/>
+              </a:rPr>
+              <a:t>Both paths build on LeadReacher capabilities available today.</a:t>
+            </a:r>
+            <a:endParaRPr lang="en-US" sz="1080" dirty="0"/>
           </a:p>
         </p:txBody>
       </p:sp>
@@ -6120,19 +6466,30 @@
         </p:nvSpPr>
         <p:spPr>
           <a:xfrm>
-            <a:off x="749808" y="4773168"/>
-            <a:ext cx="2578608" cy="0"/>
-          </a:xfrm>
-          <a:prstGeom prst="line">
-            <a:avLst/>
-          </a:prstGeom>
-          <a:noFill/>
-          <a:ln w="12700">
+            <a:off x="658368" y="1901952"/>
+            <a:ext cx="5285232" cy="4069080"/>
+          </a:xfrm>
+          <a:prstGeom prst="roundRect">
+            <a:avLst>
+              <a:gd name="adj" fmla="val 2921"/>
+            </a:avLst>
+          </a:prstGeom>
+          <a:solidFill>
+            <a:srgbClr val="FFFFFF"/>
+          </a:solidFill>
+          <a:ln w="10795">
             <a:solidFill>
-              <a:srgbClr val="5F4BB5"/>
+              <a:srgbClr val="D7CCFF"/>
             </a:solidFill>
             <a:prstDash val="solid"/>
           </a:ln>
+          <a:effectLst>
+            <a:outerShdw sx="100000" sy="100000" kx="0" ky="0" algn="bl" rotWithShape="0" blurRad="2.3828923048104974e+82" dist="4.765784609620995e+82" dir="1.6452712980283393e+97">
+              <a:srgbClr val="CFC7E8">
+                <a:alpha val="1.5999999999999998e+99"/>
+              </a:srgbClr>
+            </a:outerShdw>
+          </a:effectLst>
         </p:spPr>
       </p:sp>
       <p:sp>
@@ -6143,8 +6500,8 @@
         </p:nvSpPr>
         <p:spPr>
           <a:xfrm>
-            <a:off x="749808" y="5047488"/>
-            <a:ext cx="2578608" cy="256032"/>
+            <a:off x="932688" y="2176272"/>
+            <a:ext cx="1417320" cy="109728"/>
           </a:xfrm>
           <a:prstGeom prst="rect">
             <a:avLst/>
@@ -6160,30 +6517,798 @@
               <a:buNone/>
             </a:pPr>
             <a:r>
-              <a:rPr lang="en-US" sz="1600" b="1" dirty="0">
+              <a:rPr lang="en-US" sz="720" b="1" spc="80" kern="0" dirty="0">
+                <a:solidFill>
+                  <a:srgbClr val="5A32ED"/>
+                </a:solidFill>
+                <a:latin typeface="Arial" pitchFamily="34" charset="0"/>
+                <a:ea typeface="Arial" pitchFamily="34" charset="-122"/>
+                <a:cs typeface="Arial" pitchFamily="34" charset="-120"/>
+              </a:rPr>
+              <a:t>PROPOSED CONCEPT</a:t>
+            </a:r>
+            <a:endParaRPr lang="en-US" sz="720" dirty="0"/>
+          </a:p>
+        </p:txBody>
+      </p:sp>
+      <p:sp>
+        <p:nvSpPr>
+          <p:cNvPr id="10" name="Shape 7"/>
+          <p:cNvSpPr/>
+          <p:nvPr/>
+        </p:nvSpPr>
+        <p:spPr>
+          <a:xfrm>
+            <a:off x="932688" y="2523744"/>
+            <a:ext cx="4736592" cy="2176272"/>
+          </a:xfrm>
+          <a:prstGeom prst="roundRect">
+            <a:avLst>
+              <a:gd name="adj" fmla="val 3782"/>
+            </a:avLst>
+          </a:prstGeom>
+          <a:solidFill>
+            <a:srgbClr val="FAFAFD"/>
+          </a:solidFill>
+          <a:ln w="9525">
+            <a:solidFill>
+              <a:srgbClr val="E6E2F2"/>
+            </a:solidFill>
+            <a:prstDash val="solid"/>
+          </a:ln>
+        </p:spPr>
+      </p:sp>
+      <p:sp>
+        <p:nvSpPr>
+          <p:cNvPr id="11" name="Text 8"/>
+          <p:cNvSpPr/>
+          <p:nvPr/>
+        </p:nvSpPr>
+        <p:spPr>
+          <a:xfrm>
+            <a:off x="1170432" y="2761488"/>
+            <a:ext cx="1371600" cy="109728"/>
+          </a:xfrm>
+          <a:prstGeom prst="rect">
+            <a:avLst/>
+          </a:prstGeom>
+          <a:noFill/>
+          <a:ln/>
+        </p:spPr>
+        <p:txBody>
+          <a:bodyPr wrap="square" lIns="0" tIns="0" rIns="0" bIns="0" rtlCol="0" anchor="ctr"/>
+          <a:lstStyle/>
+          <a:p>
+            <a:pPr indent="0" marL="0">
+              <a:buNone/>
+            </a:pPr>
+            <a:r>
+              <a:rPr lang="en-US" sz="700" b="1" spc="80" kern="0" dirty="0">
+                <a:solidFill>
+                  <a:srgbClr val="8A8FA0"/>
+                </a:solidFill>
+                <a:latin typeface="Arial" pitchFamily="34" charset="0"/>
+                <a:ea typeface="Arial" pitchFamily="34" charset="-122"/>
+                <a:cs typeface="Arial" pitchFamily="34" charset="-120"/>
+              </a:rPr>
+              <a:t>STATFLO CONTACT</a:t>
+            </a:r>
+            <a:endParaRPr lang="en-US" sz="700" dirty="0"/>
+          </a:p>
+        </p:txBody>
+      </p:sp>
+      <p:sp>
+        <p:nvSpPr>
+          <p:cNvPr id="12" name="Shape 9"/>
+          <p:cNvSpPr/>
+          <p:nvPr/>
+        </p:nvSpPr>
+        <p:spPr>
+          <a:xfrm>
+            <a:off x="1170432" y="3081528"/>
+            <a:ext cx="566928" cy="566928"/>
+          </a:xfrm>
+          <a:prstGeom prst="ellipse">
+            <a:avLst/>
+          </a:prstGeom>
+          <a:solidFill>
+            <a:srgbClr val="EEE9FF"/>
+          </a:solidFill>
+          <a:ln w="7620">
+            <a:solidFill>
+              <a:srgbClr val="D7CCFF"/>
+            </a:solidFill>
+            <a:prstDash val="solid"/>
+          </a:ln>
+        </p:spPr>
+      </p:sp>
+      <p:sp>
+        <p:nvSpPr>
+          <p:cNvPr id="13" name="Text 10"/>
+          <p:cNvSpPr/>
+          <p:nvPr/>
+        </p:nvSpPr>
+        <p:spPr>
+          <a:xfrm>
+            <a:off x="1170432" y="3273552"/>
+            <a:ext cx="566928" cy="128016"/>
+          </a:xfrm>
+          <a:prstGeom prst="rect">
+            <a:avLst/>
+          </a:prstGeom>
+          <a:noFill/>
+          <a:ln/>
+        </p:spPr>
+        <p:txBody>
+          <a:bodyPr wrap="square" lIns="0" tIns="0" rIns="0" bIns="0" rtlCol="0" anchor="ctr"/>
+          <a:lstStyle/>
+          <a:p>
+            <a:pPr algn="ctr" indent="0" marL="0">
+              <a:buNone/>
+            </a:pPr>
+            <a:r>
+              <a:rPr lang="en-US" sz="850" b="1" dirty="0">
+                <a:solidFill>
+                  <a:srgbClr val="5A32ED"/>
+                </a:solidFill>
+                <a:latin typeface="Arial" pitchFamily="34" charset="0"/>
+                <a:ea typeface="Arial" pitchFamily="34" charset="-122"/>
+                <a:cs typeface="Arial" pitchFamily="34" charset="-120"/>
+              </a:rPr>
+              <a:t>SK</a:t>
+            </a:r>
+            <a:endParaRPr lang="en-US" sz="850" dirty="0"/>
+          </a:p>
+        </p:txBody>
+      </p:sp>
+      <p:sp>
+        <p:nvSpPr>
+          <p:cNvPr id="14" name="Text 11"/>
+          <p:cNvSpPr/>
+          <p:nvPr/>
+        </p:nvSpPr>
+        <p:spPr>
+          <a:xfrm>
+            <a:off x="1920240" y="3081528"/>
+            <a:ext cx="1508760" cy="164592"/>
+          </a:xfrm>
+          <a:prstGeom prst="rect">
+            <a:avLst/>
+          </a:prstGeom>
+          <a:noFill/>
+          <a:ln/>
+        </p:spPr>
+        <p:txBody>
+          <a:bodyPr wrap="square" lIns="0" tIns="0" rIns="0" bIns="0" rtlCol="0" anchor="ctr"/>
+          <a:lstStyle/>
+          <a:p>
+            <a:pPr indent="0" marL="0">
+              <a:buNone/>
+            </a:pPr>
+            <a:r>
+              <a:rPr lang="en-US" sz="1120" b="1" dirty="0">
+                <a:solidFill>
+                  <a:srgbClr val="101426"/>
+                </a:solidFill>
+                <a:latin typeface="Arial" pitchFamily="34" charset="0"/>
+                <a:ea typeface="Arial" pitchFamily="34" charset="-122"/>
+                <a:cs typeface="Arial" pitchFamily="34" charset="-120"/>
+              </a:rPr>
+              <a:t>Sarah Kim</a:t>
+            </a:r>
+            <a:endParaRPr lang="en-US" sz="1120" dirty="0"/>
+          </a:p>
+        </p:txBody>
+      </p:sp>
+      <p:sp>
+        <p:nvSpPr>
+          <p:cNvPr id="15" name="Text 12"/>
+          <p:cNvSpPr/>
+          <p:nvPr/>
+        </p:nvSpPr>
+        <p:spPr>
+          <a:xfrm>
+            <a:off x="1920240" y="3383280"/>
+            <a:ext cx="2468880" cy="146304"/>
+          </a:xfrm>
+          <a:prstGeom prst="rect">
+            <a:avLst/>
+          </a:prstGeom>
+          <a:noFill/>
+          <a:ln/>
+        </p:spPr>
+        <p:txBody>
+          <a:bodyPr wrap="square" lIns="0" tIns="0" rIns="0" bIns="0" rtlCol="0" anchor="ctr"/>
+          <a:lstStyle/>
+          <a:p>
+            <a:pPr indent="0" marL="0">
+              <a:buNone/>
+            </a:pPr>
+            <a:r>
+              <a:rPr lang="en-US" sz="820" dirty="0">
+                <a:solidFill>
+                  <a:srgbClr val="646A7E"/>
+                </a:solidFill>
+                <a:latin typeface="Arial" pitchFamily="34" charset="0"/>
+                <a:ea typeface="Arial" pitchFamily="34" charset="-122"/>
+                <a:cs typeface="Arial" pitchFamily="34" charset="-120"/>
+              </a:rPr>
+              <a:t>Common Thread  |  Existing customer</a:t>
+            </a:r>
+            <a:endParaRPr lang="en-US" sz="820" dirty="0"/>
+          </a:p>
+        </p:txBody>
+      </p:sp>
+      <p:sp>
+        <p:nvSpPr>
+          <p:cNvPr id="16" name="Shape 13"/>
+          <p:cNvSpPr/>
+          <p:nvPr/>
+        </p:nvSpPr>
+        <p:spPr>
+          <a:xfrm>
+            <a:off x="4169664" y="3054096"/>
+            <a:ext cx="1170432" cy="530352"/>
+          </a:xfrm>
+          <a:prstGeom prst="roundRect">
+            <a:avLst>
+              <a:gd name="adj" fmla="val 13793"/>
+            </a:avLst>
+          </a:prstGeom>
+          <a:solidFill>
+            <a:srgbClr val="5A32ED"/>
+          </a:solidFill>
+          <a:ln w="12700">
+            <a:solidFill>
+              <a:srgbClr val="5A32ED"/>
+            </a:solidFill>
+            <a:prstDash val="solid"/>
+          </a:ln>
+        </p:spPr>
+      </p:sp>
+      <p:sp>
+        <p:nvSpPr>
+          <p:cNvPr id="17" name="Text 14"/>
+          <p:cNvSpPr/>
+          <p:nvPr/>
+        </p:nvSpPr>
+        <p:spPr>
+          <a:xfrm>
+            <a:off x="4297680" y="3246120"/>
+            <a:ext cx="914400" cy="118872"/>
+          </a:xfrm>
+          <a:prstGeom prst="rect">
+            <a:avLst/>
+          </a:prstGeom>
+          <a:noFill/>
+          <a:ln/>
+        </p:spPr>
+        <p:txBody>
+          <a:bodyPr wrap="square" lIns="0" tIns="0" rIns="0" bIns="0" rtlCol="0" anchor="ctr"/>
+          <a:lstStyle/>
+          <a:p>
+            <a:pPr algn="ctr" indent="0" marL="0">
+              <a:buNone/>
+            </a:pPr>
+            <a:r>
+              <a:rPr lang="en-US" sz="780" b="1" spc="60" kern="0" dirty="0">
                 <a:solidFill>
                   <a:srgbClr val="FFFFFF"/>
                 </a:solidFill>
-                <a:latin typeface="Aptos Display" pitchFamily="34" charset="0"/>
-                <a:ea typeface="Aptos Display" pitchFamily="34" charset="-122"/>
-                <a:cs typeface="Aptos Display" pitchFamily="34" charset="-120"/>
-              </a:rPr>
-              <a:t>Connected context</a:t>
-            </a:r>
-            <a:endParaRPr lang="en-US" sz="1600" dirty="0"/>
-          </a:p>
-        </p:txBody>
-      </p:sp>
-      <p:sp>
-        <p:nvSpPr>
-          <p:cNvPr id="10" name="Text 7"/>
-          <p:cNvSpPr/>
-          <p:nvPr/>
-        </p:nvSpPr>
-        <p:spPr>
-          <a:xfrm>
-            <a:off x="749808" y="5449824"/>
-            <a:ext cx="2578608" cy="475488"/>
+                <a:latin typeface="Arial" pitchFamily="34" charset="0"/>
+                <a:ea typeface="Arial" pitchFamily="34" charset="-122"/>
+                <a:cs typeface="Arial" pitchFamily="34" charset="-120"/>
+              </a:rPr>
+              <a:t>OUTREACH</a:t>
+            </a:r>
+            <a:endParaRPr lang="en-US" sz="780" dirty="0"/>
+          </a:p>
+        </p:txBody>
+      </p:sp>
+      <p:sp>
+        <p:nvSpPr>
+          <p:cNvPr id="18" name="Shape 15"/>
+          <p:cNvSpPr/>
+          <p:nvPr/>
+        </p:nvSpPr>
+        <p:spPr>
+          <a:xfrm>
+            <a:off x="1170432" y="3877056"/>
+            <a:ext cx="4169664" cy="0"/>
+          </a:xfrm>
+          <a:prstGeom prst="line">
+            <a:avLst/>
+          </a:prstGeom>
+          <a:noFill/>
+          <a:ln w="8255">
+            <a:solidFill>
+              <a:srgbClr val="E6E2F2"/>
+            </a:solidFill>
+            <a:prstDash val="solid"/>
+          </a:ln>
+        </p:spPr>
+      </p:sp>
+      <p:sp>
+        <p:nvSpPr>
+          <p:cNvPr id="19" name="Text 16"/>
+          <p:cNvSpPr/>
+          <p:nvPr/>
+        </p:nvSpPr>
+        <p:spPr>
+          <a:xfrm>
+            <a:off x="1170432" y="4114800"/>
+            <a:ext cx="4169664" cy="182880"/>
+          </a:xfrm>
+          <a:prstGeom prst="rect">
+            <a:avLst/>
+          </a:prstGeom>
+          <a:noFill/>
+          <a:ln/>
+        </p:spPr>
+        <p:txBody>
+          <a:bodyPr wrap="square" lIns="0" tIns="0" rIns="0" bIns="0" rtlCol="0" anchor="ctr"/>
+          <a:lstStyle/>
+          <a:p>
+            <a:pPr algn="ctr" indent="0" marL="0">
+              <a:buNone/>
+            </a:pPr>
+            <a:r>
+              <a:rPr lang="en-US" sz="920" dirty="0">
+                <a:solidFill>
+                  <a:srgbClr val="646A7E"/>
+                </a:solidFill>
+                <a:latin typeface="Arial" pitchFamily="34" charset="0"/>
+                <a:ea typeface="Arial" pitchFamily="34" charset="-122"/>
+                <a:cs typeface="Arial" pitchFamily="34" charset="-120"/>
+              </a:rPr>
+              <a:t>Single-contact messaging and personalized video</a:t>
+            </a:r>
+            <a:endParaRPr lang="en-US" sz="920" dirty="0"/>
+          </a:p>
+        </p:txBody>
+      </p:sp>
+      <p:sp>
+        <p:nvSpPr>
+          <p:cNvPr id="20" name="Text 17"/>
+          <p:cNvSpPr/>
+          <p:nvPr/>
+        </p:nvSpPr>
+        <p:spPr>
+          <a:xfrm>
+            <a:off x="932688" y="5047488"/>
+            <a:ext cx="731520" cy="109728"/>
+          </a:xfrm>
+          <a:prstGeom prst="rect">
+            <a:avLst/>
+          </a:prstGeom>
+          <a:noFill/>
+          <a:ln/>
+        </p:spPr>
+        <p:txBody>
+          <a:bodyPr wrap="square" lIns="0" tIns="0" rIns="0" bIns="0" rtlCol="0" anchor="ctr"/>
+          <a:lstStyle/>
+          <a:p>
+            <a:pPr indent="0" marL="0">
+              <a:buNone/>
+            </a:pPr>
+            <a:r>
+              <a:rPr lang="en-US" sz="720" b="1" spc="80" kern="0" dirty="0">
+                <a:solidFill>
+                  <a:srgbClr val="5A32ED"/>
+                </a:solidFill>
+                <a:latin typeface="Arial" pitchFamily="34" charset="0"/>
+                <a:ea typeface="Arial" pitchFamily="34" charset="-122"/>
+                <a:cs typeface="Arial" pitchFamily="34" charset="-120"/>
+              </a:rPr>
+              <a:t>PATH 1</a:t>
+            </a:r>
+            <a:endParaRPr lang="en-US" sz="720" dirty="0"/>
+          </a:p>
+        </p:txBody>
+      </p:sp>
+      <p:sp>
+        <p:nvSpPr>
+          <p:cNvPr id="21" name="Text 18"/>
+          <p:cNvSpPr/>
+          <p:nvPr/>
+        </p:nvSpPr>
+        <p:spPr>
+          <a:xfrm>
+            <a:off x="1755648" y="4983480"/>
+            <a:ext cx="2560320" cy="201168"/>
+          </a:xfrm>
+          <a:prstGeom prst="rect">
+            <a:avLst/>
+          </a:prstGeom>
+          <a:noFill/>
+          <a:ln/>
+        </p:spPr>
+        <p:txBody>
+          <a:bodyPr wrap="square" lIns="0" tIns="0" rIns="0" bIns="0" rtlCol="0" anchor="ctr"/>
+          <a:lstStyle/>
+          <a:p>
+            <a:pPr indent="0" marL="0">
+              <a:buNone/>
+            </a:pPr>
+            <a:r>
+              <a:rPr lang="en-US" sz="1250" b="1" dirty="0">
+                <a:solidFill>
+                  <a:srgbClr val="101426"/>
+                </a:solidFill>
+                <a:latin typeface="Arial" pitchFamily="34" charset="0"/>
+                <a:ea typeface="Arial" pitchFamily="34" charset="-122"/>
+                <a:cs typeface="Arial" pitchFamily="34" charset="-120"/>
+              </a:rPr>
+              <a:t>Contact-level channel</a:t>
+            </a:r>
+            <a:endParaRPr lang="en-US" sz="1250" dirty="0"/>
+          </a:p>
+        </p:txBody>
+      </p:sp>
+      <p:sp>
+        <p:nvSpPr>
+          <p:cNvPr id="22" name="Text 19"/>
+          <p:cNvSpPr/>
+          <p:nvPr/>
+        </p:nvSpPr>
+        <p:spPr>
+          <a:xfrm>
+            <a:off x="932688" y="5458968"/>
+            <a:ext cx="1828800" cy="146304"/>
+          </a:xfrm>
+          <a:prstGeom prst="rect">
+            <a:avLst/>
+          </a:prstGeom>
+          <a:noFill/>
+          <a:ln/>
+        </p:spPr>
+        <p:txBody>
+          <a:bodyPr wrap="square" lIns="0" tIns="0" rIns="0" bIns="0" rtlCol="0" anchor="ctr"/>
+          <a:lstStyle/>
+          <a:p>
+            <a:pPr indent="0" marL="0">
+              <a:buNone/>
+            </a:pPr>
+            <a:r>
+              <a:rPr lang="en-US" sz="850" dirty="0">
+                <a:solidFill>
+                  <a:srgbClr val="646A7E"/>
+                </a:solidFill>
+                <a:latin typeface="Arial" pitchFamily="34" charset="0"/>
+                <a:ea typeface="Arial" pitchFamily="34" charset="-122"/>
+                <a:cs typeface="Arial" pitchFamily="34" charset="-120"/>
+              </a:rPr>
+              <a:t>Fast pilot</a:t>
+            </a:r>
+            <a:endParaRPr lang="en-US" sz="850" dirty="0"/>
+          </a:p>
+        </p:txBody>
+      </p:sp>
+      <p:sp>
+        <p:nvSpPr>
+          <p:cNvPr id="23" name="Text 20"/>
+          <p:cNvSpPr/>
+          <p:nvPr/>
+        </p:nvSpPr>
+        <p:spPr>
+          <a:xfrm>
+            <a:off x="3913632" y="5458968"/>
+            <a:ext cx="1508760" cy="146304"/>
+          </a:xfrm>
+          <a:prstGeom prst="rect">
+            <a:avLst/>
+          </a:prstGeom>
+          <a:noFill/>
+          <a:ln/>
+        </p:spPr>
+        <p:txBody>
+          <a:bodyPr wrap="square" lIns="0" tIns="0" rIns="0" bIns="0" rtlCol="0" anchor="ctr"/>
+          <a:lstStyle/>
+          <a:p>
+            <a:pPr algn="r" indent="0" marL="0">
+              <a:buNone/>
+            </a:pPr>
+            <a:r>
+              <a:rPr lang="en-US" sz="850" b="1" dirty="0">
+                <a:solidFill>
+                  <a:srgbClr val="5A32ED"/>
+                </a:solidFill>
+                <a:latin typeface="Arial" pitchFamily="34" charset="0"/>
+                <a:ea typeface="Arial" pitchFamily="34" charset="-122"/>
+                <a:cs typeface="Arial" pitchFamily="34" charset="-120"/>
+              </a:rPr>
+              <a:t>Per use</a:t>
+            </a:r>
+            <a:endParaRPr lang="en-US" sz="850" dirty="0"/>
+          </a:p>
+        </p:txBody>
+      </p:sp>
+      <p:sp>
+        <p:nvSpPr>
+          <p:cNvPr id="24" name="Shape 21"/>
+          <p:cNvSpPr/>
+          <p:nvPr/>
+        </p:nvSpPr>
+        <p:spPr>
+          <a:xfrm>
+            <a:off x="6236208" y="1901952"/>
+            <a:ext cx="5285232" cy="4069080"/>
+          </a:xfrm>
+          <a:prstGeom prst="roundRect">
+            <a:avLst>
+              <a:gd name="adj" fmla="val 2921"/>
+            </a:avLst>
+          </a:prstGeom>
+          <a:solidFill>
+            <a:srgbClr val="050A1F"/>
+          </a:solidFill>
+          <a:ln w="12700">
+            <a:solidFill>
+              <a:srgbClr val="050A1F"/>
+            </a:solidFill>
+            <a:prstDash val="solid"/>
+          </a:ln>
+          <a:effectLst>
+            <a:outerShdw sx="100000" sy="100000" kx="0" ky="0" algn="bl" rotWithShape="0" blurRad="3.0262732271093317e+86" dist="6.052546454218663e+86" dir="9.871627788170037e+101">
+              <a:srgbClr val="CFC7E8">
+                <a:alpha val="1.5999999999999997e+104"/>
+              </a:srgbClr>
+            </a:outerShdw>
+          </a:effectLst>
+        </p:spPr>
+      </p:sp>
+      <p:sp>
+        <p:nvSpPr>
+          <p:cNvPr id="25" name="Text 22"/>
+          <p:cNvSpPr/>
+          <p:nvPr/>
+        </p:nvSpPr>
+        <p:spPr>
+          <a:xfrm>
+            <a:off x="6510528" y="2176272"/>
+            <a:ext cx="1417320" cy="109728"/>
+          </a:xfrm>
+          <a:prstGeom prst="rect">
+            <a:avLst/>
+          </a:prstGeom>
+          <a:noFill/>
+          <a:ln/>
+        </p:spPr>
+        <p:txBody>
+          <a:bodyPr wrap="square" lIns="0" tIns="0" rIns="0" bIns="0" rtlCol="0" anchor="ctr"/>
+          <a:lstStyle/>
+          <a:p>
+            <a:pPr indent="0" marL="0">
+              <a:buNone/>
+            </a:pPr>
+            <a:r>
+              <a:rPr lang="en-US" sz="720" b="1" spc="80" kern="0" dirty="0">
+                <a:solidFill>
+                  <a:srgbClr val="9F8BFF"/>
+                </a:solidFill>
+                <a:latin typeface="Arial" pitchFamily="34" charset="0"/>
+                <a:ea typeface="Arial" pitchFamily="34" charset="-122"/>
+                <a:cs typeface="Arial" pitchFamily="34" charset="-120"/>
+              </a:rPr>
+              <a:t>PROPOSED CONCEPT</a:t>
+            </a:r>
+            <a:endParaRPr lang="en-US" sz="720" dirty="0"/>
+          </a:p>
+        </p:txBody>
+      </p:sp>
+      <p:sp>
+        <p:nvSpPr>
+          <p:cNvPr id="26" name="Shape 23"/>
+          <p:cNvSpPr/>
+          <p:nvPr/>
+        </p:nvSpPr>
+        <p:spPr>
+          <a:xfrm>
+            <a:off x="6510528" y="2523744"/>
+            <a:ext cx="4736592" cy="2176272"/>
+          </a:xfrm>
+          <a:prstGeom prst="roundRect">
+            <a:avLst>
+              <a:gd name="adj" fmla="val 3782"/>
+            </a:avLst>
+          </a:prstGeom>
+          <a:solidFill>
+            <a:srgbClr val="11172E"/>
+          </a:solidFill>
+          <a:ln w="9525">
+            <a:solidFill>
+              <a:srgbClr val="2A3150"/>
+            </a:solidFill>
+            <a:prstDash val="solid"/>
+          </a:ln>
+        </p:spPr>
+      </p:sp>
+      <p:sp>
+        <p:nvSpPr>
+          <p:cNvPr id="27" name="Shape 24"/>
+          <p:cNvSpPr/>
+          <p:nvPr/>
+        </p:nvSpPr>
+        <p:spPr>
+          <a:xfrm>
+            <a:off x="6693408" y="2679192"/>
+            <a:ext cx="1298448" cy="530352"/>
+          </a:xfrm>
+          <a:prstGeom prst="roundRect">
+            <a:avLst>
+              <a:gd name="adj" fmla="val 10345"/>
+            </a:avLst>
+          </a:prstGeom>
+          <a:solidFill>
+            <a:srgbClr val="FFFFFF"/>
+          </a:solidFill>
+          <a:ln w="12700">
+            <a:solidFill>
+              <a:srgbClr val="FFFFFF"/>
+            </a:solidFill>
+            <a:prstDash val="solid"/>
+          </a:ln>
+        </p:spPr>
+      </p:sp>
+      <p:pic>
+        <p:nvPicPr>
+          <p:cNvPr id="28" name="Image 1" descr="/Users/nicol/Desktop/PROJECTS/leadreacher/docs/presentations/assets/statflo-logo.svg">    </p:cNvPr>
+          <p:cNvPicPr>
+            <a:picLocks noChangeAspect="1"/>
+          </p:cNvPicPr>
+          <p:nvPr/>
+        </p:nvPicPr>
+        <p:blipFill>
+          <a:blip r:embed="rId3">
+            <a:extLst>
+              <a:ext uri="{96DAC541-7B7A-43D3-8B79-37D633B846F1}">
+                <asvg:svgBlip xmlns:asvg="http://schemas.microsoft.com/office/drawing/2016/SVG/main" r:embed="rId4"/>
+              </a:ext>
+            </a:extLst>
+          </a:blip>
+          <a:stretch>
+            <a:fillRect/>
+          </a:stretch>
+        </p:blipFill>
+        <p:spPr>
+          <a:xfrm>
+            <a:off x="6812280" y="2770632"/>
+            <a:ext cx="1060704" cy="347472"/>
+          </a:xfrm>
+          <a:prstGeom prst="rect">
+            <a:avLst/>
+          </a:prstGeom>
+        </p:spPr>
+      </p:pic>
+      <p:sp>
+        <p:nvSpPr>
+          <p:cNvPr id="29" name="Shape 25"/>
+          <p:cNvSpPr/>
+          <p:nvPr/>
+        </p:nvSpPr>
+        <p:spPr>
+          <a:xfrm>
+            <a:off x="6748272" y="3273552"/>
+            <a:ext cx="4023360" cy="0"/>
+          </a:xfrm>
+          <a:prstGeom prst="line">
+            <a:avLst/>
+          </a:prstGeom>
+          <a:noFill/>
+          <a:ln w="8255">
+            <a:solidFill>
+              <a:srgbClr val="2A3150"/>
+            </a:solidFill>
+            <a:prstDash val="solid"/>
+          </a:ln>
+        </p:spPr>
+      </p:sp>
+      <p:sp>
+        <p:nvSpPr>
+          <p:cNvPr id="30" name="Shape 26"/>
+          <p:cNvSpPr/>
+          <p:nvPr/>
+        </p:nvSpPr>
+        <p:spPr>
+          <a:xfrm>
+            <a:off x="6748272" y="3493008"/>
+            <a:ext cx="1188720" cy="749808"/>
+          </a:xfrm>
+          <a:prstGeom prst="roundRect">
+            <a:avLst>
+              <a:gd name="adj" fmla="val 7317"/>
+            </a:avLst>
+          </a:prstGeom>
+          <a:solidFill>
+            <a:srgbClr val="5A32ED"/>
+          </a:solidFill>
+          <a:ln w="12700">
+            <a:solidFill>
+              <a:srgbClr val="5A32ED"/>
+            </a:solidFill>
+            <a:prstDash val="solid"/>
+          </a:ln>
+        </p:spPr>
+      </p:sp>
+      <p:pic>
+        <p:nvPicPr>
+          <p:cNvPr id="31" name="Image 2" descr="/Users/nicol/Desktop/PROJECTS/leadreacher/apps/web/public/logo/leadreacher_icon_colored.svg">    </p:cNvPr>
+          <p:cNvPicPr>
+            <a:picLocks noChangeAspect="1"/>
+          </p:cNvPicPr>
+          <p:nvPr/>
+        </p:nvPicPr>
+        <p:blipFill>
+          <a:blip r:embed="rId5">
+            <a:extLst>
+              <a:ext uri="{96DAC541-7B7A-43D3-8B79-37D633B846F1}">
+                <asvg:svgBlip xmlns:asvg="http://schemas.microsoft.com/office/drawing/2016/SVG/main" r:embed="rId6"/>
+              </a:ext>
+            </a:extLst>
+          </a:blip>
+          <a:stretch>
+            <a:fillRect/>
+          </a:stretch>
+        </p:blipFill>
+        <p:spPr>
+          <a:xfrm>
+            <a:off x="7013448" y="3639312"/>
+            <a:ext cx="329184" cy="329184"/>
+          </a:xfrm>
+          <a:prstGeom prst="rect">
+            <a:avLst/>
+          </a:prstGeom>
+        </p:spPr>
+      </p:pic>
+      <p:sp>
+        <p:nvSpPr>
+          <p:cNvPr id="32" name="Text 27"/>
+          <p:cNvSpPr/>
+          <p:nvPr/>
+        </p:nvSpPr>
+        <p:spPr>
+          <a:xfrm>
+            <a:off x="8211312" y="3511296"/>
+            <a:ext cx="2331720" cy="164592"/>
+          </a:xfrm>
+          <a:prstGeom prst="rect">
+            <a:avLst/>
+          </a:prstGeom>
+          <a:noFill/>
+          <a:ln/>
+        </p:spPr>
+        <p:txBody>
+          <a:bodyPr wrap="square" lIns="0" tIns="0" rIns="0" bIns="0" rtlCol="0" anchor="ctr"/>
+          <a:lstStyle/>
+          <a:p>
+            <a:pPr indent="0" marL="0">
+              <a:buNone/>
+            </a:pPr>
+            <a:r>
+              <a:rPr lang="en-US" sz="1080" b="1" dirty="0">
+                <a:solidFill>
+                  <a:srgbClr val="FFFFFF"/>
+                </a:solidFill>
+                <a:latin typeface="Arial" pitchFamily="34" charset="0"/>
+                <a:ea typeface="Arial" pitchFamily="34" charset="-122"/>
+                <a:cs typeface="Arial" pitchFamily="34" charset="-120"/>
+              </a:rPr>
+              <a:t>LeadReacher outreach</a:t>
+            </a:r>
+            <a:endParaRPr lang="en-US" sz="1080" dirty="0"/>
+          </a:p>
+        </p:txBody>
+      </p:sp>
+      <p:sp>
+        <p:nvSpPr>
+          <p:cNvPr id="33" name="Text 28"/>
+          <p:cNvSpPr/>
+          <p:nvPr/>
+        </p:nvSpPr>
+        <p:spPr>
+          <a:xfrm>
+            <a:off x="8211312" y="3858768"/>
+            <a:ext cx="2578608" cy="182880"/>
           </a:xfrm>
           <a:prstGeom prst="rect">
             <a:avLst/>
@@ -6201,38 +7326,194 @@
               <a:buNone/>
             </a:pPr>
             <a:r>
-              <a:rPr lang="en-US" sz="1050" dirty="0">
-                <a:solidFill>
-                  <a:srgbClr val="AEB2C2"/>
-                </a:solidFill>
-                <a:latin typeface="Aptos" pitchFamily="34" charset="0"/>
-                <a:ea typeface="Aptos" pitchFamily="34" charset="-122"/>
-                <a:cs typeface="Aptos" pitchFamily="34" charset="-120"/>
-              </a:rPr>
-              <a:t>Keep the customer history intact.</a:t>
-            </a:r>
-            <a:endParaRPr lang="en-US" sz="1050" dirty="0"/>
-          </a:p>
-        </p:txBody>
-      </p:sp>
-      <p:sp>
-        <p:nvSpPr>
-          <p:cNvPr id="11" name="Shape 8"/>
-          <p:cNvSpPr/>
-          <p:nvPr/>
-        </p:nvSpPr>
-        <p:spPr>
-          <a:xfrm>
-            <a:off x="3886200" y="4773168"/>
-            <a:ext cx="2578608" cy="0"/>
+              <a:rPr lang="en-US" sz="760" dirty="0">
+                <a:solidFill>
+                  <a:srgbClr val="B9BED1"/>
+                </a:solidFill>
+                <a:latin typeface="Arial" pitchFamily="34" charset="0"/>
+                <a:ea typeface="Arial" pitchFamily="34" charset="-122"/>
+                <a:cs typeface="Arial" pitchFamily="34" charset="-120"/>
+              </a:rPr>
+              <a:t>Smart Lists  •  Audiences  •  Campaigns  •  Reporting</a:t>
+            </a:r>
+            <a:endParaRPr lang="en-US" sz="760" dirty="0"/>
+          </a:p>
+        </p:txBody>
+      </p:sp>
+      <p:sp>
+        <p:nvSpPr>
+          <p:cNvPr id="34" name="Text 29"/>
+          <p:cNvSpPr/>
+          <p:nvPr/>
+        </p:nvSpPr>
+        <p:spPr>
+          <a:xfrm>
+            <a:off x="6510528" y="5047488"/>
+            <a:ext cx="731520" cy="109728"/>
+          </a:xfrm>
+          <a:prstGeom prst="rect">
+            <a:avLst/>
+          </a:prstGeom>
+          <a:noFill/>
+          <a:ln/>
+        </p:spPr>
+        <p:txBody>
+          <a:bodyPr wrap="square" lIns="0" tIns="0" rIns="0" bIns="0" rtlCol="0" anchor="ctr"/>
+          <a:lstStyle/>
+          <a:p>
+            <a:pPr indent="0" marL="0">
+              <a:buNone/>
+            </a:pPr>
+            <a:r>
+              <a:rPr lang="en-US" sz="720" b="1" spc="80" kern="0" dirty="0">
+                <a:solidFill>
+                  <a:srgbClr val="9F8BFF"/>
+                </a:solidFill>
+                <a:latin typeface="Arial" pitchFamily="34" charset="0"/>
+                <a:ea typeface="Arial" pitchFamily="34" charset="-122"/>
+                <a:cs typeface="Arial" pitchFamily="34" charset="-120"/>
+              </a:rPr>
+              <a:t>PATH 2</a:t>
+            </a:r>
+            <a:endParaRPr lang="en-US" sz="720" dirty="0"/>
+          </a:p>
+        </p:txBody>
+      </p:sp>
+      <p:sp>
+        <p:nvSpPr>
+          <p:cNvPr id="35" name="Text 30"/>
+          <p:cNvSpPr/>
+          <p:nvPr/>
+        </p:nvSpPr>
+        <p:spPr>
+          <a:xfrm>
+            <a:off x="7333488" y="4983480"/>
+            <a:ext cx="2971800" cy="201168"/>
+          </a:xfrm>
+          <a:prstGeom prst="rect">
+            <a:avLst/>
+          </a:prstGeom>
+          <a:noFill/>
+          <a:ln/>
+        </p:spPr>
+        <p:txBody>
+          <a:bodyPr wrap="square" lIns="0" tIns="0" rIns="0" bIns="0" rtlCol="0" anchor="ctr"/>
+          <a:lstStyle/>
+          <a:p>
+            <a:pPr indent="0" marL="0">
+              <a:buNone/>
+            </a:pPr>
+            <a:r>
+              <a:rPr lang="en-US" sz="1250" b="1" dirty="0">
+                <a:solidFill>
+                  <a:srgbClr val="FFFFFF"/>
+                </a:solidFill>
+                <a:latin typeface="Arial" pitchFamily="34" charset="0"/>
+                <a:ea typeface="Arial" pitchFamily="34" charset="-122"/>
+                <a:cs typeface="Arial" pitchFamily="34" charset="-120"/>
+              </a:rPr>
+              <a:t>Dedicated outreach module</a:t>
+            </a:r>
+            <a:endParaRPr lang="en-US" sz="1250" dirty="0"/>
+          </a:p>
+        </p:txBody>
+      </p:sp>
+      <p:sp>
+        <p:nvSpPr>
+          <p:cNvPr id="36" name="Text 31"/>
+          <p:cNvSpPr/>
+          <p:nvPr/>
+        </p:nvSpPr>
+        <p:spPr>
+          <a:xfrm>
+            <a:off x="6510528" y="5458968"/>
+            <a:ext cx="2377440" cy="146304"/>
+          </a:xfrm>
+          <a:prstGeom prst="rect">
+            <a:avLst/>
+          </a:prstGeom>
+          <a:noFill/>
+          <a:ln/>
+        </p:spPr>
+        <p:txBody>
+          <a:bodyPr wrap="square" lIns="0" tIns="0" rIns="0" bIns="0" rtlCol="0" anchor="ctr"/>
+          <a:lstStyle/>
+          <a:p>
+            <a:pPr indent="0" marL="0">
+              <a:buNone/>
+            </a:pPr>
+            <a:r>
+              <a:rPr lang="en-US" sz="850" dirty="0">
+                <a:solidFill>
+                  <a:srgbClr val="D6D9E5"/>
+                </a:solidFill>
+                <a:latin typeface="Arial" pitchFamily="34" charset="0"/>
+                <a:ea typeface="Arial" pitchFamily="34" charset="-122"/>
+                <a:cs typeface="Arial" pitchFamily="34" charset="-120"/>
+              </a:rPr>
+              <a:t>Full platform capability</a:t>
+            </a:r>
+            <a:endParaRPr lang="en-US" sz="850" dirty="0"/>
+          </a:p>
+        </p:txBody>
+      </p:sp>
+      <p:sp>
+        <p:nvSpPr>
+          <p:cNvPr id="37" name="Text 32"/>
+          <p:cNvSpPr/>
+          <p:nvPr/>
+        </p:nvSpPr>
+        <p:spPr>
+          <a:xfrm>
+            <a:off x="9601200" y="5458968"/>
+            <a:ext cx="1554480" cy="146304"/>
+          </a:xfrm>
+          <a:prstGeom prst="rect">
+            <a:avLst/>
+          </a:prstGeom>
+          <a:noFill/>
+          <a:ln/>
+        </p:spPr>
+        <p:txBody>
+          <a:bodyPr wrap="square" lIns="0" tIns="0" rIns="0" bIns="0" rtlCol="0" anchor="ctr"/>
+          <a:lstStyle/>
+          <a:p>
+            <a:pPr algn="r" indent="0" marL="0">
+              <a:buNone/>
+            </a:pPr>
+            <a:r>
+              <a:rPr lang="en-US" sz="850" b="1" dirty="0">
+                <a:solidFill>
+                  <a:srgbClr val="9F8BFF"/>
+                </a:solidFill>
+                <a:latin typeface="Arial" pitchFamily="34" charset="0"/>
+                <a:ea typeface="Arial" pitchFamily="34" charset="-122"/>
+                <a:cs typeface="Arial" pitchFamily="34" charset="-120"/>
+              </a:rPr>
+              <a:t>Enterprise fee</a:t>
+            </a:r>
+            <a:endParaRPr lang="en-US" sz="850" dirty="0"/>
+          </a:p>
+        </p:txBody>
+      </p:sp>
+      <p:sp>
+        <p:nvSpPr>
+          <p:cNvPr id="38" name="Shape 33"/>
+          <p:cNvSpPr/>
+          <p:nvPr/>
+        </p:nvSpPr>
+        <p:spPr>
+          <a:xfrm>
+            <a:off x="658368" y="6382512"/>
+            <a:ext cx="10835640" cy="0"/>
           </a:xfrm>
           <a:prstGeom prst="line">
             <a:avLst/>
           </a:prstGeom>
           <a:noFill/>
-          <a:ln w="12700">
+          <a:ln w="8255">
             <a:solidFill>
-              <a:srgbClr val="5F4BB5"/>
+              <a:srgbClr val="E6E2F2"/>
             </a:solidFill>
             <a:prstDash val="solid"/>
           </a:ln>
@@ -6240,14 +7521,14 @@
       </p:sp>
       <p:sp>
         <p:nvSpPr>
-          <p:cNvPr id="12" name="Text 9"/>
-          <p:cNvSpPr/>
-          <p:nvPr/>
-        </p:nvSpPr>
-        <p:spPr>
-          <a:xfrm>
-            <a:off x="3886200" y="5047488"/>
-            <a:ext cx="2578608" cy="256032"/>
+          <p:cNvPr id="39" name="Text 34"/>
+          <p:cNvSpPr/>
+          <p:nvPr/>
+        </p:nvSpPr>
+        <p:spPr>
+          <a:xfrm>
+            <a:off x="658368" y="6464808"/>
+            <a:ext cx="5029200" cy="118872"/>
           </a:xfrm>
           <a:prstGeom prst="rect">
             <a:avLst/>
@@ -6263,30 +7544,286 @@
               <a:buNone/>
             </a:pPr>
             <a:r>
-              <a:rPr lang="en-US" sz="1600" b="1" dirty="0">
-                <a:solidFill>
-                  <a:srgbClr val="FFFFFF"/>
-                </a:solidFill>
-                <a:latin typeface="Aptos Display" pitchFamily="34" charset="0"/>
-                <a:ea typeface="Aptos Display" pitchFamily="34" charset="-122"/>
-                <a:cs typeface="Aptos Display" pitchFamily="34" charset="-120"/>
-              </a:rPr>
-              <a:t>Faster action</a:t>
-            </a:r>
-            <a:endParaRPr lang="en-US" sz="1600" dirty="0"/>
-          </a:p>
-        </p:txBody>
-      </p:sp>
-      <p:sp>
-        <p:nvSpPr>
-          <p:cNvPr id="13" name="Text 10"/>
-          <p:cNvSpPr/>
-          <p:nvPr/>
-        </p:nvSpPr>
-        <p:spPr>
-          <a:xfrm>
-            <a:off x="3886200" y="5449824"/>
-            <a:ext cx="2578608" cy="475488"/>
+              <a:rPr lang="en-US" sz="750" dirty="0">
+                <a:solidFill>
+                  <a:srgbClr val="8A8FA0"/>
+                </a:solidFill>
+                <a:latin typeface="Arial" pitchFamily="34" charset="0"/>
+                <a:ea typeface="Arial" pitchFamily="34" charset="-122"/>
+                <a:cs typeface="Arial" pitchFamily="34" charset="-120"/>
+              </a:rPr>
+              <a:t>LeadReacher + Statflo | commercial paths</a:t>
+            </a:r>
+            <a:endParaRPr lang="en-US" sz="750" dirty="0"/>
+          </a:p>
+        </p:txBody>
+      </p:sp>
+      <p:sp>
+        <p:nvSpPr>
+          <p:cNvPr id="25" name="Slide Number Placeholder 0"/>
+          <p:cNvSpPr>
+            <a:spLocks noGrp="1"/>
+          </p:cNvSpPr>
+          <p:nvPr>
+            <p:ph type="sldNum" sz="quarter" idx="4294967295"/>
+          </p:nvPr>
+        </p:nvSpPr>
+        <p:spPr>
+          <a:xfrm>
+            <a:off x="11475720" y="6492240"/>
+            <a:ext cx="228600" cy="146304"/>
+          </a:xfrm>
+          <a:prstGeom prst="rect">
+            <a:avLst/>
+          </a:prstGeom>
+          <a:extLst>
+            <a:ext uri="{C572A759-6A51-4108-AA02-DFA0A04FC94B}">
+              <ma14:wrappingTextBoxFlag xmlns:ma14="http://schemas.microsoft.com/office/mac/drawingml/2011/main" val="0"/>
+            </a:ext>
+          </a:extLst>
+        </p:spPr>
+        <p:txBody>
+          <a:bodyPr lIns="0" tIns="0" rIns="0" bIns="0"/>
+          <a:lstStyle>
+            <a:lvl1pPr>
+              <a:defRPr sz="800">
+                <a:solidFill>
+                  <a:srgbClr val="85899A"/>
+                </a:solidFill>
+                <a:latin typeface="Aptos"/>
+                <a:ea typeface="Aptos"/>
+                <a:cs typeface="Aptos"/>
+              </a:defRPr>
+            </a:lvl1pPr>
+          </a:lstStyle>
+          <a:p>
+            <a:pPr algn="r"/>
+            <a:fld id="{F7021451-1387-4CA6-816F-3879F97B5CBC}" type="slidenum">
+              <a:rPr b="0" lang="en-US"/>
+              <a:t>5</a:t>
+            </a:fld>
+            <a:endParaRPr lang="en-US"/>
+          </a:p>
+        </p:txBody>
+      </p:sp>
+    </p:spTree>
+  </p:cSld>
+  <p:clrMapOvr>
+    <a:masterClrMapping/>
+  </p:clrMapOvr>
+</p:sld>
+</file>
+
+<file path=ppt/slides/slide6.xml><?xml version="1.0" encoding="utf-8"?>
+<p:sld xmlns:a="http://schemas.openxmlformats.org/drawingml/2006/main" xmlns:r="http://schemas.openxmlformats.org/officeDocument/2006/relationships" xmlns:p="http://schemas.openxmlformats.org/presentationml/2006/main">
+  <p:cSld name="Slide 6">
+    <p:spTree>
+      <p:nvGrpSpPr>
+        <p:cNvPr id="1" name=""/>
+        <p:cNvGrpSpPr/>
+        <p:nvPr/>
+      </p:nvGrpSpPr>
+      <p:grpSpPr>
+        <a:xfrm>
+          <a:off x="0" y="0"/>
+          <a:ext cx="0" cy="0"/>
+          <a:chOff x="0" y="0"/>
+          <a:chExt cx="0" cy="0"/>
+        </a:xfrm>
+      </p:grpSpPr>
+      <p:sp>
+        <p:nvSpPr>
+          <p:cNvPr id="2" name="Shape 0"/>
+          <p:cNvSpPr/>
+          <p:nvPr/>
+        </p:nvSpPr>
+        <p:spPr>
+          <a:xfrm>
+            <a:off x="256032" y="182880"/>
+            <a:ext cx="11676888" cy="512064"/>
+          </a:xfrm>
+          <a:prstGeom prst="roundRect">
+            <a:avLst>
+              <a:gd name="adj" fmla="val 21429"/>
+            </a:avLst>
+          </a:prstGeom>
+          <a:solidFill>
+            <a:srgbClr val="FFFFFF">
+              <a:alpha val="97000"/>
+            </a:srgbClr>
+          </a:solidFill>
+          <a:ln w="8890">
+            <a:solidFill>
+              <a:srgbClr val="E6E2F2"/>
+            </a:solidFill>
+            <a:prstDash val="solid"/>
+          </a:ln>
+          <a:effectLst>
+            <a:outerShdw sx="100000" sy="100000" kx="0" ky="0" algn="bl" rotWithShape="0" blurRad="3.8433669984288512e+90" dist="7.6867339968577025e+90" dir="5.9229766729020215e+106">
+              <a:srgbClr val="CFC7E8">
+                <a:alpha val="1.5999999999999996e+109"/>
+              </a:srgbClr>
+            </a:outerShdw>
+          </a:effectLst>
+        </p:spPr>
+      </p:sp>
+      <p:pic>
+        <p:nvPicPr>
+          <p:cNvPr id="3" name="Image 0" descr="/Users/nicol/Desktop/PROJECTS/leadreacher/apps/web/public/logo/leadreacher_logo_colored_transparent.svg">    </p:cNvPr>
+          <p:cNvPicPr>
+            <a:picLocks noChangeAspect="1"/>
+          </p:cNvPicPr>
+          <p:nvPr/>
+        </p:nvPicPr>
+        <p:blipFill>
+          <a:blip r:embed="rId1">
+            <a:extLst>
+              <a:ext uri="{96DAC541-7B7A-43D3-8B79-37D633B846F1}">
+                <asvg:svgBlip xmlns:asvg="http://schemas.microsoft.com/office/drawing/2016/SVG/main" r:embed="rId2"/>
+              </a:ext>
+            </a:extLst>
+          </a:blip>
+          <a:stretch>
+            <a:fillRect/>
+          </a:stretch>
+        </p:blipFill>
+        <p:spPr>
+          <a:xfrm>
+            <a:off x="475488" y="310896"/>
+            <a:ext cx="2240280" cy="192024"/>
+          </a:xfrm>
+          <a:prstGeom prst="rect">
+            <a:avLst/>
+          </a:prstGeom>
+        </p:spPr>
+      </p:pic>
+      <p:sp>
+        <p:nvSpPr>
+          <p:cNvPr id="4" name="Text 1"/>
+          <p:cNvSpPr/>
+          <p:nvPr/>
+        </p:nvSpPr>
+        <p:spPr>
+          <a:xfrm>
+            <a:off x="9464040" y="338328"/>
+            <a:ext cx="2148840" cy="128016"/>
+          </a:xfrm>
+          <a:prstGeom prst="rect">
+            <a:avLst/>
+          </a:prstGeom>
+          <a:noFill/>
+          <a:ln/>
+        </p:spPr>
+        <p:txBody>
+          <a:bodyPr wrap="square" lIns="0" tIns="0" rIns="0" bIns="0" rtlCol="0" anchor="ctr"/>
+          <a:lstStyle/>
+          <a:p>
+            <a:pPr algn="r" indent="0" marL="0">
+              <a:buNone/>
+            </a:pPr>
+            <a:r>
+              <a:rPr lang="en-US" sz="850" b="1" spc="170" kern="0" dirty="0">
+                <a:solidFill>
+                  <a:srgbClr val="5A32ED"/>
+                </a:solidFill>
+                <a:latin typeface="Arial" pitchFamily="34" charset="0"/>
+                <a:ea typeface="Arial" pitchFamily="34" charset="-122"/>
+                <a:cs typeface="Arial" pitchFamily="34" charset="-120"/>
+              </a:rPr>
+              <a:t>05 | NEXT STEP</a:t>
+            </a:r>
+            <a:endParaRPr lang="en-US" sz="850" dirty="0"/>
+          </a:p>
+        </p:txBody>
+      </p:sp>
+      <p:sp>
+        <p:nvSpPr>
+          <p:cNvPr id="5" name="Text 2"/>
+          <p:cNvSpPr/>
+          <p:nvPr/>
+        </p:nvSpPr>
+        <p:spPr>
+          <a:xfrm>
+            <a:off x="658368" y="941832"/>
+            <a:ext cx="3108960" cy="164592"/>
+          </a:xfrm>
+          <a:prstGeom prst="rect">
+            <a:avLst/>
+          </a:prstGeom>
+          <a:noFill/>
+          <a:ln/>
+        </p:spPr>
+        <p:txBody>
+          <a:bodyPr wrap="square" lIns="0" tIns="0" rIns="0" bIns="0" rtlCol="0" anchor="ctr"/>
+          <a:lstStyle/>
+          <a:p>
+            <a:pPr indent="0" marL="0">
+              <a:buNone/>
+            </a:pPr>
+            <a:r>
+              <a:rPr lang="en-US" sz="900" b="1" spc="200" kern="0" dirty="0">
+                <a:solidFill>
+                  <a:srgbClr val="5A32ED"/>
+                </a:solidFill>
+                <a:latin typeface="Arial" pitchFamily="34" charset="0"/>
+                <a:ea typeface="Arial" pitchFamily="34" charset="-122"/>
+                <a:cs typeface="Arial" pitchFamily="34" charset="-120"/>
+              </a:rPr>
+              <a:t>THE DECISION</a:t>
+            </a:r>
+            <a:endParaRPr lang="en-US" sz="900" dirty="0"/>
+          </a:p>
+        </p:txBody>
+      </p:sp>
+      <p:sp>
+        <p:nvSpPr>
+          <p:cNvPr id="6" name="Text 3"/>
+          <p:cNvSpPr/>
+          <p:nvPr/>
+        </p:nvSpPr>
+        <p:spPr>
+          <a:xfrm>
+            <a:off x="658368" y="1188720"/>
+            <a:ext cx="6583680" cy="457200"/>
+          </a:xfrm>
+          <a:prstGeom prst="rect">
+            <a:avLst/>
+          </a:prstGeom>
+          <a:noFill/>
+          <a:ln/>
+        </p:spPr>
+        <p:txBody>
+          <a:bodyPr wrap="square" lIns="0" tIns="0" rIns="0" bIns="0" rtlCol="0" anchor="ctr"/>
+          <a:lstStyle/>
+          <a:p>
+            <a:pPr indent="0" marL="0">
+              <a:buNone/>
+            </a:pPr>
+            <a:r>
+              <a:rPr lang="en-US" sz="2600" b="1" dirty="0">
+                <a:solidFill>
+                  <a:srgbClr val="101426"/>
+                </a:solidFill>
+                <a:latin typeface="Arial" pitchFamily="34" charset="0"/>
+                <a:ea typeface="Arial" pitchFamily="34" charset="-122"/>
+                <a:cs typeface="Arial" pitchFamily="34" charset="-120"/>
+              </a:rPr>
+              <a:t>Agree on one pilot and three inputs.</a:t>
+            </a:r>
+            <a:endParaRPr lang="en-US" sz="2600" dirty="0"/>
+          </a:p>
+        </p:txBody>
+      </p:sp>
+      <p:sp>
+        <p:nvSpPr>
+          <p:cNvPr id="7" name="Text 4"/>
+          <p:cNvSpPr/>
+          <p:nvPr/>
+        </p:nvSpPr>
+        <p:spPr>
+          <a:xfrm>
+            <a:off x="7772400" y="1234440"/>
+            <a:ext cx="3401568" cy="329184"/>
           </a:xfrm>
           <a:prstGeom prst="rect">
             <a:avLst/>
@@ -6304,53 +7841,62 @@
               <a:buNone/>
             </a:pPr>
             <a:r>
-              <a:rPr lang="en-US" sz="1050" dirty="0">
-                <a:solidFill>
-                  <a:srgbClr val="AEB2C2"/>
-                </a:solidFill>
-                <a:latin typeface="Aptos" pitchFamily="34" charset="0"/>
-                <a:ea typeface="Aptos" pitchFamily="34" charset="-122"/>
-                <a:cs typeface="Aptos" pitchFamily="34" charset="-120"/>
-              </a:rPr>
-              <a:t>Move from reply to follow-up sooner.</a:t>
-            </a:r>
-            <a:endParaRPr lang="en-US" sz="1050" dirty="0"/>
-          </a:p>
-        </p:txBody>
-      </p:sp>
-      <p:sp>
-        <p:nvSpPr>
-          <p:cNvPr id="14" name="Shape 11"/>
-          <p:cNvSpPr/>
-          <p:nvPr/>
-        </p:nvSpPr>
-        <p:spPr>
-          <a:xfrm>
-            <a:off x="7022592" y="4773168"/>
-            <a:ext cx="2578608" cy="0"/>
-          </a:xfrm>
-          <a:prstGeom prst="line">
-            <a:avLst/>
-          </a:prstGeom>
-          <a:noFill/>
+              <a:rPr lang="en-US" sz="1080" dirty="0">
+                <a:solidFill>
+                  <a:srgbClr val="646A7E"/>
+                </a:solidFill>
+                <a:latin typeface="Arial" pitchFamily="34" charset="0"/>
+                <a:ea typeface="Arial" pitchFamily="34" charset="-122"/>
+                <a:cs typeface="Arial" pitchFamily="34" charset="-120"/>
+              </a:rPr>
+              <a:t>The goal is to validate commercial value before committing to a deeper integration.</a:t>
+            </a:r>
+            <a:endParaRPr lang="en-US" sz="1080" dirty="0"/>
+          </a:p>
+        </p:txBody>
+      </p:sp>
+      <p:sp>
+        <p:nvSpPr>
+          <p:cNvPr id="8" name="Shape 5"/>
+          <p:cNvSpPr/>
+          <p:nvPr/>
+        </p:nvSpPr>
+        <p:spPr>
+          <a:xfrm>
+            <a:off x="822960" y="1993392"/>
+            <a:ext cx="3154680" cy="3154680"/>
+          </a:xfrm>
+          <a:prstGeom prst="ellipse">
+            <a:avLst/>
+          </a:prstGeom>
+          <a:solidFill>
+            <a:srgbClr val="050A1F"/>
+          </a:solidFill>
           <a:ln w="12700">
             <a:solidFill>
-              <a:srgbClr val="5F4BB5"/>
+              <a:srgbClr val="050A1F"/>
             </a:solidFill>
             <a:prstDash val="solid"/>
           </a:ln>
-        </p:spPr>
-      </p:sp>
-      <p:sp>
-        <p:nvSpPr>
-          <p:cNvPr id="15" name="Text 12"/>
-          <p:cNvSpPr/>
-          <p:nvPr/>
-        </p:nvSpPr>
-        <p:spPr>
-          <a:xfrm>
-            <a:off x="7022592" y="5047488"/>
-            <a:ext cx="2578608" cy="256032"/>
+          <a:effectLst>
+            <a:outerShdw sx="100000" sy="100000" kx="0" ky="0" algn="bl" rotWithShape="0" blurRad="4.8810760880046414e+94" dist="9.762152176009283e+94" dir="3.553786003741213e+111">
+              <a:srgbClr val="CFC7E8">
+                <a:alpha val="1.5999999999999998e+114"/>
+              </a:srgbClr>
+            </a:outerShdw>
+          </a:effectLst>
+        </p:spPr>
+      </p:sp>
+      <p:sp>
+        <p:nvSpPr>
+          <p:cNvPr id="9" name="Text 6"/>
+          <p:cNvSpPr/>
+          <p:nvPr/>
+        </p:nvSpPr>
+        <p:spPr>
+          <a:xfrm>
+            <a:off x="1143000" y="2596896"/>
+            <a:ext cx="2514600" cy="768096"/>
           </a:xfrm>
           <a:prstGeom prst="rect">
             <a:avLst/>
@@ -6362,34 +7908,73 @@
           <a:bodyPr wrap="square" lIns="0" tIns="0" rIns="0" bIns="0" rtlCol="0" anchor="ctr"/>
           <a:lstStyle/>
           <a:p>
-            <a:pPr indent="0" marL="0">
-              <a:buNone/>
-            </a:pPr>
-            <a:r>
-              <a:rPr lang="en-US" sz="1600" b="1" dirty="0">
+            <a:pPr algn="ctr" indent="0" marL="0">
+              <a:buNone/>
+            </a:pPr>
+            <a:r>
+              <a:rPr lang="en-US" sz="5100" b="1" dirty="0">
                 <a:solidFill>
                   <a:srgbClr val="FFFFFF"/>
                 </a:solidFill>
-                <a:latin typeface="Aptos Display" pitchFamily="34" charset="0"/>
-                <a:ea typeface="Aptos Display" pitchFamily="34" charset="-122"/>
-                <a:cs typeface="Aptos Display" pitchFamily="34" charset="-120"/>
-              </a:rPr>
-              <a:t>Clearer reporting</a:t>
-            </a:r>
-            <a:endParaRPr lang="en-US" sz="1600" dirty="0"/>
-          </a:p>
-        </p:txBody>
-      </p:sp>
-      <p:sp>
-        <p:nvSpPr>
-          <p:cNvPr id="16" name="Text 13"/>
-          <p:cNvSpPr/>
-          <p:nvPr/>
-        </p:nvSpPr>
-        <p:spPr>
-          <a:xfrm>
-            <a:off x="7022592" y="5449824"/>
-            <a:ext cx="2578608" cy="475488"/>
+                <a:latin typeface="Arial" pitchFamily="34" charset="0"/>
+                <a:ea typeface="Arial" pitchFamily="34" charset="-122"/>
+                <a:cs typeface="Arial" pitchFamily="34" charset="-120"/>
+              </a:rPr>
+              <a:t>30</a:t>
+            </a:r>
+            <a:endParaRPr lang="en-US" sz="5100" dirty="0"/>
+          </a:p>
+        </p:txBody>
+      </p:sp>
+      <p:sp>
+        <p:nvSpPr>
+          <p:cNvPr id="10" name="Text 7"/>
+          <p:cNvSpPr/>
+          <p:nvPr/>
+        </p:nvSpPr>
+        <p:spPr>
+          <a:xfrm>
+            <a:off x="1143000" y="3493008"/>
+            <a:ext cx="2514600" cy="155448"/>
+          </a:xfrm>
+          <a:prstGeom prst="rect">
+            <a:avLst/>
+          </a:prstGeom>
+          <a:noFill/>
+          <a:ln/>
+        </p:spPr>
+        <p:txBody>
+          <a:bodyPr wrap="square" lIns="0" tIns="0" rIns="0" bIns="0" rtlCol="0" anchor="ctr"/>
+          <a:lstStyle/>
+          <a:p>
+            <a:pPr algn="ctr" indent="0" marL="0">
+              <a:buNone/>
+            </a:pPr>
+            <a:r>
+              <a:rPr lang="en-US" sz="920" b="1" spc="120" kern="0" dirty="0">
+                <a:solidFill>
+                  <a:srgbClr val="9F8BFF"/>
+                </a:solidFill>
+                <a:latin typeface="Arial" pitchFamily="34" charset="0"/>
+                <a:ea typeface="Arial" pitchFamily="34" charset="-122"/>
+                <a:cs typeface="Arial" pitchFamily="34" charset="-120"/>
+              </a:rPr>
+              <a:t>DAY PILOT</a:t>
+            </a:r>
+            <a:endParaRPr lang="en-US" sz="920" dirty="0"/>
+          </a:p>
+        </p:txBody>
+      </p:sp>
+      <p:sp>
+        <p:nvSpPr>
+          <p:cNvPr id="11" name="Text 8"/>
+          <p:cNvSpPr/>
+          <p:nvPr/>
+        </p:nvSpPr>
+        <p:spPr>
+          <a:xfrm>
+            <a:off x="1225296" y="3968496"/>
+            <a:ext cx="2359152" cy="384048"/>
           </a:xfrm>
           <a:prstGeom prst="rect">
             <a:avLst/>
@@ -6403,23 +7988,196 @@
           </a:bodyPr>
           <a:lstStyle/>
           <a:p>
+            <a:pPr algn="ctr" indent="0" marL="0">
+              <a:buNone/>
+            </a:pPr>
+            <a:r>
+              <a:rPr lang="en-US" sz="1050" dirty="0">
+                <a:solidFill>
+                  <a:srgbClr val="D6D9E5"/>
+                </a:solidFill>
+                <a:latin typeface="Arial" pitchFamily="34" charset="0"/>
+                <a:ea typeface="Arial" pitchFamily="34" charset="-122"/>
+                <a:cs typeface="Arial" pitchFamily="34" charset="-120"/>
+              </a:rPr>
+              <a:t>One audience. One use case. Shared measurement.</a:t>
+            </a:r>
+            <a:endParaRPr lang="en-US" sz="1050" dirty="0"/>
+          </a:p>
+        </p:txBody>
+      </p:sp>
+      <p:sp>
+        <p:nvSpPr>
+          <p:cNvPr id="12" name="Shape 9"/>
+          <p:cNvSpPr/>
+          <p:nvPr/>
+        </p:nvSpPr>
+        <p:spPr>
+          <a:xfrm>
+            <a:off x="4572000" y="1993392"/>
+            <a:ext cx="6903720" cy="932688"/>
+          </a:xfrm>
+          <a:prstGeom prst="roundRect">
+            <a:avLst>
+              <a:gd name="adj" fmla="val 8824"/>
+            </a:avLst>
+          </a:prstGeom>
+          <a:solidFill>
+            <a:srgbClr val="FFFFFF"/>
+          </a:solidFill>
+          <a:ln w="9525">
+            <a:solidFill>
+              <a:srgbClr val="D7CCFF"/>
+            </a:solidFill>
+            <a:prstDash val="solid"/>
+          </a:ln>
+        </p:spPr>
+      </p:sp>
+      <p:sp>
+        <p:nvSpPr>
+          <p:cNvPr id="13" name="Text 10"/>
+          <p:cNvSpPr/>
+          <p:nvPr/>
+        </p:nvSpPr>
+        <p:spPr>
+          <a:xfrm>
+            <a:off x="4846320" y="2322576"/>
+            <a:ext cx="411480" cy="118872"/>
+          </a:xfrm>
+          <a:prstGeom prst="rect">
+            <a:avLst/>
+          </a:prstGeom>
+          <a:noFill/>
+          <a:ln/>
+        </p:spPr>
+        <p:txBody>
+          <a:bodyPr wrap="square" lIns="0" tIns="0" rIns="0" bIns="0" rtlCol="0" anchor="ctr"/>
+          <a:lstStyle/>
+          <a:p>
             <a:pPr indent="0" marL="0">
               <a:buNone/>
             </a:pPr>
             <a:r>
-              <a:rPr lang="en-US" sz="1050" dirty="0">
-                <a:solidFill>
-                  <a:srgbClr val="AEB2C2"/>
-                </a:solidFill>
-                <a:latin typeface="Aptos" pitchFamily="34" charset="0"/>
-                <a:ea typeface="Aptos" pitchFamily="34" charset="-122"/>
-                <a:cs typeface="Aptos" pitchFamily="34" charset="-120"/>
-              </a:rPr>
-              <a:t>See outreach impact through the pipeline.</a:t>
-            </a:r>
-            <a:endParaRPr lang="en-US" sz="1050" dirty="0"/>
-          </a:p>
-        </p:txBody>
+              <a:rPr lang="en-US" sz="800" b="1" dirty="0">
+                <a:solidFill>
+                  <a:srgbClr val="5A32ED"/>
+                </a:solidFill>
+                <a:latin typeface="Arial" pitchFamily="34" charset="0"/>
+                <a:ea typeface="Arial" pitchFamily="34" charset="-122"/>
+                <a:cs typeface="Arial" pitchFamily="34" charset="-120"/>
+              </a:rPr>
+              <a:t>01</a:t>
+            </a:r>
+            <a:endParaRPr lang="en-US" sz="800" dirty="0"/>
+          </a:p>
+        </p:txBody>
+      </p:sp>
+      <p:sp>
+        <p:nvSpPr>
+          <p:cNvPr id="14" name="Text 11"/>
+          <p:cNvSpPr/>
+          <p:nvPr/>
+        </p:nvSpPr>
+        <p:spPr>
+          <a:xfrm>
+            <a:off x="5413248" y="2276856"/>
+            <a:ext cx="1170432" cy="146304"/>
+          </a:xfrm>
+          <a:prstGeom prst="rect">
+            <a:avLst/>
+          </a:prstGeom>
+          <a:noFill/>
+          <a:ln/>
+        </p:spPr>
+        <p:txBody>
+          <a:bodyPr wrap="square" lIns="0" tIns="0" rIns="0" bIns="0" rtlCol="0" anchor="ctr"/>
+          <a:lstStyle/>
+          <a:p>
+            <a:pPr indent="0" marL="0">
+              <a:buNone/>
+            </a:pPr>
+            <a:r>
+              <a:rPr lang="en-US" sz="1000" b="1" spc="50" kern="0" dirty="0">
+                <a:solidFill>
+                  <a:srgbClr val="101426"/>
+                </a:solidFill>
+                <a:latin typeface="Arial" pitchFamily="34" charset="0"/>
+                <a:ea typeface="Arial" pitchFamily="34" charset="-122"/>
+                <a:cs typeface="Arial" pitchFamily="34" charset="-120"/>
+              </a:rPr>
+              <a:t>AUDIENCE</a:t>
+            </a:r>
+            <a:endParaRPr lang="en-US" sz="1000" dirty="0"/>
+          </a:p>
+        </p:txBody>
+      </p:sp>
+      <p:sp>
+        <p:nvSpPr>
+          <p:cNvPr id="15" name="Text 12"/>
+          <p:cNvSpPr/>
+          <p:nvPr/>
+        </p:nvSpPr>
+        <p:spPr>
+          <a:xfrm>
+            <a:off x="6784848" y="2240280"/>
+            <a:ext cx="4251960" cy="256032"/>
+          </a:xfrm>
+          <a:prstGeom prst="rect">
+            <a:avLst/>
+          </a:prstGeom>
+          <a:noFill/>
+          <a:ln/>
+        </p:spPr>
+        <p:txBody>
+          <a:bodyPr wrap="square" lIns="0" tIns="0" rIns="0" bIns="0" rtlCol="0" anchor="ctr">
+            <a:normAutofit/>
+          </a:bodyPr>
+          <a:lstStyle/>
+          <a:p>
+            <a:pPr indent="0" marL="0">
+              <a:buNone/>
+            </a:pPr>
+            <a:r>
+              <a:rPr lang="en-US" sz="950" dirty="0">
+                <a:solidFill>
+                  <a:srgbClr val="646A7E"/>
+                </a:solidFill>
+                <a:latin typeface="Arial" pitchFamily="34" charset="0"/>
+                <a:ea typeface="Arial" pitchFamily="34" charset="-122"/>
+                <a:cs typeface="Arial" pitchFamily="34" charset="-120"/>
+              </a:rPr>
+              <a:t>Choose the first approved Smart List and use case.</a:t>
+            </a:r>
+            <a:endParaRPr lang="en-US" sz="950" dirty="0"/>
+          </a:p>
+        </p:txBody>
+      </p:sp>
+      <p:sp>
+        <p:nvSpPr>
+          <p:cNvPr id="16" name="Shape 13"/>
+          <p:cNvSpPr/>
+          <p:nvPr/>
+        </p:nvSpPr>
+        <p:spPr>
+          <a:xfrm>
+            <a:off x="4572000" y="3163824"/>
+            <a:ext cx="6903720" cy="932688"/>
+          </a:xfrm>
+          <a:prstGeom prst="roundRect">
+            <a:avLst>
+              <a:gd name="adj" fmla="val 8824"/>
+            </a:avLst>
+          </a:prstGeom>
+          <a:solidFill>
+            <a:srgbClr val="F7F5FF"/>
+          </a:solidFill>
+          <a:ln w="9525">
+            <a:solidFill>
+              <a:srgbClr val="D7CCFF"/>
+            </a:solidFill>
+            <a:prstDash val="solid"/>
+          </a:ln>
+        </p:spPr>
       </p:sp>
       <p:sp>
         <p:nvSpPr>
@@ -6429,8 +8187,8 @@
         </p:nvSpPr>
         <p:spPr>
           <a:xfrm>
-            <a:off x="9537192" y="6144768"/>
-            <a:ext cx="1920240" cy="164592"/>
+            <a:off x="4846320" y="3493008"/>
+            <a:ext cx="411480" cy="118872"/>
           </a:xfrm>
           <a:prstGeom prst="rect">
             <a:avLst/>
@@ -6442,21 +8200,396 @@
           <a:bodyPr wrap="square" lIns="0" tIns="0" rIns="0" bIns="0" rtlCol="0" anchor="ctr"/>
           <a:lstStyle/>
           <a:p>
-            <a:pPr algn="r" indent="0" marL="0">
-              <a:buNone/>
-            </a:pPr>
-            <a:r>
-              <a:rPr lang="en-US" sz="900" b="1" dirty="0">
-                <a:solidFill>
-                  <a:srgbClr val="BCAEFF"/>
-                </a:solidFill>
-                <a:latin typeface="Aptos" pitchFamily="34" charset="0"/>
-                <a:ea typeface="Aptos" pitchFamily="34" charset="-122"/>
-                <a:cs typeface="Aptos" pitchFamily="34" charset="-120"/>
-              </a:rPr>
-              <a:t>leadreacher.com</a:t>
+            <a:pPr indent="0" marL="0">
+              <a:buNone/>
+            </a:pPr>
+            <a:r>
+              <a:rPr lang="en-US" sz="800" b="1" dirty="0">
+                <a:solidFill>
+                  <a:srgbClr val="5A32ED"/>
+                </a:solidFill>
+                <a:latin typeface="Arial" pitchFamily="34" charset="0"/>
+                <a:ea typeface="Arial" pitchFamily="34" charset="-122"/>
+                <a:cs typeface="Arial" pitchFamily="34" charset="-120"/>
+              </a:rPr>
+              <a:t>02</a:t>
+            </a:r>
+            <a:endParaRPr lang="en-US" sz="800" dirty="0"/>
+          </a:p>
+        </p:txBody>
+      </p:sp>
+      <p:sp>
+        <p:nvSpPr>
+          <p:cNvPr id="18" name="Text 15"/>
+          <p:cNvSpPr/>
+          <p:nvPr/>
+        </p:nvSpPr>
+        <p:spPr>
+          <a:xfrm>
+            <a:off x="5413248" y="3447288"/>
+            <a:ext cx="1170432" cy="146304"/>
+          </a:xfrm>
+          <a:prstGeom prst="rect">
+            <a:avLst/>
+          </a:prstGeom>
+          <a:noFill/>
+          <a:ln/>
+        </p:spPr>
+        <p:txBody>
+          <a:bodyPr wrap="square" lIns="0" tIns="0" rIns="0" bIns="0" rtlCol="0" anchor="ctr"/>
+          <a:lstStyle/>
+          <a:p>
+            <a:pPr indent="0" marL="0">
+              <a:buNone/>
+            </a:pPr>
+            <a:r>
+              <a:rPr lang="en-US" sz="1000" b="1" spc="50" kern="0" dirty="0">
+                <a:solidFill>
+                  <a:srgbClr val="101426"/>
+                </a:solidFill>
+                <a:latin typeface="Arial" pitchFamily="34" charset="0"/>
+                <a:ea typeface="Arial" pitchFamily="34" charset="-122"/>
+                <a:cs typeface="Arial" pitchFamily="34" charset="-120"/>
+              </a:rPr>
+              <a:t>ACCESS</a:t>
+            </a:r>
+            <a:endParaRPr lang="en-US" sz="1000" dirty="0"/>
+          </a:p>
+        </p:txBody>
+      </p:sp>
+      <p:sp>
+        <p:nvSpPr>
+          <p:cNvPr id="19" name="Text 16"/>
+          <p:cNvSpPr/>
+          <p:nvPr/>
+        </p:nvSpPr>
+        <p:spPr>
+          <a:xfrm>
+            <a:off x="6784848" y="3410712"/>
+            <a:ext cx="4251960" cy="256032"/>
+          </a:xfrm>
+          <a:prstGeom prst="rect">
+            <a:avLst/>
+          </a:prstGeom>
+          <a:noFill/>
+          <a:ln/>
+        </p:spPr>
+        <p:txBody>
+          <a:bodyPr wrap="square" lIns="0" tIns="0" rIns="0" bIns="0" rtlCol="0" anchor="ctr">
+            <a:normAutofit/>
+          </a:bodyPr>
+          <a:lstStyle/>
+          <a:p>
+            <a:pPr indent="0" marL="0">
+              <a:buNone/>
+            </a:pPr>
+            <a:r>
+              <a:rPr lang="en-US" sz="950" dirty="0">
+                <a:solidFill>
+                  <a:srgbClr val="646A7E"/>
+                </a:solidFill>
+                <a:latin typeface="Arial" pitchFamily="34" charset="0"/>
+                <a:ea typeface="Arial" pitchFamily="34" charset="-122"/>
+                <a:cs typeface="Arial" pitchFamily="34" charset="-120"/>
+              </a:rPr>
+              <a:t>Confirm API support, sandbox access and fallback options.</a:t>
+            </a:r>
+            <a:endParaRPr lang="en-US" sz="950" dirty="0"/>
+          </a:p>
+        </p:txBody>
+      </p:sp>
+      <p:sp>
+        <p:nvSpPr>
+          <p:cNvPr id="20" name="Shape 17"/>
+          <p:cNvSpPr/>
+          <p:nvPr/>
+        </p:nvSpPr>
+        <p:spPr>
+          <a:xfrm>
+            <a:off x="4572000" y="4334256"/>
+            <a:ext cx="6903720" cy="932688"/>
+          </a:xfrm>
+          <a:prstGeom prst="roundRect">
+            <a:avLst>
+              <a:gd name="adj" fmla="val 8824"/>
+            </a:avLst>
+          </a:prstGeom>
+          <a:solidFill>
+            <a:srgbClr val="FFFFFF"/>
+          </a:solidFill>
+          <a:ln w="9525">
+            <a:solidFill>
+              <a:srgbClr val="D7CCFF"/>
+            </a:solidFill>
+            <a:prstDash val="solid"/>
+          </a:ln>
+        </p:spPr>
+      </p:sp>
+      <p:sp>
+        <p:nvSpPr>
+          <p:cNvPr id="21" name="Text 18"/>
+          <p:cNvSpPr/>
+          <p:nvPr/>
+        </p:nvSpPr>
+        <p:spPr>
+          <a:xfrm>
+            <a:off x="4846320" y="4663440"/>
+            <a:ext cx="411480" cy="118872"/>
+          </a:xfrm>
+          <a:prstGeom prst="rect">
+            <a:avLst/>
+          </a:prstGeom>
+          <a:noFill/>
+          <a:ln/>
+        </p:spPr>
+        <p:txBody>
+          <a:bodyPr wrap="square" lIns="0" tIns="0" rIns="0" bIns="0" rtlCol="0" anchor="ctr"/>
+          <a:lstStyle/>
+          <a:p>
+            <a:pPr indent="0" marL="0">
+              <a:buNone/>
+            </a:pPr>
+            <a:r>
+              <a:rPr lang="en-US" sz="800" b="1" dirty="0">
+                <a:solidFill>
+                  <a:srgbClr val="5A32ED"/>
+                </a:solidFill>
+                <a:latin typeface="Arial" pitchFamily="34" charset="0"/>
+                <a:ea typeface="Arial" pitchFamily="34" charset="-122"/>
+                <a:cs typeface="Arial" pitchFamily="34" charset="-120"/>
+              </a:rPr>
+              <a:t>03</a:t>
+            </a:r>
+            <a:endParaRPr lang="en-US" sz="800" dirty="0"/>
+          </a:p>
+        </p:txBody>
+      </p:sp>
+      <p:sp>
+        <p:nvSpPr>
+          <p:cNvPr id="22" name="Text 19"/>
+          <p:cNvSpPr/>
+          <p:nvPr/>
+        </p:nvSpPr>
+        <p:spPr>
+          <a:xfrm>
+            <a:off x="5413248" y="4617720"/>
+            <a:ext cx="1170432" cy="146304"/>
+          </a:xfrm>
+          <a:prstGeom prst="rect">
+            <a:avLst/>
+          </a:prstGeom>
+          <a:noFill/>
+          <a:ln/>
+        </p:spPr>
+        <p:txBody>
+          <a:bodyPr wrap="square" lIns="0" tIns="0" rIns="0" bIns="0" rtlCol="0" anchor="ctr"/>
+          <a:lstStyle/>
+          <a:p>
+            <a:pPr indent="0" marL="0">
+              <a:buNone/>
+            </a:pPr>
+            <a:r>
+              <a:rPr lang="en-US" sz="1000" b="1" spc="50" kern="0" dirty="0">
+                <a:solidFill>
+                  <a:srgbClr val="101426"/>
+                </a:solidFill>
+                <a:latin typeface="Arial" pitchFamily="34" charset="0"/>
+                <a:ea typeface="Arial" pitchFamily="34" charset="-122"/>
+                <a:cs typeface="Arial" pitchFamily="34" charset="-120"/>
+              </a:rPr>
+              <a:t>SUCCESS</a:t>
+            </a:r>
+            <a:endParaRPr lang="en-US" sz="1000" dirty="0"/>
+          </a:p>
+        </p:txBody>
+      </p:sp>
+      <p:sp>
+        <p:nvSpPr>
+          <p:cNvPr id="23" name="Text 20"/>
+          <p:cNvSpPr/>
+          <p:nvPr/>
+        </p:nvSpPr>
+        <p:spPr>
+          <a:xfrm>
+            <a:off x="6784848" y="4581144"/>
+            <a:ext cx="4251960" cy="256032"/>
+          </a:xfrm>
+          <a:prstGeom prst="rect">
+            <a:avLst/>
+          </a:prstGeom>
+          <a:noFill/>
+          <a:ln/>
+        </p:spPr>
+        <p:txBody>
+          <a:bodyPr wrap="square" lIns="0" tIns="0" rIns="0" bIns="0" rtlCol="0" anchor="ctr">
+            <a:normAutofit/>
+          </a:bodyPr>
+          <a:lstStyle/>
+          <a:p>
+            <a:pPr indent="0" marL="0">
+              <a:buNone/>
+            </a:pPr>
+            <a:r>
+              <a:rPr lang="en-US" sz="950" dirty="0">
+                <a:solidFill>
+                  <a:srgbClr val="646A7E"/>
+                </a:solidFill>
+                <a:latin typeface="Arial" pitchFamily="34" charset="0"/>
+                <a:ea typeface="Arial" pitchFamily="34" charset="-122"/>
+                <a:cs typeface="Arial" pitchFamily="34" charset="-120"/>
+              </a:rPr>
+              <a:t>Agree on reply, opportunity and revenue measures.</a:t>
+            </a:r>
+            <a:endParaRPr lang="en-US" sz="950" dirty="0"/>
+          </a:p>
+        </p:txBody>
+      </p:sp>
+      <p:sp>
+        <p:nvSpPr>
+          <p:cNvPr id="24" name="Text 21"/>
+          <p:cNvSpPr/>
+          <p:nvPr/>
+        </p:nvSpPr>
+        <p:spPr>
+          <a:xfrm>
+            <a:off x="4617720" y="5559552"/>
+            <a:ext cx="6812280" cy="182880"/>
+          </a:xfrm>
+          <a:prstGeom prst="rect">
+            <a:avLst/>
+          </a:prstGeom>
+          <a:noFill/>
+          <a:ln/>
+        </p:spPr>
+        <p:txBody>
+          <a:bodyPr wrap="square" lIns="0" tIns="0" rIns="0" bIns="0" rtlCol="0" anchor="ctr"/>
+          <a:lstStyle/>
+          <a:p>
+            <a:pPr algn="ctr" indent="0" marL="0">
+              <a:buNone/>
+            </a:pPr>
+            <a:r>
+              <a:rPr lang="en-US" sz="900" dirty="0">
+                <a:solidFill>
+                  <a:srgbClr val="646A7E"/>
+                </a:solidFill>
+                <a:latin typeface="Arial" pitchFamily="34" charset="0"/>
+                <a:ea typeface="Arial" pitchFamily="34" charset="-122"/>
+                <a:cs typeface="Arial" pitchFamily="34" charset="-120"/>
+              </a:rPr>
+              <a:t>Preferred connection: Statflo partner API. Practical fallback: CSV or SFTP.</a:t>
             </a:r>
             <a:endParaRPr lang="en-US" sz="900" dirty="0"/>
+          </a:p>
+        </p:txBody>
+      </p:sp>
+      <p:sp>
+        <p:nvSpPr>
+          <p:cNvPr id="25" name="Shape 22"/>
+          <p:cNvSpPr/>
+          <p:nvPr/>
+        </p:nvSpPr>
+        <p:spPr>
+          <a:xfrm>
+            <a:off x="658368" y="6382512"/>
+            <a:ext cx="10835640" cy="0"/>
+          </a:xfrm>
+          <a:prstGeom prst="line">
+            <a:avLst/>
+          </a:prstGeom>
+          <a:noFill/>
+          <a:ln w="8255">
+            <a:solidFill>
+              <a:srgbClr val="E6E2F2"/>
+            </a:solidFill>
+            <a:prstDash val="solid"/>
+          </a:ln>
+        </p:spPr>
+      </p:sp>
+      <p:sp>
+        <p:nvSpPr>
+          <p:cNvPr id="26" name="Text 23"/>
+          <p:cNvSpPr/>
+          <p:nvPr/>
+        </p:nvSpPr>
+        <p:spPr>
+          <a:xfrm>
+            <a:off x="658368" y="6464808"/>
+            <a:ext cx="5029200" cy="118872"/>
+          </a:xfrm>
+          <a:prstGeom prst="rect">
+            <a:avLst/>
+          </a:prstGeom>
+          <a:noFill/>
+          <a:ln/>
+        </p:spPr>
+        <p:txBody>
+          <a:bodyPr wrap="square" lIns="0" tIns="0" rIns="0" bIns="0" rtlCol="0" anchor="ctr"/>
+          <a:lstStyle/>
+          <a:p>
+            <a:pPr indent="0" marL="0">
+              <a:buNone/>
+            </a:pPr>
+            <a:r>
+              <a:rPr lang="en-US" sz="750" dirty="0">
+                <a:solidFill>
+                  <a:srgbClr val="8A8FA0"/>
+                </a:solidFill>
+                <a:latin typeface="Arial" pitchFamily="34" charset="0"/>
+                <a:ea typeface="Arial" pitchFamily="34" charset="-122"/>
+                <a:cs typeface="Arial" pitchFamily="34" charset="-120"/>
+              </a:rPr>
+              <a:t>LeadReacher + Statflo | proposed next step</a:t>
+            </a:r>
+            <a:endParaRPr lang="en-US" sz="750" dirty="0"/>
+          </a:p>
+        </p:txBody>
+      </p:sp>
+      <p:sp>
+        <p:nvSpPr>
+          <p:cNvPr id="25" name="Slide Number Placeholder 0"/>
+          <p:cNvSpPr>
+            <a:spLocks noGrp="1"/>
+          </p:cNvSpPr>
+          <p:nvPr>
+            <p:ph type="sldNum" sz="quarter" idx="4294967295"/>
+          </p:nvPr>
+        </p:nvSpPr>
+        <p:spPr>
+          <a:xfrm>
+            <a:off x="11475720" y="6492240"/>
+            <a:ext cx="228600" cy="146304"/>
+          </a:xfrm>
+          <a:prstGeom prst="rect">
+            <a:avLst/>
+          </a:prstGeom>
+          <a:extLst>
+            <a:ext uri="{C572A759-6A51-4108-AA02-DFA0A04FC94B}">
+              <ma14:wrappingTextBoxFlag xmlns:ma14="http://schemas.microsoft.com/office/mac/drawingml/2011/main" val="0"/>
+            </a:ext>
+          </a:extLst>
+        </p:spPr>
+        <p:txBody>
+          <a:bodyPr lIns="0" tIns="0" rIns="0" bIns="0"/>
+          <a:lstStyle>
+            <a:lvl1pPr>
+              <a:defRPr sz="800">
+                <a:solidFill>
+                  <a:srgbClr val="85899A"/>
+                </a:solidFill>
+                <a:latin typeface="Aptos"/>
+                <a:ea typeface="Aptos"/>
+                <a:cs typeface="Aptos"/>
+              </a:defRPr>
+            </a:lvl1pPr>
+          </a:lstStyle>
+          <a:p>
+            <a:pPr algn="r"/>
+            <a:fld id="{F7021451-1387-4CA6-816F-3879F97B5CBC}" type="slidenum">
+              <a:rPr b="0" lang="en-US"/>
+              <a:t>6</a:t>
+            </a:fld>
+            <a:endParaRPr lang="en-US"/>
           </a:p>
         </p:txBody>
       </p:sp>
@@ -6511,7 +8644,7 @@
     </a:clrScheme>
     <a:fontScheme name="Office">
       <a:majorFont>
-        <a:latin typeface="Aptos Display"/>
+        <a:latin typeface="Arial"/>
         <a:ea typeface=""/>
         <a:cs typeface=""/>
         <a:font script="Jpan" typeface="游ゴシック Light"/>
@@ -6563,7 +8696,7 @@
         <a:font script="Tfng" typeface="Ebrima"/>
       </a:majorFont>
       <a:minorFont>
-        <a:latin typeface="Aptos"/>
+        <a:latin typeface="Arial"/>
         <a:ea typeface=""/>
         <a:cs typeface=""/>
         <a:font script="Jpan" typeface="游ゴシック"/>
